--- a/Sri_Sri_Yoga_Subscription_UX_Master_Deck.pptx
+++ b/Sri_Sri_Yoga_Subscription_UX_Master_Deck.pptx
@@ -5,40 +5,40 @@
     <p:sldMasterId id="2147483648" r:id="rId1"/>
   </p:sldMasterIdLst>
   <p:sldIdLst>
-    <p:sldId id="256" r:id="rId7"/>
-    <p:sldId id="257" r:id="rId8"/>
-    <p:sldId id="258" r:id="rId9"/>
-    <p:sldId id="259" r:id="rId10"/>
-    <p:sldId id="260" r:id="rId11"/>
-    <p:sldId id="261" r:id="rId12"/>
-    <p:sldId id="262" r:id="rId13"/>
-    <p:sldId id="263" r:id="rId14"/>
-    <p:sldId id="264" r:id="rId15"/>
-    <p:sldId id="265" r:id="rId16"/>
-    <p:sldId id="266" r:id="rId17"/>
-    <p:sldId id="267" r:id="rId18"/>
-    <p:sldId id="268" r:id="rId19"/>
-    <p:sldId id="269" r:id="rId20"/>
-    <p:sldId id="270" r:id="rId21"/>
-    <p:sldId id="271" r:id="rId22"/>
-    <p:sldId id="272" r:id="rId23"/>
-    <p:sldId id="273" r:id="rId24"/>
-    <p:sldId id="274" r:id="rId25"/>
-    <p:sldId id="275" r:id="rId26"/>
-    <p:sldId id="276" r:id="rId27"/>
-    <p:sldId id="277" r:id="rId28"/>
-    <p:sldId id="278" r:id="rId29"/>
-    <p:sldId id="279" r:id="rId30"/>
-    <p:sldId id="280" r:id="rId31"/>
-    <p:sldId id="281" r:id="rId32"/>
-    <p:sldId id="282" r:id="rId33"/>
-    <p:sldId id="283" r:id="rId34"/>
-    <p:sldId id="284" r:id="rId35"/>
-    <p:sldId id="285" r:id="rId36"/>
-    <p:sldId id="286" r:id="rId37"/>
-    <p:sldId id="287" r:id="rId38"/>
+    <p:sldId id="256" r:id="rId2"/>
+    <p:sldId id="257" r:id="rId3"/>
+    <p:sldId id="258" r:id="rId4"/>
+    <p:sldId id="259" r:id="rId5"/>
+    <p:sldId id="260" r:id="rId6"/>
+    <p:sldId id="261" r:id="rId7"/>
+    <p:sldId id="262" r:id="rId8"/>
+    <p:sldId id="263" r:id="rId9"/>
+    <p:sldId id="264" r:id="rId10"/>
+    <p:sldId id="265" r:id="rId11"/>
+    <p:sldId id="266" r:id="rId12"/>
+    <p:sldId id="267" r:id="rId13"/>
+    <p:sldId id="268" r:id="rId14"/>
+    <p:sldId id="269" r:id="rId15"/>
+    <p:sldId id="270" r:id="rId16"/>
+    <p:sldId id="271" r:id="rId17"/>
+    <p:sldId id="272" r:id="rId18"/>
+    <p:sldId id="273" r:id="rId19"/>
+    <p:sldId id="274" r:id="rId20"/>
+    <p:sldId id="275" r:id="rId21"/>
+    <p:sldId id="276" r:id="rId22"/>
+    <p:sldId id="277" r:id="rId23"/>
+    <p:sldId id="278" r:id="rId24"/>
+    <p:sldId id="279" r:id="rId25"/>
+    <p:sldId id="280" r:id="rId26"/>
+    <p:sldId id="281" r:id="rId27"/>
+    <p:sldId id="282" r:id="rId28"/>
+    <p:sldId id="283" r:id="rId29"/>
+    <p:sldId id="284" r:id="rId30"/>
+    <p:sldId id="285" r:id="rId31"/>
+    <p:sldId id="286" r:id="rId32"/>
+    <p:sldId id="287" r:id="rId33"/>
   </p:sldIdLst>
-  <p:sldSz cx="12191695" cy="6858000" type="screen4x3"/>
+  <p:sldSz cx="12192000" cy="6858000"/>
   <p:notesSz cx="6858000" cy="9144000"/>
   <p:defaultTextStyle>
     <a:defPPr>
@@ -135,7 +135,1633 @@
       </a:defRPr>
     </a:lvl9pPr>
   </p:defaultTextStyle>
+  <p:extLst>
+    <p:ext uri="{EFAFB233-063F-42B5-8137-9DF3F51BA10A}">
+      <p15:sldGuideLst xmlns:p15="http://schemas.microsoft.com/office/powerpoint/2012/main">
+        <p15:guide id="1" orient="horz" pos="2160">
+          <p15:clr>
+            <a:srgbClr val="A4A3A4"/>
+          </p15:clr>
+        </p15:guide>
+        <p15:guide id="2" pos="2880">
+          <p15:clr>
+            <a:srgbClr val="A4A3A4"/>
+          </p15:clr>
+        </p15:guide>
+      </p15:sldGuideLst>
+    </p:ext>
+  </p:extLst>
 </p:presentation>
+</file>
+
+<file path=ppt/changesInfos/changesInfo1.xml><?xml version="1.0" encoding="utf-8"?>
+<pc:chgInfo xmlns:a="http://schemas.openxmlformats.org/drawingml/2006/main" xmlns:r="http://schemas.openxmlformats.org/officeDocument/2006/relationships" xmlns:ac="http://schemas.microsoft.com/office/drawing/2013/main/command" xmlns:pc="http://schemas.microsoft.com/office/powerpoint/2013/main/command">
+  <pc:docChgLst>
+    <pc:chgData name="pragathi mudavath" userId="78fa310ea366d2e9" providerId="LiveId" clId="{789AFF9C-6324-4289-A034-E6789D76A855}"/>
+    <pc:docChg chg="undo custSel modSld">
+      <pc:chgData name="pragathi mudavath" userId="78fa310ea366d2e9" providerId="LiveId" clId="{789AFF9C-6324-4289-A034-E6789D76A855}" dt="2026-09-02T08:15:55.346" v="48" actId="255"/>
+      <pc:docMkLst>
+        <pc:docMk/>
+      </pc:docMkLst>
+      <pc:sldChg chg="modSp mod">
+        <pc:chgData name="pragathi mudavath" userId="78fa310ea366d2e9" providerId="LiveId" clId="{789AFF9C-6324-4289-A034-E6789D76A855}" dt="2026-09-02T08:09:10.823" v="3" actId="20577"/>
+        <pc:sldMkLst>
+          <pc:docMk/>
+          <pc:sldMk cId="0" sldId="256"/>
+        </pc:sldMkLst>
+        <pc:spChg chg="mod">
+          <ac:chgData name="pragathi mudavath" userId="78fa310ea366d2e9" providerId="LiveId" clId="{789AFF9C-6324-4289-A034-E6789D76A855}" dt="2026-09-02T08:09:10.823" v="3" actId="20577"/>
+          <ac:spMkLst>
+            <pc:docMk/>
+            <pc:sldMk cId="0" sldId="256"/>
+            <ac:spMk id="4" creationId="{00000000-0000-0000-0000-000000000000}"/>
+          </ac:spMkLst>
+        </pc:spChg>
+      </pc:sldChg>
+      <pc:sldChg chg="modSp mod">
+        <pc:chgData name="pragathi mudavath" userId="78fa310ea366d2e9" providerId="LiveId" clId="{789AFF9C-6324-4289-A034-E6789D76A855}" dt="2026-09-02T08:09:59.123" v="13" actId="255"/>
+        <pc:sldMkLst>
+          <pc:docMk/>
+          <pc:sldMk cId="0" sldId="257"/>
+        </pc:sldMkLst>
+        <pc:spChg chg="mod">
+          <ac:chgData name="pragathi mudavath" userId="78fa310ea366d2e9" providerId="LiveId" clId="{789AFF9C-6324-4289-A034-E6789D76A855}" dt="2026-09-02T08:09:59.123" v="13" actId="255"/>
+          <ac:spMkLst>
+            <pc:docMk/>
+            <pc:sldMk cId="0" sldId="257"/>
+            <ac:spMk id="2" creationId="{00000000-0000-0000-0000-000000000000}"/>
+          </ac:spMkLst>
+        </pc:spChg>
+        <pc:spChg chg="mod">
+          <ac:chgData name="pragathi mudavath" userId="78fa310ea366d2e9" providerId="LiveId" clId="{789AFF9C-6324-4289-A034-E6789D76A855}" dt="2026-09-02T08:09:59.123" v="13" actId="255"/>
+          <ac:spMkLst>
+            <pc:docMk/>
+            <pc:sldMk cId="0" sldId="257"/>
+            <ac:spMk id="3" creationId="{00000000-0000-0000-0000-000000000000}"/>
+          </ac:spMkLst>
+        </pc:spChg>
+        <pc:spChg chg="mod">
+          <ac:chgData name="pragathi mudavath" userId="78fa310ea366d2e9" providerId="LiveId" clId="{789AFF9C-6324-4289-A034-E6789D76A855}" dt="2026-09-02T08:09:59.123" v="13" actId="255"/>
+          <ac:spMkLst>
+            <pc:docMk/>
+            <pc:sldMk cId="0" sldId="257"/>
+            <ac:spMk id="4" creationId="{00000000-0000-0000-0000-000000000000}"/>
+          </ac:spMkLst>
+        </pc:spChg>
+        <pc:spChg chg="mod">
+          <ac:chgData name="pragathi mudavath" userId="78fa310ea366d2e9" providerId="LiveId" clId="{789AFF9C-6324-4289-A034-E6789D76A855}" dt="2026-09-02T08:09:59.123" v="13" actId="255"/>
+          <ac:spMkLst>
+            <pc:docMk/>
+            <pc:sldMk cId="0" sldId="257"/>
+            <ac:spMk id="5" creationId="{00000000-0000-0000-0000-000000000000}"/>
+          </ac:spMkLst>
+        </pc:spChg>
+        <pc:spChg chg="mod">
+          <ac:chgData name="pragathi mudavath" userId="78fa310ea366d2e9" providerId="LiveId" clId="{789AFF9C-6324-4289-A034-E6789D76A855}" dt="2026-09-02T08:09:59.123" v="13" actId="255"/>
+          <ac:spMkLst>
+            <pc:docMk/>
+            <pc:sldMk cId="0" sldId="257"/>
+            <ac:spMk id="6" creationId="{00000000-0000-0000-0000-000000000000}"/>
+          </ac:spMkLst>
+        </pc:spChg>
+        <pc:spChg chg="mod">
+          <ac:chgData name="pragathi mudavath" userId="78fa310ea366d2e9" providerId="LiveId" clId="{789AFF9C-6324-4289-A034-E6789D76A855}" dt="2026-09-02T08:09:59.123" v="13" actId="255"/>
+          <ac:spMkLst>
+            <pc:docMk/>
+            <pc:sldMk cId="0" sldId="257"/>
+            <ac:spMk id="7" creationId="{00000000-0000-0000-0000-000000000000}"/>
+          </ac:spMkLst>
+        </pc:spChg>
+        <pc:spChg chg="mod">
+          <ac:chgData name="pragathi mudavath" userId="78fa310ea366d2e9" providerId="LiveId" clId="{789AFF9C-6324-4289-A034-E6789D76A855}" dt="2026-09-02T08:09:59.123" v="13" actId="255"/>
+          <ac:spMkLst>
+            <pc:docMk/>
+            <pc:sldMk cId="0" sldId="257"/>
+            <ac:spMk id="8" creationId="{00000000-0000-0000-0000-000000000000}"/>
+          </ac:spMkLst>
+        </pc:spChg>
+        <pc:spChg chg="mod">
+          <ac:chgData name="pragathi mudavath" userId="78fa310ea366d2e9" providerId="LiveId" clId="{789AFF9C-6324-4289-A034-E6789D76A855}" dt="2026-09-02T08:09:59.123" v="13" actId="255"/>
+          <ac:spMkLst>
+            <pc:docMk/>
+            <pc:sldMk cId="0" sldId="257"/>
+            <ac:spMk id="9" creationId="{00000000-0000-0000-0000-000000000000}"/>
+          </ac:spMkLst>
+        </pc:spChg>
+      </pc:sldChg>
+      <pc:sldChg chg="modSp mod">
+        <pc:chgData name="pragathi mudavath" userId="78fa310ea366d2e9" providerId="LiveId" clId="{789AFF9C-6324-4289-A034-E6789D76A855}" dt="2026-09-02T08:10:29.546" v="16" actId="255"/>
+        <pc:sldMkLst>
+          <pc:docMk/>
+          <pc:sldMk cId="0" sldId="258"/>
+        </pc:sldMkLst>
+        <pc:spChg chg="mod">
+          <ac:chgData name="pragathi mudavath" userId="78fa310ea366d2e9" providerId="LiveId" clId="{789AFF9C-6324-4289-A034-E6789D76A855}" dt="2026-09-02T08:10:29.546" v="16" actId="255"/>
+          <ac:spMkLst>
+            <pc:docMk/>
+            <pc:sldMk cId="0" sldId="258"/>
+            <ac:spMk id="2" creationId="{00000000-0000-0000-0000-000000000000}"/>
+          </ac:spMkLst>
+        </pc:spChg>
+        <pc:spChg chg="mod">
+          <ac:chgData name="pragathi mudavath" userId="78fa310ea366d2e9" providerId="LiveId" clId="{789AFF9C-6324-4289-A034-E6789D76A855}" dt="2026-09-02T08:10:29.546" v="16" actId="255"/>
+          <ac:spMkLst>
+            <pc:docMk/>
+            <pc:sldMk cId="0" sldId="258"/>
+            <ac:spMk id="3" creationId="{00000000-0000-0000-0000-000000000000}"/>
+          </ac:spMkLst>
+        </pc:spChg>
+        <pc:spChg chg="mod">
+          <ac:chgData name="pragathi mudavath" userId="78fa310ea366d2e9" providerId="LiveId" clId="{789AFF9C-6324-4289-A034-E6789D76A855}" dt="2026-09-02T08:10:29.546" v="16" actId="255"/>
+          <ac:spMkLst>
+            <pc:docMk/>
+            <pc:sldMk cId="0" sldId="258"/>
+            <ac:spMk id="4" creationId="{00000000-0000-0000-0000-000000000000}"/>
+          </ac:spMkLst>
+        </pc:spChg>
+        <pc:spChg chg="mod">
+          <ac:chgData name="pragathi mudavath" userId="78fa310ea366d2e9" providerId="LiveId" clId="{789AFF9C-6324-4289-A034-E6789D76A855}" dt="2026-09-02T08:10:29.546" v="16" actId="255"/>
+          <ac:spMkLst>
+            <pc:docMk/>
+            <pc:sldMk cId="0" sldId="258"/>
+            <ac:spMk id="5" creationId="{00000000-0000-0000-0000-000000000000}"/>
+          </ac:spMkLst>
+        </pc:spChg>
+        <pc:spChg chg="mod">
+          <ac:chgData name="pragathi mudavath" userId="78fa310ea366d2e9" providerId="LiveId" clId="{789AFF9C-6324-4289-A034-E6789D76A855}" dt="2026-09-02T08:10:29.546" v="16" actId="255"/>
+          <ac:spMkLst>
+            <pc:docMk/>
+            <pc:sldMk cId="0" sldId="258"/>
+            <ac:spMk id="6" creationId="{00000000-0000-0000-0000-000000000000}"/>
+          </ac:spMkLst>
+        </pc:spChg>
+        <pc:spChg chg="mod">
+          <ac:chgData name="pragathi mudavath" userId="78fa310ea366d2e9" providerId="LiveId" clId="{789AFF9C-6324-4289-A034-E6789D76A855}" dt="2026-09-02T08:10:29.546" v="16" actId="255"/>
+          <ac:spMkLst>
+            <pc:docMk/>
+            <pc:sldMk cId="0" sldId="258"/>
+            <ac:spMk id="7" creationId="{00000000-0000-0000-0000-000000000000}"/>
+          </ac:spMkLst>
+        </pc:spChg>
+      </pc:sldChg>
+      <pc:sldChg chg="modSp mod">
+        <pc:chgData name="pragathi mudavath" userId="78fa310ea366d2e9" providerId="LiveId" clId="{789AFF9C-6324-4289-A034-E6789D76A855}" dt="2026-09-02T08:10:40.043" v="17" actId="255"/>
+        <pc:sldMkLst>
+          <pc:docMk/>
+          <pc:sldMk cId="0" sldId="259"/>
+        </pc:sldMkLst>
+        <pc:spChg chg="mod">
+          <ac:chgData name="pragathi mudavath" userId="78fa310ea366d2e9" providerId="LiveId" clId="{789AFF9C-6324-4289-A034-E6789D76A855}" dt="2026-09-02T08:10:40.043" v="17" actId="255"/>
+          <ac:spMkLst>
+            <pc:docMk/>
+            <pc:sldMk cId="0" sldId="259"/>
+            <ac:spMk id="2" creationId="{00000000-0000-0000-0000-000000000000}"/>
+          </ac:spMkLst>
+        </pc:spChg>
+        <pc:spChg chg="mod">
+          <ac:chgData name="pragathi mudavath" userId="78fa310ea366d2e9" providerId="LiveId" clId="{789AFF9C-6324-4289-A034-E6789D76A855}" dt="2026-09-02T08:10:40.043" v="17" actId="255"/>
+          <ac:spMkLst>
+            <pc:docMk/>
+            <pc:sldMk cId="0" sldId="259"/>
+            <ac:spMk id="3" creationId="{00000000-0000-0000-0000-000000000000}"/>
+          </ac:spMkLst>
+        </pc:spChg>
+        <pc:spChg chg="mod">
+          <ac:chgData name="pragathi mudavath" userId="78fa310ea366d2e9" providerId="LiveId" clId="{789AFF9C-6324-4289-A034-E6789D76A855}" dt="2026-09-02T08:10:40.043" v="17" actId="255"/>
+          <ac:spMkLst>
+            <pc:docMk/>
+            <pc:sldMk cId="0" sldId="259"/>
+            <ac:spMk id="4" creationId="{00000000-0000-0000-0000-000000000000}"/>
+          </ac:spMkLst>
+        </pc:spChg>
+        <pc:spChg chg="mod">
+          <ac:chgData name="pragathi mudavath" userId="78fa310ea366d2e9" providerId="LiveId" clId="{789AFF9C-6324-4289-A034-E6789D76A855}" dt="2026-09-02T08:10:40.043" v="17" actId="255"/>
+          <ac:spMkLst>
+            <pc:docMk/>
+            <pc:sldMk cId="0" sldId="259"/>
+            <ac:spMk id="5" creationId="{00000000-0000-0000-0000-000000000000}"/>
+          </ac:spMkLst>
+        </pc:spChg>
+        <pc:spChg chg="mod">
+          <ac:chgData name="pragathi mudavath" userId="78fa310ea366d2e9" providerId="LiveId" clId="{789AFF9C-6324-4289-A034-E6789D76A855}" dt="2026-09-02T08:10:40.043" v="17" actId="255"/>
+          <ac:spMkLst>
+            <pc:docMk/>
+            <pc:sldMk cId="0" sldId="259"/>
+            <ac:spMk id="6" creationId="{00000000-0000-0000-0000-000000000000}"/>
+          </ac:spMkLst>
+        </pc:spChg>
+        <pc:spChg chg="mod">
+          <ac:chgData name="pragathi mudavath" userId="78fa310ea366d2e9" providerId="LiveId" clId="{789AFF9C-6324-4289-A034-E6789D76A855}" dt="2026-09-02T08:10:40.043" v="17" actId="255"/>
+          <ac:spMkLst>
+            <pc:docMk/>
+            <pc:sldMk cId="0" sldId="259"/>
+            <ac:spMk id="7" creationId="{00000000-0000-0000-0000-000000000000}"/>
+          </ac:spMkLst>
+        </pc:spChg>
+        <pc:spChg chg="mod">
+          <ac:chgData name="pragathi mudavath" userId="78fa310ea366d2e9" providerId="LiveId" clId="{789AFF9C-6324-4289-A034-E6789D76A855}" dt="2026-09-02T08:10:40.043" v="17" actId="255"/>
+          <ac:spMkLst>
+            <pc:docMk/>
+            <pc:sldMk cId="0" sldId="259"/>
+            <ac:spMk id="8" creationId="{00000000-0000-0000-0000-000000000000}"/>
+          </ac:spMkLst>
+        </pc:spChg>
+        <pc:spChg chg="mod">
+          <ac:chgData name="pragathi mudavath" userId="78fa310ea366d2e9" providerId="LiveId" clId="{789AFF9C-6324-4289-A034-E6789D76A855}" dt="2026-09-02T08:10:40.043" v="17" actId="255"/>
+          <ac:spMkLst>
+            <pc:docMk/>
+            <pc:sldMk cId="0" sldId="259"/>
+            <ac:spMk id="9" creationId="{00000000-0000-0000-0000-000000000000}"/>
+          </ac:spMkLst>
+        </pc:spChg>
+        <pc:spChg chg="mod">
+          <ac:chgData name="pragathi mudavath" userId="78fa310ea366d2e9" providerId="LiveId" clId="{789AFF9C-6324-4289-A034-E6789D76A855}" dt="2026-09-02T08:10:40.043" v="17" actId="255"/>
+          <ac:spMkLst>
+            <pc:docMk/>
+            <pc:sldMk cId="0" sldId="259"/>
+            <ac:spMk id="10" creationId="{00000000-0000-0000-0000-000000000000}"/>
+          </ac:spMkLst>
+        </pc:spChg>
+        <pc:spChg chg="mod">
+          <ac:chgData name="pragathi mudavath" userId="78fa310ea366d2e9" providerId="LiveId" clId="{789AFF9C-6324-4289-A034-E6789D76A855}" dt="2026-09-02T08:10:40.043" v="17" actId="255"/>
+          <ac:spMkLst>
+            <pc:docMk/>
+            <pc:sldMk cId="0" sldId="259"/>
+            <ac:spMk id="11" creationId="{00000000-0000-0000-0000-000000000000}"/>
+          </ac:spMkLst>
+        </pc:spChg>
+      </pc:sldChg>
+      <pc:sldChg chg="modSp mod">
+        <pc:chgData name="pragathi mudavath" userId="78fa310ea366d2e9" providerId="LiveId" clId="{789AFF9C-6324-4289-A034-E6789D76A855}" dt="2026-09-02T08:10:54.019" v="18" actId="255"/>
+        <pc:sldMkLst>
+          <pc:docMk/>
+          <pc:sldMk cId="0" sldId="260"/>
+        </pc:sldMkLst>
+        <pc:spChg chg="mod">
+          <ac:chgData name="pragathi mudavath" userId="78fa310ea366d2e9" providerId="LiveId" clId="{789AFF9C-6324-4289-A034-E6789D76A855}" dt="2026-09-02T08:10:54.019" v="18" actId="255"/>
+          <ac:spMkLst>
+            <pc:docMk/>
+            <pc:sldMk cId="0" sldId="260"/>
+            <ac:spMk id="2" creationId="{00000000-0000-0000-0000-000000000000}"/>
+          </ac:spMkLst>
+        </pc:spChg>
+        <pc:spChg chg="mod">
+          <ac:chgData name="pragathi mudavath" userId="78fa310ea366d2e9" providerId="LiveId" clId="{789AFF9C-6324-4289-A034-E6789D76A855}" dt="2026-09-02T08:10:54.019" v="18" actId="255"/>
+          <ac:spMkLst>
+            <pc:docMk/>
+            <pc:sldMk cId="0" sldId="260"/>
+            <ac:spMk id="3" creationId="{00000000-0000-0000-0000-000000000000}"/>
+          </ac:spMkLst>
+        </pc:spChg>
+        <pc:spChg chg="mod">
+          <ac:chgData name="pragathi mudavath" userId="78fa310ea366d2e9" providerId="LiveId" clId="{789AFF9C-6324-4289-A034-E6789D76A855}" dt="2026-09-02T08:10:54.019" v="18" actId="255"/>
+          <ac:spMkLst>
+            <pc:docMk/>
+            <pc:sldMk cId="0" sldId="260"/>
+            <ac:spMk id="4" creationId="{00000000-0000-0000-0000-000000000000}"/>
+          </ac:spMkLst>
+        </pc:spChg>
+        <pc:spChg chg="mod">
+          <ac:chgData name="pragathi mudavath" userId="78fa310ea366d2e9" providerId="LiveId" clId="{789AFF9C-6324-4289-A034-E6789D76A855}" dt="2026-09-02T08:10:54.019" v="18" actId="255"/>
+          <ac:spMkLst>
+            <pc:docMk/>
+            <pc:sldMk cId="0" sldId="260"/>
+            <ac:spMk id="5" creationId="{00000000-0000-0000-0000-000000000000}"/>
+          </ac:spMkLst>
+        </pc:spChg>
+        <pc:spChg chg="mod">
+          <ac:chgData name="pragathi mudavath" userId="78fa310ea366d2e9" providerId="LiveId" clId="{789AFF9C-6324-4289-A034-E6789D76A855}" dt="2026-09-02T08:10:54.019" v="18" actId="255"/>
+          <ac:spMkLst>
+            <pc:docMk/>
+            <pc:sldMk cId="0" sldId="260"/>
+            <ac:spMk id="6" creationId="{00000000-0000-0000-0000-000000000000}"/>
+          </ac:spMkLst>
+        </pc:spChg>
+        <pc:spChg chg="mod">
+          <ac:chgData name="pragathi mudavath" userId="78fa310ea366d2e9" providerId="LiveId" clId="{789AFF9C-6324-4289-A034-E6789D76A855}" dt="2026-09-02T08:10:54.019" v="18" actId="255"/>
+          <ac:spMkLst>
+            <pc:docMk/>
+            <pc:sldMk cId="0" sldId="260"/>
+            <ac:spMk id="7" creationId="{00000000-0000-0000-0000-000000000000}"/>
+          </ac:spMkLst>
+        </pc:spChg>
+        <pc:spChg chg="mod">
+          <ac:chgData name="pragathi mudavath" userId="78fa310ea366d2e9" providerId="LiveId" clId="{789AFF9C-6324-4289-A034-E6789D76A855}" dt="2026-09-02T08:10:54.019" v="18" actId="255"/>
+          <ac:spMkLst>
+            <pc:docMk/>
+            <pc:sldMk cId="0" sldId="260"/>
+            <ac:spMk id="8" creationId="{00000000-0000-0000-0000-000000000000}"/>
+          </ac:spMkLst>
+        </pc:spChg>
+        <pc:spChg chg="mod">
+          <ac:chgData name="pragathi mudavath" userId="78fa310ea366d2e9" providerId="LiveId" clId="{789AFF9C-6324-4289-A034-E6789D76A855}" dt="2026-09-02T08:10:54.019" v="18" actId="255"/>
+          <ac:spMkLst>
+            <pc:docMk/>
+            <pc:sldMk cId="0" sldId="260"/>
+            <ac:spMk id="9" creationId="{00000000-0000-0000-0000-000000000000}"/>
+          </ac:spMkLst>
+        </pc:spChg>
+      </pc:sldChg>
+      <pc:sldChg chg="modSp mod">
+        <pc:chgData name="pragathi mudavath" userId="78fa310ea366d2e9" providerId="LiveId" clId="{789AFF9C-6324-4289-A034-E6789D76A855}" dt="2026-09-02T08:11:04.495" v="19" actId="255"/>
+        <pc:sldMkLst>
+          <pc:docMk/>
+          <pc:sldMk cId="0" sldId="261"/>
+        </pc:sldMkLst>
+        <pc:spChg chg="mod">
+          <ac:chgData name="pragathi mudavath" userId="78fa310ea366d2e9" providerId="LiveId" clId="{789AFF9C-6324-4289-A034-E6789D76A855}" dt="2026-09-02T08:11:04.495" v="19" actId="255"/>
+          <ac:spMkLst>
+            <pc:docMk/>
+            <pc:sldMk cId="0" sldId="261"/>
+            <ac:spMk id="2" creationId="{00000000-0000-0000-0000-000000000000}"/>
+          </ac:spMkLst>
+        </pc:spChg>
+        <pc:spChg chg="mod">
+          <ac:chgData name="pragathi mudavath" userId="78fa310ea366d2e9" providerId="LiveId" clId="{789AFF9C-6324-4289-A034-E6789D76A855}" dt="2026-09-02T08:11:04.495" v="19" actId="255"/>
+          <ac:spMkLst>
+            <pc:docMk/>
+            <pc:sldMk cId="0" sldId="261"/>
+            <ac:spMk id="3" creationId="{00000000-0000-0000-0000-000000000000}"/>
+          </ac:spMkLst>
+        </pc:spChg>
+        <pc:spChg chg="mod">
+          <ac:chgData name="pragathi mudavath" userId="78fa310ea366d2e9" providerId="LiveId" clId="{789AFF9C-6324-4289-A034-E6789D76A855}" dt="2026-09-02T08:11:04.495" v="19" actId="255"/>
+          <ac:spMkLst>
+            <pc:docMk/>
+            <pc:sldMk cId="0" sldId="261"/>
+            <ac:spMk id="4" creationId="{00000000-0000-0000-0000-000000000000}"/>
+          </ac:spMkLst>
+        </pc:spChg>
+        <pc:spChg chg="mod">
+          <ac:chgData name="pragathi mudavath" userId="78fa310ea366d2e9" providerId="LiveId" clId="{789AFF9C-6324-4289-A034-E6789D76A855}" dt="2026-09-02T08:11:04.495" v="19" actId="255"/>
+          <ac:spMkLst>
+            <pc:docMk/>
+            <pc:sldMk cId="0" sldId="261"/>
+            <ac:spMk id="5" creationId="{00000000-0000-0000-0000-000000000000}"/>
+          </ac:spMkLst>
+        </pc:spChg>
+        <pc:spChg chg="mod">
+          <ac:chgData name="pragathi mudavath" userId="78fa310ea366d2e9" providerId="LiveId" clId="{789AFF9C-6324-4289-A034-E6789D76A855}" dt="2026-09-02T08:11:04.495" v="19" actId="255"/>
+          <ac:spMkLst>
+            <pc:docMk/>
+            <pc:sldMk cId="0" sldId="261"/>
+            <ac:spMk id="6" creationId="{00000000-0000-0000-0000-000000000000}"/>
+          </ac:spMkLst>
+        </pc:spChg>
+        <pc:spChg chg="mod">
+          <ac:chgData name="pragathi mudavath" userId="78fa310ea366d2e9" providerId="LiveId" clId="{789AFF9C-6324-4289-A034-E6789D76A855}" dt="2026-09-02T08:11:04.495" v="19" actId="255"/>
+          <ac:spMkLst>
+            <pc:docMk/>
+            <pc:sldMk cId="0" sldId="261"/>
+            <ac:spMk id="7" creationId="{00000000-0000-0000-0000-000000000000}"/>
+          </ac:spMkLst>
+        </pc:spChg>
+      </pc:sldChg>
+      <pc:sldChg chg="modSp mod">
+        <pc:chgData name="pragathi mudavath" userId="78fa310ea366d2e9" providerId="LiveId" clId="{789AFF9C-6324-4289-A034-E6789D76A855}" dt="2026-09-02T08:12:02.093" v="23" actId="255"/>
+        <pc:sldMkLst>
+          <pc:docMk/>
+          <pc:sldMk cId="0" sldId="262"/>
+        </pc:sldMkLst>
+        <pc:spChg chg="mod">
+          <ac:chgData name="pragathi mudavath" userId="78fa310ea366d2e9" providerId="LiveId" clId="{789AFF9C-6324-4289-A034-E6789D76A855}" dt="2026-09-02T08:12:02.093" v="23" actId="255"/>
+          <ac:spMkLst>
+            <pc:docMk/>
+            <pc:sldMk cId="0" sldId="262"/>
+            <ac:spMk id="2" creationId="{00000000-0000-0000-0000-000000000000}"/>
+          </ac:spMkLst>
+        </pc:spChg>
+        <pc:spChg chg="mod">
+          <ac:chgData name="pragathi mudavath" userId="78fa310ea366d2e9" providerId="LiveId" clId="{789AFF9C-6324-4289-A034-E6789D76A855}" dt="2026-09-02T08:12:02.093" v="23" actId="255"/>
+          <ac:spMkLst>
+            <pc:docMk/>
+            <pc:sldMk cId="0" sldId="262"/>
+            <ac:spMk id="3" creationId="{00000000-0000-0000-0000-000000000000}"/>
+          </ac:spMkLst>
+        </pc:spChg>
+        <pc:spChg chg="mod">
+          <ac:chgData name="pragathi mudavath" userId="78fa310ea366d2e9" providerId="LiveId" clId="{789AFF9C-6324-4289-A034-E6789D76A855}" dt="2026-09-02T08:12:02.093" v="23" actId="255"/>
+          <ac:spMkLst>
+            <pc:docMk/>
+            <pc:sldMk cId="0" sldId="262"/>
+            <ac:spMk id="4" creationId="{00000000-0000-0000-0000-000000000000}"/>
+          </ac:spMkLst>
+        </pc:spChg>
+        <pc:spChg chg="mod">
+          <ac:chgData name="pragathi mudavath" userId="78fa310ea366d2e9" providerId="LiveId" clId="{789AFF9C-6324-4289-A034-E6789D76A855}" dt="2026-09-02T08:12:02.093" v="23" actId="255"/>
+          <ac:spMkLst>
+            <pc:docMk/>
+            <pc:sldMk cId="0" sldId="262"/>
+            <ac:spMk id="5" creationId="{00000000-0000-0000-0000-000000000000}"/>
+          </ac:spMkLst>
+        </pc:spChg>
+        <pc:graphicFrameChg chg="modGraphic">
+          <ac:chgData name="pragathi mudavath" userId="78fa310ea366d2e9" providerId="LiveId" clId="{789AFF9C-6324-4289-A034-E6789D76A855}" dt="2026-09-02T08:11:49.783" v="22" actId="255"/>
+          <ac:graphicFrameMkLst>
+            <pc:docMk/>
+            <pc:sldMk cId="0" sldId="262"/>
+            <ac:graphicFrameMk id="6" creationId="{00000000-0000-0000-0000-000000000000}"/>
+          </ac:graphicFrameMkLst>
+        </pc:graphicFrameChg>
+      </pc:sldChg>
+      <pc:sldChg chg="modSp mod">
+        <pc:chgData name="pragathi mudavath" userId="78fa310ea366d2e9" providerId="LiveId" clId="{789AFF9C-6324-4289-A034-E6789D76A855}" dt="2026-09-02T08:12:15.183" v="24" actId="255"/>
+        <pc:sldMkLst>
+          <pc:docMk/>
+          <pc:sldMk cId="0" sldId="263"/>
+        </pc:sldMkLst>
+        <pc:spChg chg="mod">
+          <ac:chgData name="pragathi mudavath" userId="78fa310ea366d2e9" providerId="LiveId" clId="{789AFF9C-6324-4289-A034-E6789D76A855}" dt="2026-09-02T08:12:15.183" v="24" actId="255"/>
+          <ac:spMkLst>
+            <pc:docMk/>
+            <pc:sldMk cId="0" sldId="263"/>
+            <ac:spMk id="2" creationId="{00000000-0000-0000-0000-000000000000}"/>
+          </ac:spMkLst>
+        </pc:spChg>
+        <pc:spChg chg="mod">
+          <ac:chgData name="pragathi mudavath" userId="78fa310ea366d2e9" providerId="LiveId" clId="{789AFF9C-6324-4289-A034-E6789D76A855}" dt="2026-09-02T08:12:15.183" v="24" actId="255"/>
+          <ac:spMkLst>
+            <pc:docMk/>
+            <pc:sldMk cId="0" sldId="263"/>
+            <ac:spMk id="3" creationId="{00000000-0000-0000-0000-000000000000}"/>
+          </ac:spMkLst>
+        </pc:spChg>
+        <pc:spChg chg="mod">
+          <ac:chgData name="pragathi mudavath" userId="78fa310ea366d2e9" providerId="LiveId" clId="{789AFF9C-6324-4289-A034-E6789D76A855}" dt="2026-09-02T08:12:15.183" v="24" actId="255"/>
+          <ac:spMkLst>
+            <pc:docMk/>
+            <pc:sldMk cId="0" sldId="263"/>
+            <ac:spMk id="4" creationId="{00000000-0000-0000-0000-000000000000}"/>
+          </ac:spMkLst>
+        </pc:spChg>
+        <pc:spChg chg="mod">
+          <ac:chgData name="pragathi mudavath" userId="78fa310ea366d2e9" providerId="LiveId" clId="{789AFF9C-6324-4289-A034-E6789D76A855}" dt="2026-09-02T08:12:15.183" v="24" actId="255"/>
+          <ac:spMkLst>
+            <pc:docMk/>
+            <pc:sldMk cId="0" sldId="263"/>
+            <ac:spMk id="5" creationId="{00000000-0000-0000-0000-000000000000}"/>
+          </ac:spMkLst>
+        </pc:spChg>
+        <pc:spChg chg="mod">
+          <ac:chgData name="pragathi mudavath" userId="78fa310ea366d2e9" providerId="LiveId" clId="{789AFF9C-6324-4289-A034-E6789D76A855}" dt="2026-09-02T08:12:15.183" v="24" actId="255"/>
+          <ac:spMkLst>
+            <pc:docMk/>
+            <pc:sldMk cId="0" sldId="263"/>
+            <ac:spMk id="6" creationId="{00000000-0000-0000-0000-000000000000}"/>
+          </ac:spMkLst>
+        </pc:spChg>
+        <pc:spChg chg="mod">
+          <ac:chgData name="pragathi mudavath" userId="78fa310ea366d2e9" providerId="LiveId" clId="{789AFF9C-6324-4289-A034-E6789D76A855}" dt="2026-09-02T08:12:15.183" v="24" actId="255"/>
+          <ac:spMkLst>
+            <pc:docMk/>
+            <pc:sldMk cId="0" sldId="263"/>
+            <ac:spMk id="7" creationId="{00000000-0000-0000-0000-000000000000}"/>
+          </ac:spMkLst>
+        </pc:spChg>
+      </pc:sldChg>
+      <pc:sldChg chg="modSp mod">
+        <pc:chgData name="pragathi mudavath" userId="78fa310ea366d2e9" providerId="LiveId" clId="{789AFF9C-6324-4289-A034-E6789D76A855}" dt="2026-09-02T08:12:27.694" v="25" actId="255"/>
+        <pc:sldMkLst>
+          <pc:docMk/>
+          <pc:sldMk cId="0" sldId="264"/>
+        </pc:sldMkLst>
+        <pc:spChg chg="mod">
+          <ac:chgData name="pragathi mudavath" userId="78fa310ea366d2e9" providerId="LiveId" clId="{789AFF9C-6324-4289-A034-E6789D76A855}" dt="2026-09-02T08:12:27.694" v="25" actId="255"/>
+          <ac:spMkLst>
+            <pc:docMk/>
+            <pc:sldMk cId="0" sldId="264"/>
+            <ac:spMk id="2" creationId="{00000000-0000-0000-0000-000000000000}"/>
+          </ac:spMkLst>
+        </pc:spChg>
+        <pc:spChg chg="mod">
+          <ac:chgData name="pragathi mudavath" userId="78fa310ea366d2e9" providerId="LiveId" clId="{789AFF9C-6324-4289-A034-E6789D76A855}" dt="2026-09-02T08:12:27.694" v="25" actId="255"/>
+          <ac:spMkLst>
+            <pc:docMk/>
+            <pc:sldMk cId="0" sldId="264"/>
+            <ac:spMk id="3" creationId="{00000000-0000-0000-0000-000000000000}"/>
+          </ac:spMkLst>
+        </pc:spChg>
+        <pc:spChg chg="mod">
+          <ac:chgData name="pragathi mudavath" userId="78fa310ea366d2e9" providerId="LiveId" clId="{789AFF9C-6324-4289-A034-E6789D76A855}" dt="2026-09-02T08:12:27.694" v="25" actId="255"/>
+          <ac:spMkLst>
+            <pc:docMk/>
+            <pc:sldMk cId="0" sldId="264"/>
+            <ac:spMk id="4" creationId="{00000000-0000-0000-0000-000000000000}"/>
+          </ac:spMkLst>
+        </pc:spChg>
+        <pc:spChg chg="mod">
+          <ac:chgData name="pragathi mudavath" userId="78fa310ea366d2e9" providerId="LiveId" clId="{789AFF9C-6324-4289-A034-E6789D76A855}" dt="2026-09-02T08:12:27.694" v="25" actId="255"/>
+          <ac:spMkLst>
+            <pc:docMk/>
+            <pc:sldMk cId="0" sldId="264"/>
+            <ac:spMk id="5" creationId="{00000000-0000-0000-0000-000000000000}"/>
+          </ac:spMkLst>
+        </pc:spChg>
+        <pc:spChg chg="mod">
+          <ac:chgData name="pragathi mudavath" userId="78fa310ea366d2e9" providerId="LiveId" clId="{789AFF9C-6324-4289-A034-E6789D76A855}" dt="2026-09-02T08:12:27.694" v="25" actId="255"/>
+          <ac:spMkLst>
+            <pc:docMk/>
+            <pc:sldMk cId="0" sldId="264"/>
+            <ac:spMk id="6" creationId="{00000000-0000-0000-0000-000000000000}"/>
+          </ac:spMkLst>
+        </pc:spChg>
+        <pc:spChg chg="mod">
+          <ac:chgData name="pragathi mudavath" userId="78fa310ea366d2e9" providerId="LiveId" clId="{789AFF9C-6324-4289-A034-E6789D76A855}" dt="2026-09-02T08:12:27.694" v="25" actId="255"/>
+          <ac:spMkLst>
+            <pc:docMk/>
+            <pc:sldMk cId="0" sldId="264"/>
+            <ac:spMk id="7" creationId="{00000000-0000-0000-0000-000000000000}"/>
+          </ac:spMkLst>
+        </pc:spChg>
+      </pc:sldChg>
+      <pc:sldChg chg="modSp mod">
+        <pc:chgData name="pragathi mudavath" userId="78fa310ea366d2e9" providerId="LiveId" clId="{789AFF9C-6324-4289-A034-E6789D76A855}" dt="2026-09-02T08:12:39.993" v="26" actId="255"/>
+        <pc:sldMkLst>
+          <pc:docMk/>
+          <pc:sldMk cId="0" sldId="265"/>
+        </pc:sldMkLst>
+        <pc:spChg chg="mod">
+          <ac:chgData name="pragathi mudavath" userId="78fa310ea366d2e9" providerId="LiveId" clId="{789AFF9C-6324-4289-A034-E6789D76A855}" dt="2026-09-02T08:12:39.993" v="26" actId="255"/>
+          <ac:spMkLst>
+            <pc:docMk/>
+            <pc:sldMk cId="0" sldId="265"/>
+            <ac:spMk id="2" creationId="{00000000-0000-0000-0000-000000000000}"/>
+          </ac:spMkLst>
+        </pc:spChg>
+        <pc:spChg chg="mod">
+          <ac:chgData name="pragathi mudavath" userId="78fa310ea366d2e9" providerId="LiveId" clId="{789AFF9C-6324-4289-A034-E6789D76A855}" dt="2026-09-02T08:12:39.993" v="26" actId="255"/>
+          <ac:spMkLst>
+            <pc:docMk/>
+            <pc:sldMk cId="0" sldId="265"/>
+            <ac:spMk id="3" creationId="{00000000-0000-0000-0000-000000000000}"/>
+          </ac:spMkLst>
+        </pc:spChg>
+        <pc:spChg chg="mod">
+          <ac:chgData name="pragathi mudavath" userId="78fa310ea366d2e9" providerId="LiveId" clId="{789AFF9C-6324-4289-A034-E6789D76A855}" dt="2026-09-02T08:12:39.993" v="26" actId="255"/>
+          <ac:spMkLst>
+            <pc:docMk/>
+            <pc:sldMk cId="0" sldId="265"/>
+            <ac:spMk id="4" creationId="{00000000-0000-0000-0000-000000000000}"/>
+          </ac:spMkLst>
+        </pc:spChg>
+        <pc:spChg chg="mod">
+          <ac:chgData name="pragathi mudavath" userId="78fa310ea366d2e9" providerId="LiveId" clId="{789AFF9C-6324-4289-A034-E6789D76A855}" dt="2026-09-02T08:12:39.993" v="26" actId="255"/>
+          <ac:spMkLst>
+            <pc:docMk/>
+            <pc:sldMk cId="0" sldId="265"/>
+            <ac:spMk id="5" creationId="{00000000-0000-0000-0000-000000000000}"/>
+          </ac:spMkLst>
+        </pc:spChg>
+        <pc:spChg chg="mod">
+          <ac:chgData name="pragathi mudavath" userId="78fa310ea366d2e9" providerId="LiveId" clId="{789AFF9C-6324-4289-A034-E6789D76A855}" dt="2026-09-02T08:12:39.993" v="26" actId="255"/>
+          <ac:spMkLst>
+            <pc:docMk/>
+            <pc:sldMk cId="0" sldId="265"/>
+            <ac:spMk id="6" creationId="{00000000-0000-0000-0000-000000000000}"/>
+          </ac:spMkLst>
+        </pc:spChg>
+        <pc:spChg chg="mod">
+          <ac:chgData name="pragathi mudavath" userId="78fa310ea366d2e9" providerId="LiveId" clId="{789AFF9C-6324-4289-A034-E6789D76A855}" dt="2026-09-02T08:12:39.993" v="26" actId="255"/>
+          <ac:spMkLst>
+            <pc:docMk/>
+            <pc:sldMk cId="0" sldId="265"/>
+            <ac:spMk id="7" creationId="{00000000-0000-0000-0000-000000000000}"/>
+          </ac:spMkLst>
+        </pc:spChg>
+      </pc:sldChg>
+      <pc:sldChg chg="modSp mod">
+        <pc:chgData name="pragathi mudavath" userId="78fa310ea366d2e9" providerId="LiveId" clId="{789AFF9C-6324-4289-A034-E6789D76A855}" dt="2026-09-02T08:13:00.940" v="28" actId="255"/>
+        <pc:sldMkLst>
+          <pc:docMk/>
+          <pc:sldMk cId="0" sldId="266"/>
+        </pc:sldMkLst>
+        <pc:spChg chg="mod">
+          <ac:chgData name="pragathi mudavath" userId="78fa310ea366d2e9" providerId="LiveId" clId="{789AFF9C-6324-4289-A034-E6789D76A855}" dt="2026-09-02T08:13:00.940" v="28" actId="255"/>
+          <ac:spMkLst>
+            <pc:docMk/>
+            <pc:sldMk cId="0" sldId="266"/>
+            <ac:spMk id="2" creationId="{00000000-0000-0000-0000-000000000000}"/>
+          </ac:spMkLst>
+        </pc:spChg>
+        <pc:spChg chg="mod">
+          <ac:chgData name="pragathi mudavath" userId="78fa310ea366d2e9" providerId="LiveId" clId="{789AFF9C-6324-4289-A034-E6789D76A855}" dt="2026-09-02T08:13:00.940" v="28" actId="255"/>
+          <ac:spMkLst>
+            <pc:docMk/>
+            <pc:sldMk cId="0" sldId="266"/>
+            <ac:spMk id="3" creationId="{00000000-0000-0000-0000-000000000000}"/>
+          </ac:spMkLst>
+        </pc:spChg>
+        <pc:spChg chg="mod">
+          <ac:chgData name="pragathi mudavath" userId="78fa310ea366d2e9" providerId="LiveId" clId="{789AFF9C-6324-4289-A034-E6789D76A855}" dt="2026-09-02T08:13:00.940" v="28" actId="255"/>
+          <ac:spMkLst>
+            <pc:docMk/>
+            <pc:sldMk cId="0" sldId="266"/>
+            <ac:spMk id="4" creationId="{00000000-0000-0000-0000-000000000000}"/>
+          </ac:spMkLst>
+        </pc:spChg>
+        <pc:spChg chg="mod">
+          <ac:chgData name="pragathi mudavath" userId="78fa310ea366d2e9" providerId="LiveId" clId="{789AFF9C-6324-4289-A034-E6789D76A855}" dt="2026-09-02T08:13:00.940" v="28" actId="255"/>
+          <ac:spMkLst>
+            <pc:docMk/>
+            <pc:sldMk cId="0" sldId="266"/>
+            <ac:spMk id="5" creationId="{00000000-0000-0000-0000-000000000000}"/>
+          </ac:spMkLst>
+        </pc:spChg>
+        <pc:graphicFrameChg chg="modGraphic">
+          <ac:chgData name="pragathi mudavath" userId="78fa310ea366d2e9" providerId="LiveId" clId="{789AFF9C-6324-4289-A034-E6789D76A855}" dt="2026-09-02T08:12:50.883" v="27" actId="255"/>
+          <ac:graphicFrameMkLst>
+            <pc:docMk/>
+            <pc:sldMk cId="0" sldId="266"/>
+            <ac:graphicFrameMk id="6" creationId="{00000000-0000-0000-0000-000000000000}"/>
+          </ac:graphicFrameMkLst>
+        </pc:graphicFrameChg>
+      </pc:sldChg>
+      <pc:sldChg chg="modSp mod">
+        <pc:chgData name="pragathi mudavath" userId="78fa310ea366d2e9" providerId="LiveId" clId="{789AFF9C-6324-4289-A034-E6789D76A855}" dt="2026-09-02T08:13:10.898" v="30" actId="255"/>
+        <pc:sldMkLst>
+          <pc:docMk/>
+          <pc:sldMk cId="0" sldId="267"/>
+        </pc:sldMkLst>
+        <pc:spChg chg="mod">
+          <ac:chgData name="pragathi mudavath" userId="78fa310ea366d2e9" providerId="LiveId" clId="{789AFF9C-6324-4289-A034-E6789D76A855}" dt="2026-09-02T08:13:10.898" v="30" actId="255"/>
+          <ac:spMkLst>
+            <pc:docMk/>
+            <pc:sldMk cId="0" sldId="267"/>
+            <ac:spMk id="2" creationId="{00000000-0000-0000-0000-000000000000}"/>
+          </ac:spMkLst>
+        </pc:spChg>
+        <pc:spChg chg="mod">
+          <ac:chgData name="pragathi mudavath" userId="78fa310ea366d2e9" providerId="LiveId" clId="{789AFF9C-6324-4289-A034-E6789D76A855}" dt="2026-09-02T08:13:10.898" v="30" actId="255"/>
+          <ac:spMkLst>
+            <pc:docMk/>
+            <pc:sldMk cId="0" sldId="267"/>
+            <ac:spMk id="3" creationId="{00000000-0000-0000-0000-000000000000}"/>
+          </ac:spMkLst>
+        </pc:spChg>
+        <pc:spChg chg="mod">
+          <ac:chgData name="pragathi mudavath" userId="78fa310ea366d2e9" providerId="LiveId" clId="{789AFF9C-6324-4289-A034-E6789D76A855}" dt="2026-09-02T08:13:10.898" v="30" actId="255"/>
+          <ac:spMkLst>
+            <pc:docMk/>
+            <pc:sldMk cId="0" sldId="267"/>
+            <ac:spMk id="4" creationId="{00000000-0000-0000-0000-000000000000}"/>
+          </ac:spMkLst>
+        </pc:spChg>
+        <pc:spChg chg="mod">
+          <ac:chgData name="pragathi mudavath" userId="78fa310ea366d2e9" providerId="LiveId" clId="{789AFF9C-6324-4289-A034-E6789D76A855}" dt="2026-09-02T08:13:10.898" v="30" actId="255"/>
+          <ac:spMkLst>
+            <pc:docMk/>
+            <pc:sldMk cId="0" sldId="267"/>
+            <ac:spMk id="5" creationId="{00000000-0000-0000-0000-000000000000}"/>
+          </ac:spMkLst>
+        </pc:spChg>
+        <pc:spChg chg="mod">
+          <ac:chgData name="pragathi mudavath" userId="78fa310ea366d2e9" providerId="LiveId" clId="{789AFF9C-6324-4289-A034-E6789D76A855}" dt="2026-09-02T08:13:10.898" v="30" actId="255"/>
+          <ac:spMkLst>
+            <pc:docMk/>
+            <pc:sldMk cId="0" sldId="267"/>
+            <ac:spMk id="6" creationId="{00000000-0000-0000-0000-000000000000}"/>
+          </ac:spMkLst>
+        </pc:spChg>
+        <pc:spChg chg="mod">
+          <ac:chgData name="pragathi mudavath" userId="78fa310ea366d2e9" providerId="LiveId" clId="{789AFF9C-6324-4289-A034-E6789D76A855}" dt="2026-09-02T08:13:10.898" v="30" actId="255"/>
+          <ac:spMkLst>
+            <pc:docMk/>
+            <pc:sldMk cId="0" sldId="267"/>
+            <ac:spMk id="7" creationId="{00000000-0000-0000-0000-000000000000}"/>
+          </ac:spMkLst>
+        </pc:spChg>
+      </pc:sldChg>
+      <pc:sldChg chg="modSp mod">
+        <pc:chgData name="pragathi mudavath" userId="78fa310ea366d2e9" providerId="LiveId" clId="{789AFF9C-6324-4289-A034-E6789D76A855}" dt="2026-09-02T08:13:21.337" v="31" actId="255"/>
+        <pc:sldMkLst>
+          <pc:docMk/>
+          <pc:sldMk cId="0" sldId="268"/>
+        </pc:sldMkLst>
+        <pc:spChg chg="mod">
+          <ac:chgData name="pragathi mudavath" userId="78fa310ea366d2e9" providerId="LiveId" clId="{789AFF9C-6324-4289-A034-E6789D76A855}" dt="2026-09-02T08:13:21.337" v="31" actId="255"/>
+          <ac:spMkLst>
+            <pc:docMk/>
+            <pc:sldMk cId="0" sldId="268"/>
+            <ac:spMk id="2" creationId="{00000000-0000-0000-0000-000000000000}"/>
+          </ac:spMkLst>
+        </pc:spChg>
+        <pc:spChg chg="mod">
+          <ac:chgData name="pragathi mudavath" userId="78fa310ea366d2e9" providerId="LiveId" clId="{789AFF9C-6324-4289-A034-E6789D76A855}" dt="2026-09-02T08:13:21.337" v="31" actId="255"/>
+          <ac:spMkLst>
+            <pc:docMk/>
+            <pc:sldMk cId="0" sldId="268"/>
+            <ac:spMk id="3" creationId="{00000000-0000-0000-0000-000000000000}"/>
+          </ac:spMkLst>
+        </pc:spChg>
+        <pc:spChg chg="mod">
+          <ac:chgData name="pragathi mudavath" userId="78fa310ea366d2e9" providerId="LiveId" clId="{789AFF9C-6324-4289-A034-E6789D76A855}" dt="2026-09-02T08:13:21.337" v="31" actId="255"/>
+          <ac:spMkLst>
+            <pc:docMk/>
+            <pc:sldMk cId="0" sldId="268"/>
+            <ac:spMk id="4" creationId="{00000000-0000-0000-0000-000000000000}"/>
+          </ac:spMkLst>
+        </pc:spChg>
+        <pc:spChg chg="mod">
+          <ac:chgData name="pragathi mudavath" userId="78fa310ea366d2e9" providerId="LiveId" clId="{789AFF9C-6324-4289-A034-E6789D76A855}" dt="2026-09-02T08:13:21.337" v="31" actId="255"/>
+          <ac:spMkLst>
+            <pc:docMk/>
+            <pc:sldMk cId="0" sldId="268"/>
+            <ac:spMk id="5" creationId="{00000000-0000-0000-0000-000000000000}"/>
+          </ac:spMkLst>
+        </pc:spChg>
+        <pc:spChg chg="mod">
+          <ac:chgData name="pragathi mudavath" userId="78fa310ea366d2e9" providerId="LiveId" clId="{789AFF9C-6324-4289-A034-E6789D76A855}" dt="2026-09-02T08:13:21.337" v="31" actId="255"/>
+          <ac:spMkLst>
+            <pc:docMk/>
+            <pc:sldMk cId="0" sldId="268"/>
+            <ac:spMk id="6" creationId="{00000000-0000-0000-0000-000000000000}"/>
+          </ac:spMkLst>
+        </pc:spChg>
+        <pc:spChg chg="mod">
+          <ac:chgData name="pragathi mudavath" userId="78fa310ea366d2e9" providerId="LiveId" clId="{789AFF9C-6324-4289-A034-E6789D76A855}" dt="2026-09-02T08:13:21.337" v="31" actId="255"/>
+          <ac:spMkLst>
+            <pc:docMk/>
+            <pc:sldMk cId="0" sldId="268"/>
+            <ac:spMk id="7" creationId="{00000000-0000-0000-0000-000000000000}"/>
+          </ac:spMkLst>
+        </pc:spChg>
+      </pc:sldChg>
+      <pc:sldChg chg="modSp mod">
+        <pc:chgData name="pragathi mudavath" userId="78fa310ea366d2e9" providerId="LiveId" clId="{789AFF9C-6324-4289-A034-E6789D76A855}" dt="2026-09-02T08:13:32.040" v="32" actId="255"/>
+        <pc:sldMkLst>
+          <pc:docMk/>
+          <pc:sldMk cId="0" sldId="269"/>
+        </pc:sldMkLst>
+        <pc:spChg chg="mod">
+          <ac:chgData name="pragathi mudavath" userId="78fa310ea366d2e9" providerId="LiveId" clId="{789AFF9C-6324-4289-A034-E6789D76A855}" dt="2026-09-02T08:13:32.040" v="32" actId="255"/>
+          <ac:spMkLst>
+            <pc:docMk/>
+            <pc:sldMk cId="0" sldId="269"/>
+            <ac:spMk id="2" creationId="{00000000-0000-0000-0000-000000000000}"/>
+          </ac:spMkLst>
+        </pc:spChg>
+        <pc:spChg chg="mod">
+          <ac:chgData name="pragathi mudavath" userId="78fa310ea366d2e9" providerId="LiveId" clId="{789AFF9C-6324-4289-A034-E6789D76A855}" dt="2026-09-02T08:13:32.040" v="32" actId="255"/>
+          <ac:spMkLst>
+            <pc:docMk/>
+            <pc:sldMk cId="0" sldId="269"/>
+            <ac:spMk id="3" creationId="{00000000-0000-0000-0000-000000000000}"/>
+          </ac:spMkLst>
+        </pc:spChg>
+        <pc:spChg chg="mod">
+          <ac:chgData name="pragathi mudavath" userId="78fa310ea366d2e9" providerId="LiveId" clId="{789AFF9C-6324-4289-A034-E6789D76A855}" dt="2026-09-02T08:13:32.040" v="32" actId="255"/>
+          <ac:spMkLst>
+            <pc:docMk/>
+            <pc:sldMk cId="0" sldId="269"/>
+            <ac:spMk id="4" creationId="{00000000-0000-0000-0000-000000000000}"/>
+          </ac:spMkLst>
+        </pc:spChg>
+        <pc:spChg chg="mod">
+          <ac:chgData name="pragathi mudavath" userId="78fa310ea366d2e9" providerId="LiveId" clId="{789AFF9C-6324-4289-A034-E6789D76A855}" dt="2026-09-02T08:13:32.040" v="32" actId="255"/>
+          <ac:spMkLst>
+            <pc:docMk/>
+            <pc:sldMk cId="0" sldId="269"/>
+            <ac:spMk id="5" creationId="{00000000-0000-0000-0000-000000000000}"/>
+          </ac:spMkLst>
+        </pc:spChg>
+        <pc:spChg chg="mod">
+          <ac:chgData name="pragathi mudavath" userId="78fa310ea366d2e9" providerId="LiveId" clId="{789AFF9C-6324-4289-A034-E6789D76A855}" dt="2026-09-02T08:13:32.040" v="32" actId="255"/>
+          <ac:spMkLst>
+            <pc:docMk/>
+            <pc:sldMk cId="0" sldId="269"/>
+            <ac:spMk id="6" creationId="{00000000-0000-0000-0000-000000000000}"/>
+          </ac:spMkLst>
+        </pc:spChg>
+        <pc:spChg chg="mod">
+          <ac:chgData name="pragathi mudavath" userId="78fa310ea366d2e9" providerId="LiveId" clId="{789AFF9C-6324-4289-A034-E6789D76A855}" dt="2026-09-02T08:13:32.040" v="32" actId="255"/>
+          <ac:spMkLst>
+            <pc:docMk/>
+            <pc:sldMk cId="0" sldId="269"/>
+            <ac:spMk id="7" creationId="{00000000-0000-0000-0000-000000000000}"/>
+          </ac:spMkLst>
+        </pc:spChg>
+      </pc:sldChg>
+      <pc:sldChg chg="modSp mod">
+        <pc:chgData name="pragathi mudavath" userId="78fa310ea366d2e9" providerId="LiveId" clId="{789AFF9C-6324-4289-A034-E6789D76A855}" dt="2026-09-02T08:13:48.463" v="33" actId="255"/>
+        <pc:sldMkLst>
+          <pc:docMk/>
+          <pc:sldMk cId="0" sldId="270"/>
+        </pc:sldMkLst>
+        <pc:spChg chg="mod">
+          <ac:chgData name="pragathi mudavath" userId="78fa310ea366d2e9" providerId="LiveId" clId="{789AFF9C-6324-4289-A034-E6789D76A855}" dt="2026-09-02T08:13:48.463" v="33" actId="255"/>
+          <ac:spMkLst>
+            <pc:docMk/>
+            <pc:sldMk cId="0" sldId="270"/>
+            <ac:spMk id="2" creationId="{00000000-0000-0000-0000-000000000000}"/>
+          </ac:spMkLst>
+        </pc:spChg>
+        <pc:spChg chg="mod">
+          <ac:chgData name="pragathi mudavath" userId="78fa310ea366d2e9" providerId="LiveId" clId="{789AFF9C-6324-4289-A034-E6789D76A855}" dt="2026-09-02T08:13:48.463" v="33" actId="255"/>
+          <ac:spMkLst>
+            <pc:docMk/>
+            <pc:sldMk cId="0" sldId="270"/>
+            <ac:spMk id="3" creationId="{00000000-0000-0000-0000-000000000000}"/>
+          </ac:spMkLst>
+        </pc:spChg>
+        <pc:spChg chg="mod">
+          <ac:chgData name="pragathi mudavath" userId="78fa310ea366d2e9" providerId="LiveId" clId="{789AFF9C-6324-4289-A034-E6789D76A855}" dt="2026-09-02T08:13:48.463" v="33" actId="255"/>
+          <ac:spMkLst>
+            <pc:docMk/>
+            <pc:sldMk cId="0" sldId="270"/>
+            <ac:spMk id="4" creationId="{00000000-0000-0000-0000-000000000000}"/>
+          </ac:spMkLst>
+        </pc:spChg>
+        <pc:spChg chg="mod">
+          <ac:chgData name="pragathi mudavath" userId="78fa310ea366d2e9" providerId="LiveId" clId="{789AFF9C-6324-4289-A034-E6789D76A855}" dt="2026-09-02T08:13:48.463" v="33" actId="255"/>
+          <ac:spMkLst>
+            <pc:docMk/>
+            <pc:sldMk cId="0" sldId="270"/>
+            <ac:spMk id="5" creationId="{00000000-0000-0000-0000-000000000000}"/>
+          </ac:spMkLst>
+        </pc:spChg>
+        <pc:spChg chg="mod">
+          <ac:chgData name="pragathi mudavath" userId="78fa310ea366d2e9" providerId="LiveId" clId="{789AFF9C-6324-4289-A034-E6789D76A855}" dt="2026-09-02T08:13:48.463" v="33" actId="255"/>
+          <ac:spMkLst>
+            <pc:docMk/>
+            <pc:sldMk cId="0" sldId="270"/>
+            <ac:spMk id="6" creationId="{00000000-0000-0000-0000-000000000000}"/>
+          </ac:spMkLst>
+        </pc:spChg>
+        <pc:spChg chg="mod">
+          <ac:chgData name="pragathi mudavath" userId="78fa310ea366d2e9" providerId="LiveId" clId="{789AFF9C-6324-4289-A034-E6789D76A855}" dt="2026-09-02T08:13:48.463" v="33" actId="255"/>
+          <ac:spMkLst>
+            <pc:docMk/>
+            <pc:sldMk cId="0" sldId="270"/>
+            <ac:spMk id="7" creationId="{00000000-0000-0000-0000-000000000000}"/>
+          </ac:spMkLst>
+        </pc:spChg>
+      </pc:sldChg>
+      <pc:sldChg chg="modSp mod">
+        <pc:chgData name="pragathi mudavath" userId="78fa310ea366d2e9" providerId="LiveId" clId="{789AFF9C-6324-4289-A034-E6789D76A855}" dt="2026-09-02T08:13:56.469" v="34" actId="255"/>
+        <pc:sldMkLst>
+          <pc:docMk/>
+          <pc:sldMk cId="0" sldId="271"/>
+        </pc:sldMkLst>
+        <pc:spChg chg="mod">
+          <ac:chgData name="pragathi mudavath" userId="78fa310ea366d2e9" providerId="LiveId" clId="{789AFF9C-6324-4289-A034-E6789D76A855}" dt="2026-09-02T08:13:56.469" v="34" actId="255"/>
+          <ac:spMkLst>
+            <pc:docMk/>
+            <pc:sldMk cId="0" sldId="271"/>
+            <ac:spMk id="2" creationId="{00000000-0000-0000-0000-000000000000}"/>
+          </ac:spMkLst>
+        </pc:spChg>
+        <pc:spChg chg="mod">
+          <ac:chgData name="pragathi mudavath" userId="78fa310ea366d2e9" providerId="LiveId" clId="{789AFF9C-6324-4289-A034-E6789D76A855}" dt="2026-09-02T08:13:56.469" v="34" actId="255"/>
+          <ac:spMkLst>
+            <pc:docMk/>
+            <pc:sldMk cId="0" sldId="271"/>
+            <ac:spMk id="3" creationId="{00000000-0000-0000-0000-000000000000}"/>
+          </ac:spMkLst>
+        </pc:spChg>
+        <pc:spChg chg="mod">
+          <ac:chgData name="pragathi mudavath" userId="78fa310ea366d2e9" providerId="LiveId" clId="{789AFF9C-6324-4289-A034-E6789D76A855}" dt="2026-09-02T08:13:56.469" v="34" actId="255"/>
+          <ac:spMkLst>
+            <pc:docMk/>
+            <pc:sldMk cId="0" sldId="271"/>
+            <ac:spMk id="4" creationId="{00000000-0000-0000-0000-000000000000}"/>
+          </ac:spMkLst>
+        </pc:spChg>
+        <pc:spChg chg="mod">
+          <ac:chgData name="pragathi mudavath" userId="78fa310ea366d2e9" providerId="LiveId" clId="{789AFF9C-6324-4289-A034-E6789D76A855}" dt="2026-09-02T08:13:56.469" v="34" actId="255"/>
+          <ac:spMkLst>
+            <pc:docMk/>
+            <pc:sldMk cId="0" sldId="271"/>
+            <ac:spMk id="5" creationId="{00000000-0000-0000-0000-000000000000}"/>
+          </ac:spMkLst>
+        </pc:spChg>
+        <pc:spChg chg="mod">
+          <ac:chgData name="pragathi mudavath" userId="78fa310ea366d2e9" providerId="LiveId" clId="{789AFF9C-6324-4289-A034-E6789D76A855}" dt="2026-09-02T08:13:56.469" v="34" actId="255"/>
+          <ac:spMkLst>
+            <pc:docMk/>
+            <pc:sldMk cId="0" sldId="271"/>
+            <ac:spMk id="6" creationId="{00000000-0000-0000-0000-000000000000}"/>
+          </ac:spMkLst>
+        </pc:spChg>
+        <pc:spChg chg="mod">
+          <ac:chgData name="pragathi mudavath" userId="78fa310ea366d2e9" providerId="LiveId" clId="{789AFF9C-6324-4289-A034-E6789D76A855}" dt="2026-09-02T08:13:56.469" v="34" actId="255"/>
+          <ac:spMkLst>
+            <pc:docMk/>
+            <pc:sldMk cId="0" sldId="271"/>
+            <ac:spMk id="7" creationId="{00000000-0000-0000-0000-000000000000}"/>
+          </ac:spMkLst>
+        </pc:spChg>
+      </pc:sldChg>
+      <pc:sldChg chg="modSp mod">
+        <pc:chgData name="pragathi mudavath" userId="78fa310ea366d2e9" providerId="LiveId" clId="{789AFF9C-6324-4289-A034-E6789D76A855}" dt="2026-09-02T08:14:08.723" v="35" actId="255"/>
+        <pc:sldMkLst>
+          <pc:docMk/>
+          <pc:sldMk cId="0" sldId="272"/>
+        </pc:sldMkLst>
+        <pc:spChg chg="mod">
+          <ac:chgData name="pragathi mudavath" userId="78fa310ea366d2e9" providerId="LiveId" clId="{789AFF9C-6324-4289-A034-E6789D76A855}" dt="2026-09-02T08:14:08.723" v="35" actId="255"/>
+          <ac:spMkLst>
+            <pc:docMk/>
+            <pc:sldMk cId="0" sldId="272"/>
+            <ac:spMk id="2" creationId="{00000000-0000-0000-0000-000000000000}"/>
+          </ac:spMkLst>
+        </pc:spChg>
+        <pc:spChg chg="mod">
+          <ac:chgData name="pragathi mudavath" userId="78fa310ea366d2e9" providerId="LiveId" clId="{789AFF9C-6324-4289-A034-E6789D76A855}" dt="2026-09-02T08:14:08.723" v="35" actId="255"/>
+          <ac:spMkLst>
+            <pc:docMk/>
+            <pc:sldMk cId="0" sldId="272"/>
+            <ac:spMk id="3" creationId="{00000000-0000-0000-0000-000000000000}"/>
+          </ac:spMkLst>
+        </pc:spChg>
+        <pc:spChg chg="mod">
+          <ac:chgData name="pragathi mudavath" userId="78fa310ea366d2e9" providerId="LiveId" clId="{789AFF9C-6324-4289-A034-E6789D76A855}" dt="2026-09-02T08:14:08.723" v="35" actId="255"/>
+          <ac:spMkLst>
+            <pc:docMk/>
+            <pc:sldMk cId="0" sldId="272"/>
+            <ac:spMk id="4" creationId="{00000000-0000-0000-0000-000000000000}"/>
+          </ac:spMkLst>
+        </pc:spChg>
+        <pc:spChg chg="mod">
+          <ac:chgData name="pragathi mudavath" userId="78fa310ea366d2e9" providerId="LiveId" clId="{789AFF9C-6324-4289-A034-E6789D76A855}" dt="2026-09-02T08:14:08.723" v="35" actId="255"/>
+          <ac:spMkLst>
+            <pc:docMk/>
+            <pc:sldMk cId="0" sldId="272"/>
+            <ac:spMk id="5" creationId="{00000000-0000-0000-0000-000000000000}"/>
+          </ac:spMkLst>
+        </pc:spChg>
+        <pc:spChg chg="mod">
+          <ac:chgData name="pragathi mudavath" userId="78fa310ea366d2e9" providerId="LiveId" clId="{789AFF9C-6324-4289-A034-E6789D76A855}" dt="2026-09-02T08:14:08.723" v="35" actId="255"/>
+          <ac:spMkLst>
+            <pc:docMk/>
+            <pc:sldMk cId="0" sldId="272"/>
+            <ac:spMk id="6" creationId="{00000000-0000-0000-0000-000000000000}"/>
+          </ac:spMkLst>
+        </pc:spChg>
+        <pc:spChg chg="mod">
+          <ac:chgData name="pragathi mudavath" userId="78fa310ea366d2e9" providerId="LiveId" clId="{789AFF9C-6324-4289-A034-E6789D76A855}" dt="2026-09-02T08:14:08.723" v="35" actId="255"/>
+          <ac:spMkLst>
+            <pc:docMk/>
+            <pc:sldMk cId="0" sldId="272"/>
+            <ac:spMk id="7" creationId="{00000000-0000-0000-0000-000000000000}"/>
+          </ac:spMkLst>
+        </pc:spChg>
+        <pc:spChg chg="mod">
+          <ac:chgData name="pragathi mudavath" userId="78fa310ea366d2e9" providerId="LiveId" clId="{789AFF9C-6324-4289-A034-E6789D76A855}" dt="2026-09-02T08:14:08.723" v="35" actId="255"/>
+          <ac:spMkLst>
+            <pc:docMk/>
+            <pc:sldMk cId="0" sldId="272"/>
+            <ac:spMk id="8" creationId="{00000000-0000-0000-0000-000000000000}"/>
+          </ac:spMkLst>
+        </pc:spChg>
+      </pc:sldChg>
+      <pc:sldChg chg="modSp mod">
+        <pc:chgData name="pragathi mudavath" userId="78fa310ea366d2e9" providerId="LiveId" clId="{789AFF9C-6324-4289-A034-E6789D76A855}" dt="2026-09-02T08:14:17.982" v="36" actId="255"/>
+        <pc:sldMkLst>
+          <pc:docMk/>
+          <pc:sldMk cId="0" sldId="273"/>
+        </pc:sldMkLst>
+        <pc:spChg chg="mod">
+          <ac:chgData name="pragathi mudavath" userId="78fa310ea366d2e9" providerId="LiveId" clId="{789AFF9C-6324-4289-A034-E6789D76A855}" dt="2026-09-02T08:14:17.982" v="36" actId="255"/>
+          <ac:spMkLst>
+            <pc:docMk/>
+            <pc:sldMk cId="0" sldId="273"/>
+            <ac:spMk id="2" creationId="{00000000-0000-0000-0000-000000000000}"/>
+          </ac:spMkLst>
+        </pc:spChg>
+        <pc:spChg chg="mod">
+          <ac:chgData name="pragathi mudavath" userId="78fa310ea366d2e9" providerId="LiveId" clId="{789AFF9C-6324-4289-A034-E6789D76A855}" dt="2026-09-02T08:14:17.982" v="36" actId="255"/>
+          <ac:spMkLst>
+            <pc:docMk/>
+            <pc:sldMk cId="0" sldId="273"/>
+            <ac:spMk id="3" creationId="{00000000-0000-0000-0000-000000000000}"/>
+          </ac:spMkLst>
+        </pc:spChg>
+        <pc:spChg chg="mod">
+          <ac:chgData name="pragathi mudavath" userId="78fa310ea366d2e9" providerId="LiveId" clId="{789AFF9C-6324-4289-A034-E6789D76A855}" dt="2026-09-02T08:14:17.982" v="36" actId="255"/>
+          <ac:spMkLst>
+            <pc:docMk/>
+            <pc:sldMk cId="0" sldId="273"/>
+            <ac:spMk id="4" creationId="{00000000-0000-0000-0000-000000000000}"/>
+          </ac:spMkLst>
+        </pc:spChg>
+        <pc:spChg chg="mod">
+          <ac:chgData name="pragathi mudavath" userId="78fa310ea366d2e9" providerId="LiveId" clId="{789AFF9C-6324-4289-A034-E6789D76A855}" dt="2026-09-02T08:14:17.982" v="36" actId="255"/>
+          <ac:spMkLst>
+            <pc:docMk/>
+            <pc:sldMk cId="0" sldId="273"/>
+            <ac:spMk id="5" creationId="{00000000-0000-0000-0000-000000000000}"/>
+          </ac:spMkLst>
+        </pc:spChg>
+        <pc:spChg chg="mod">
+          <ac:chgData name="pragathi mudavath" userId="78fa310ea366d2e9" providerId="LiveId" clId="{789AFF9C-6324-4289-A034-E6789D76A855}" dt="2026-09-02T08:14:17.982" v="36" actId="255"/>
+          <ac:spMkLst>
+            <pc:docMk/>
+            <pc:sldMk cId="0" sldId="273"/>
+            <ac:spMk id="6" creationId="{00000000-0000-0000-0000-000000000000}"/>
+          </ac:spMkLst>
+        </pc:spChg>
+        <pc:spChg chg="mod">
+          <ac:chgData name="pragathi mudavath" userId="78fa310ea366d2e9" providerId="LiveId" clId="{789AFF9C-6324-4289-A034-E6789D76A855}" dt="2026-09-02T08:14:17.982" v="36" actId="255"/>
+          <ac:spMkLst>
+            <pc:docMk/>
+            <pc:sldMk cId="0" sldId="273"/>
+            <ac:spMk id="7" creationId="{00000000-0000-0000-0000-000000000000}"/>
+          </ac:spMkLst>
+        </pc:spChg>
+      </pc:sldChg>
+      <pc:sldChg chg="modSp mod">
+        <pc:chgData name="pragathi mudavath" userId="78fa310ea366d2e9" providerId="LiveId" clId="{789AFF9C-6324-4289-A034-E6789D76A855}" dt="2026-09-02T08:14:25.414" v="37" actId="255"/>
+        <pc:sldMkLst>
+          <pc:docMk/>
+          <pc:sldMk cId="0" sldId="274"/>
+        </pc:sldMkLst>
+        <pc:spChg chg="mod">
+          <ac:chgData name="pragathi mudavath" userId="78fa310ea366d2e9" providerId="LiveId" clId="{789AFF9C-6324-4289-A034-E6789D76A855}" dt="2026-09-02T08:14:25.414" v="37" actId="255"/>
+          <ac:spMkLst>
+            <pc:docMk/>
+            <pc:sldMk cId="0" sldId="274"/>
+            <ac:spMk id="2" creationId="{00000000-0000-0000-0000-000000000000}"/>
+          </ac:spMkLst>
+        </pc:spChg>
+        <pc:spChg chg="mod">
+          <ac:chgData name="pragathi mudavath" userId="78fa310ea366d2e9" providerId="LiveId" clId="{789AFF9C-6324-4289-A034-E6789D76A855}" dt="2026-09-02T08:14:25.414" v="37" actId="255"/>
+          <ac:spMkLst>
+            <pc:docMk/>
+            <pc:sldMk cId="0" sldId="274"/>
+            <ac:spMk id="3" creationId="{00000000-0000-0000-0000-000000000000}"/>
+          </ac:spMkLst>
+        </pc:spChg>
+        <pc:spChg chg="mod">
+          <ac:chgData name="pragathi mudavath" userId="78fa310ea366d2e9" providerId="LiveId" clId="{789AFF9C-6324-4289-A034-E6789D76A855}" dt="2026-09-02T08:14:25.414" v="37" actId="255"/>
+          <ac:spMkLst>
+            <pc:docMk/>
+            <pc:sldMk cId="0" sldId="274"/>
+            <ac:spMk id="4" creationId="{00000000-0000-0000-0000-000000000000}"/>
+          </ac:spMkLst>
+        </pc:spChg>
+        <pc:spChg chg="mod">
+          <ac:chgData name="pragathi mudavath" userId="78fa310ea366d2e9" providerId="LiveId" clId="{789AFF9C-6324-4289-A034-E6789D76A855}" dt="2026-09-02T08:14:25.414" v="37" actId="255"/>
+          <ac:spMkLst>
+            <pc:docMk/>
+            <pc:sldMk cId="0" sldId="274"/>
+            <ac:spMk id="5" creationId="{00000000-0000-0000-0000-000000000000}"/>
+          </ac:spMkLst>
+        </pc:spChg>
+        <pc:spChg chg="mod">
+          <ac:chgData name="pragathi mudavath" userId="78fa310ea366d2e9" providerId="LiveId" clId="{789AFF9C-6324-4289-A034-E6789D76A855}" dt="2026-09-02T08:14:25.414" v="37" actId="255"/>
+          <ac:spMkLst>
+            <pc:docMk/>
+            <pc:sldMk cId="0" sldId="274"/>
+            <ac:spMk id="6" creationId="{00000000-0000-0000-0000-000000000000}"/>
+          </ac:spMkLst>
+        </pc:spChg>
+        <pc:spChg chg="mod">
+          <ac:chgData name="pragathi mudavath" userId="78fa310ea366d2e9" providerId="LiveId" clId="{789AFF9C-6324-4289-A034-E6789D76A855}" dt="2026-09-02T08:14:25.414" v="37" actId="255"/>
+          <ac:spMkLst>
+            <pc:docMk/>
+            <pc:sldMk cId="0" sldId="274"/>
+            <ac:spMk id="7" creationId="{00000000-0000-0000-0000-000000000000}"/>
+          </ac:spMkLst>
+        </pc:spChg>
+      </pc:sldChg>
+      <pc:sldChg chg="modSp mod">
+        <pc:chgData name="pragathi mudavath" userId="78fa310ea366d2e9" providerId="LiveId" clId="{789AFF9C-6324-4289-A034-E6789D76A855}" dt="2026-09-02T08:14:32.101" v="38" actId="255"/>
+        <pc:sldMkLst>
+          <pc:docMk/>
+          <pc:sldMk cId="0" sldId="275"/>
+        </pc:sldMkLst>
+        <pc:spChg chg="mod">
+          <ac:chgData name="pragathi mudavath" userId="78fa310ea366d2e9" providerId="LiveId" clId="{789AFF9C-6324-4289-A034-E6789D76A855}" dt="2026-09-02T08:14:32.101" v="38" actId="255"/>
+          <ac:spMkLst>
+            <pc:docMk/>
+            <pc:sldMk cId="0" sldId="275"/>
+            <ac:spMk id="2" creationId="{00000000-0000-0000-0000-000000000000}"/>
+          </ac:spMkLst>
+        </pc:spChg>
+        <pc:spChg chg="mod">
+          <ac:chgData name="pragathi mudavath" userId="78fa310ea366d2e9" providerId="LiveId" clId="{789AFF9C-6324-4289-A034-E6789D76A855}" dt="2026-09-02T08:14:32.101" v="38" actId="255"/>
+          <ac:spMkLst>
+            <pc:docMk/>
+            <pc:sldMk cId="0" sldId="275"/>
+            <ac:spMk id="3" creationId="{00000000-0000-0000-0000-000000000000}"/>
+          </ac:spMkLst>
+        </pc:spChg>
+        <pc:spChg chg="mod">
+          <ac:chgData name="pragathi mudavath" userId="78fa310ea366d2e9" providerId="LiveId" clId="{789AFF9C-6324-4289-A034-E6789D76A855}" dt="2026-09-02T08:14:32.101" v="38" actId="255"/>
+          <ac:spMkLst>
+            <pc:docMk/>
+            <pc:sldMk cId="0" sldId="275"/>
+            <ac:spMk id="4" creationId="{00000000-0000-0000-0000-000000000000}"/>
+          </ac:spMkLst>
+        </pc:spChg>
+        <pc:spChg chg="mod">
+          <ac:chgData name="pragathi mudavath" userId="78fa310ea366d2e9" providerId="LiveId" clId="{789AFF9C-6324-4289-A034-E6789D76A855}" dt="2026-09-02T08:14:32.101" v="38" actId="255"/>
+          <ac:spMkLst>
+            <pc:docMk/>
+            <pc:sldMk cId="0" sldId="275"/>
+            <ac:spMk id="5" creationId="{00000000-0000-0000-0000-000000000000}"/>
+          </ac:spMkLst>
+        </pc:spChg>
+        <pc:spChg chg="mod">
+          <ac:chgData name="pragathi mudavath" userId="78fa310ea366d2e9" providerId="LiveId" clId="{789AFF9C-6324-4289-A034-E6789D76A855}" dt="2026-09-02T08:14:32.101" v="38" actId="255"/>
+          <ac:spMkLst>
+            <pc:docMk/>
+            <pc:sldMk cId="0" sldId="275"/>
+            <ac:spMk id="6" creationId="{00000000-0000-0000-0000-000000000000}"/>
+          </ac:spMkLst>
+        </pc:spChg>
+        <pc:spChg chg="mod">
+          <ac:chgData name="pragathi mudavath" userId="78fa310ea366d2e9" providerId="LiveId" clId="{789AFF9C-6324-4289-A034-E6789D76A855}" dt="2026-09-02T08:14:32.101" v="38" actId="255"/>
+          <ac:spMkLst>
+            <pc:docMk/>
+            <pc:sldMk cId="0" sldId="275"/>
+            <ac:spMk id="7" creationId="{00000000-0000-0000-0000-000000000000}"/>
+          </ac:spMkLst>
+        </pc:spChg>
+      </pc:sldChg>
+      <pc:sldChg chg="modSp mod">
+        <pc:chgData name="pragathi mudavath" userId="78fa310ea366d2e9" providerId="LiveId" clId="{789AFF9C-6324-4289-A034-E6789D76A855}" dt="2026-09-02T08:14:42.327" v="39" actId="255"/>
+        <pc:sldMkLst>
+          <pc:docMk/>
+          <pc:sldMk cId="0" sldId="276"/>
+        </pc:sldMkLst>
+        <pc:spChg chg="mod">
+          <ac:chgData name="pragathi mudavath" userId="78fa310ea366d2e9" providerId="LiveId" clId="{789AFF9C-6324-4289-A034-E6789D76A855}" dt="2026-09-02T08:14:42.327" v="39" actId="255"/>
+          <ac:spMkLst>
+            <pc:docMk/>
+            <pc:sldMk cId="0" sldId="276"/>
+            <ac:spMk id="2" creationId="{00000000-0000-0000-0000-000000000000}"/>
+          </ac:spMkLst>
+        </pc:spChg>
+        <pc:spChg chg="mod">
+          <ac:chgData name="pragathi mudavath" userId="78fa310ea366d2e9" providerId="LiveId" clId="{789AFF9C-6324-4289-A034-E6789D76A855}" dt="2026-09-02T08:14:42.327" v="39" actId="255"/>
+          <ac:spMkLst>
+            <pc:docMk/>
+            <pc:sldMk cId="0" sldId="276"/>
+            <ac:spMk id="3" creationId="{00000000-0000-0000-0000-000000000000}"/>
+          </ac:spMkLst>
+        </pc:spChg>
+        <pc:spChg chg="mod">
+          <ac:chgData name="pragathi mudavath" userId="78fa310ea366d2e9" providerId="LiveId" clId="{789AFF9C-6324-4289-A034-E6789D76A855}" dt="2026-09-02T08:14:42.327" v="39" actId="255"/>
+          <ac:spMkLst>
+            <pc:docMk/>
+            <pc:sldMk cId="0" sldId="276"/>
+            <ac:spMk id="4" creationId="{00000000-0000-0000-0000-000000000000}"/>
+          </ac:spMkLst>
+        </pc:spChg>
+        <pc:spChg chg="mod">
+          <ac:chgData name="pragathi mudavath" userId="78fa310ea366d2e9" providerId="LiveId" clId="{789AFF9C-6324-4289-A034-E6789D76A855}" dt="2026-09-02T08:14:42.327" v="39" actId="255"/>
+          <ac:spMkLst>
+            <pc:docMk/>
+            <pc:sldMk cId="0" sldId="276"/>
+            <ac:spMk id="5" creationId="{00000000-0000-0000-0000-000000000000}"/>
+          </ac:spMkLst>
+        </pc:spChg>
+        <pc:spChg chg="mod">
+          <ac:chgData name="pragathi mudavath" userId="78fa310ea366d2e9" providerId="LiveId" clId="{789AFF9C-6324-4289-A034-E6789D76A855}" dt="2026-09-02T08:14:42.327" v="39" actId="255"/>
+          <ac:spMkLst>
+            <pc:docMk/>
+            <pc:sldMk cId="0" sldId="276"/>
+            <ac:spMk id="6" creationId="{00000000-0000-0000-0000-000000000000}"/>
+          </ac:spMkLst>
+        </pc:spChg>
+        <pc:spChg chg="mod">
+          <ac:chgData name="pragathi mudavath" userId="78fa310ea366d2e9" providerId="LiveId" clId="{789AFF9C-6324-4289-A034-E6789D76A855}" dt="2026-09-02T08:14:42.327" v="39" actId="255"/>
+          <ac:spMkLst>
+            <pc:docMk/>
+            <pc:sldMk cId="0" sldId="276"/>
+            <ac:spMk id="7" creationId="{00000000-0000-0000-0000-000000000000}"/>
+          </ac:spMkLst>
+        </pc:spChg>
+      </pc:sldChg>
+      <pc:sldChg chg="modSp mod">
+        <pc:chgData name="pragathi mudavath" userId="78fa310ea366d2e9" providerId="LiveId" clId="{789AFF9C-6324-4289-A034-E6789D76A855}" dt="2026-09-02T08:15:02.143" v="41" actId="255"/>
+        <pc:sldMkLst>
+          <pc:docMk/>
+          <pc:sldMk cId="0" sldId="277"/>
+        </pc:sldMkLst>
+        <pc:spChg chg="mod">
+          <ac:chgData name="pragathi mudavath" userId="78fa310ea366d2e9" providerId="LiveId" clId="{789AFF9C-6324-4289-A034-E6789D76A855}" dt="2026-09-02T08:15:02.143" v="41" actId="255"/>
+          <ac:spMkLst>
+            <pc:docMk/>
+            <pc:sldMk cId="0" sldId="277"/>
+            <ac:spMk id="2" creationId="{00000000-0000-0000-0000-000000000000}"/>
+          </ac:spMkLst>
+        </pc:spChg>
+        <pc:spChg chg="mod">
+          <ac:chgData name="pragathi mudavath" userId="78fa310ea366d2e9" providerId="LiveId" clId="{789AFF9C-6324-4289-A034-E6789D76A855}" dt="2026-09-02T08:15:02.143" v="41" actId="255"/>
+          <ac:spMkLst>
+            <pc:docMk/>
+            <pc:sldMk cId="0" sldId="277"/>
+            <ac:spMk id="3" creationId="{00000000-0000-0000-0000-000000000000}"/>
+          </ac:spMkLst>
+        </pc:spChg>
+        <pc:spChg chg="mod">
+          <ac:chgData name="pragathi mudavath" userId="78fa310ea366d2e9" providerId="LiveId" clId="{789AFF9C-6324-4289-A034-E6789D76A855}" dt="2026-09-02T08:15:02.143" v="41" actId="255"/>
+          <ac:spMkLst>
+            <pc:docMk/>
+            <pc:sldMk cId="0" sldId="277"/>
+            <ac:spMk id="4" creationId="{00000000-0000-0000-0000-000000000000}"/>
+          </ac:spMkLst>
+        </pc:spChg>
+        <pc:spChg chg="mod">
+          <ac:chgData name="pragathi mudavath" userId="78fa310ea366d2e9" providerId="LiveId" clId="{789AFF9C-6324-4289-A034-E6789D76A855}" dt="2026-09-02T08:15:02.143" v="41" actId="255"/>
+          <ac:spMkLst>
+            <pc:docMk/>
+            <pc:sldMk cId="0" sldId="277"/>
+            <ac:spMk id="5" creationId="{00000000-0000-0000-0000-000000000000}"/>
+          </ac:spMkLst>
+        </pc:spChg>
+        <pc:spChg chg="mod">
+          <ac:chgData name="pragathi mudavath" userId="78fa310ea366d2e9" providerId="LiveId" clId="{789AFF9C-6324-4289-A034-E6789D76A855}" dt="2026-09-02T08:15:02.143" v="41" actId="255"/>
+          <ac:spMkLst>
+            <pc:docMk/>
+            <pc:sldMk cId="0" sldId="277"/>
+            <ac:spMk id="6" creationId="{00000000-0000-0000-0000-000000000000}"/>
+          </ac:spMkLst>
+        </pc:spChg>
+        <pc:spChg chg="mod">
+          <ac:chgData name="pragathi mudavath" userId="78fa310ea366d2e9" providerId="LiveId" clId="{789AFF9C-6324-4289-A034-E6789D76A855}" dt="2026-09-02T08:15:02.143" v="41" actId="255"/>
+          <ac:spMkLst>
+            <pc:docMk/>
+            <pc:sldMk cId="0" sldId="277"/>
+            <ac:spMk id="7" creationId="{00000000-0000-0000-0000-000000000000}"/>
+          </ac:spMkLst>
+        </pc:spChg>
+      </pc:sldChg>
+      <pc:sldChg chg="modSp mod">
+        <pc:chgData name="pragathi mudavath" userId="78fa310ea366d2e9" providerId="LiveId" clId="{789AFF9C-6324-4289-A034-E6789D76A855}" dt="2026-09-02T08:15:11.063" v="42" actId="255"/>
+        <pc:sldMkLst>
+          <pc:docMk/>
+          <pc:sldMk cId="0" sldId="278"/>
+        </pc:sldMkLst>
+        <pc:spChg chg="mod">
+          <ac:chgData name="pragathi mudavath" userId="78fa310ea366d2e9" providerId="LiveId" clId="{789AFF9C-6324-4289-A034-E6789D76A855}" dt="2026-09-02T08:15:11.063" v="42" actId="255"/>
+          <ac:spMkLst>
+            <pc:docMk/>
+            <pc:sldMk cId="0" sldId="278"/>
+            <ac:spMk id="2" creationId="{00000000-0000-0000-0000-000000000000}"/>
+          </ac:spMkLst>
+        </pc:spChg>
+        <pc:spChg chg="mod">
+          <ac:chgData name="pragathi mudavath" userId="78fa310ea366d2e9" providerId="LiveId" clId="{789AFF9C-6324-4289-A034-E6789D76A855}" dt="2026-09-02T08:15:11.063" v="42" actId="255"/>
+          <ac:spMkLst>
+            <pc:docMk/>
+            <pc:sldMk cId="0" sldId="278"/>
+            <ac:spMk id="3" creationId="{00000000-0000-0000-0000-000000000000}"/>
+          </ac:spMkLst>
+        </pc:spChg>
+        <pc:spChg chg="mod">
+          <ac:chgData name="pragathi mudavath" userId="78fa310ea366d2e9" providerId="LiveId" clId="{789AFF9C-6324-4289-A034-E6789D76A855}" dt="2026-09-02T08:15:11.063" v="42" actId="255"/>
+          <ac:spMkLst>
+            <pc:docMk/>
+            <pc:sldMk cId="0" sldId="278"/>
+            <ac:spMk id="4" creationId="{00000000-0000-0000-0000-000000000000}"/>
+          </ac:spMkLst>
+        </pc:spChg>
+        <pc:spChg chg="mod">
+          <ac:chgData name="pragathi mudavath" userId="78fa310ea366d2e9" providerId="LiveId" clId="{789AFF9C-6324-4289-A034-E6789D76A855}" dt="2026-09-02T08:15:11.063" v="42" actId="255"/>
+          <ac:spMkLst>
+            <pc:docMk/>
+            <pc:sldMk cId="0" sldId="278"/>
+            <ac:spMk id="5" creationId="{00000000-0000-0000-0000-000000000000}"/>
+          </ac:spMkLst>
+        </pc:spChg>
+        <pc:spChg chg="mod">
+          <ac:chgData name="pragathi mudavath" userId="78fa310ea366d2e9" providerId="LiveId" clId="{789AFF9C-6324-4289-A034-E6789D76A855}" dt="2026-09-02T08:15:11.063" v="42" actId="255"/>
+          <ac:spMkLst>
+            <pc:docMk/>
+            <pc:sldMk cId="0" sldId="278"/>
+            <ac:spMk id="6" creationId="{00000000-0000-0000-0000-000000000000}"/>
+          </ac:spMkLst>
+        </pc:spChg>
+        <pc:spChg chg="mod">
+          <ac:chgData name="pragathi mudavath" userId="78fa310ea366d2e9" providerId="LiveId" clId="{789AFF9C-6324-4289-A034-E6789D76A855}" dt="2026-09-02T08:15:11.063" v="42" actId="255"/>
+          <ac:spMkLst>
+            <pc:docMk/>
+            <pc:sldMk cId="0" sldId="278"/>
+            <ac:spMk id="7" creationId="{00000000-0000-0000-0000-000000000000}"/>
+          </ac:spMkLst>
+        </pc:spChg>
+      </pc:sldChg>
+      <pc:sldChg chg="modSp mod">
+        <pc:chgData name="pragathi mudavath" userId="78fa310ea366d2e9" providerId="LiveId" clId="{789AFF9C-6324-4289-A034-E6789D76A855}" dt="2026-09-02T08:15:18.955" v="43" actId="255"/>
+        <pc:sldMkLst>
+          <pc:docMk/>
+          <pc:sldMk cId="0" sldId="279"/>
+        </pc:sldMkLst>
+        <pc:spChg chg="mod">
+          <ac:chgData name="pragathi mudavath" userId="78fa310ea366d2e9" providerId="LiveId" clId="{789AFF9C-6324-4289-A034-E6789D76A855}" dt="2026-09-02T08:15:18.955" v="43" actId="255"/>
+          <ac:spMkLst>
+            <pc:docMk/>
+            <pc:sldMk cId="0" sldId="279"/>
+            <ac:spMk id="2" creationId="{00000000-0000-0000-0000-000000000000}"/>
+          </ac:spMkLst>
+        </pc:spChg>
+        <pc:spChg chg="mod">
+          <ac:chgData name="pragathi mudavath" userId="78fa310ea366d2e9" providerId="LiveId" clId="{789AFF9C-6324-4289-A034-E6789D76A855}" dt="2026-09-02T08:15:18.955" v="43" actId="255"/>
+          <ac:spMkLst>
+            <pc:docMk/>
+            <pc:sldMk cId="0" sldId="279"/>
+            <ac:spMk id="3" creationId="{00000000-0000-0000-0000-000000000000}"/>
+          </ac:spMkLst>
+        </pc:spChg>
+        <pc:spChg chg="mod">
+          <ac:chgData name="pragathi mudavath" userId="78fa310ea366d2e9" providerId="LiveId" clId="{789AFF9C-6324-4289-A034-E6789D76A855}" dt="2026-09-02T08:15:18.955" v="43" actId="255"/>
+          <ac:spMkLst>
+            <pc:docMk/>
+            <pc:sldMk cId="0" sldId="279"/>
+            <ac:spMk id="4" creationId="{00000000-0000-0000-0000-000000000000}"/>
+          </ac:spMkLst>
+        </pc:spChg>
+        <pc:spChg chg="mod">
+          <ac:chgData name="pragathi mudavath" userId="78fa310ea366d2e9" providerId="LiveId" clId="{789AFF9C-6324-4289-A034-E6789D76A855}" dt="2026-09-02T08:15:18.955" v="43" actId="255"/>
+          <ac:spMkLst>
+            <pc:docMk/>
+            <pc:sldMk cId="0" sldId="279"/>
+            <ac:spMk id="5" creationId="{00000000-0000-0000-0000-000000000000}"/>
+          </ac:spMkLst>
+        </pc:spChg>
+        <pc:spChg chg="mod">
+          <ac:chgData name="pragathi mudavath" userId="78fa310ea366d2e9" providerId="LiveId" clId="{789AFF9C-6324-4289-A034-E6789D76A855}" dt="2026-09-02T08:15:18.955" v="43" actId="255"/>
+          <ac:spMkLst>
+            <pc:docMk/>
+            <pc:sldMk cId="0" sldId="279"/>
+            <ac:spMk id="6" creationId="{00000000-0000-0000-0000-000000000000}"/>
+          </ac:spMkLst>
+        </pc:spChg>
+        <pc:spChg chg="mod">
+          <ac:chgData name="pragathi mudavath" userId="78fa310ea366d2e9" providerId="LiveId" clId="{789AFF9C-6324-4289-A034-E6789D76A855}" dt="2026-09-02T08:15:18.955" v="43" actId="255"/>
+          <ac:spMkLst>
+            <pc:docMk/>
+            <pc:sldMk cId="0" sldId="279"/>
+            <ac:spMk id="7" creationId="{00000000-0000-0000-0000-000000000000}"/>
+          </ac:spMkLst>
+        </pc:spChg>
+      </pc:sldChg>
+      <pc:sldChg chg="modSp mod">
+        <pc:chgData name="pragathi mudavath" userId="78fa310ea366d2e9" providerId="LiveId" clId="{789AFF9C-6324-4289-A034-E6789D76A855}" dt="2026-09-02T08:15:24.383" v="44" actId="255"/>
+        <pc:sldMkLst>
+          <pc:docMk/>
+          <pc:sldMk cId="0" sldId="280"/>
+        </pc:sldMkLst>
+        <pc:spChg chg="mod">
+          <ac:chgData name="pragathi mudavath" userId="78fa310ea366d2e9" providerId="LiveId" clId="{789AFF9C-6324-4289-A034-E6789D76A855}" dt="2026-09-02T08:15:24.383" v="44" actId="255"/>
+          <ac:spMkLst>
+            <pc:docMk/>
+            <pc:sldMk cId="0" sldId="280"/>
+            <ac:spMk id="2" creationId="{00000000-0000-0000-0000-000000000000}"/>
+          </ac:spMkLst>
+        </pc:spChg>
+        <pc:spChg chg="mod">
+          <ac:chgData name="pragathi mudavath" userId="78fa310ea366d2e9" providerId="LiveId" clId="{789AFF9C-6324-4289-A034-E6789D76A855}" dt="2026-09-02T08:15:24.383" v="44" actId="255"/>
+          <ac:spMkLst>
+            <pc:docMk/>
+            <pc:sldMk cId="0" sldId="280"/>
+            <ac:spMk id="3" creationId="{00000000-0000-0000-0000-000000000000}"/>
+          </ac:spMkLst>
+        </pc:spChg>
+        <pc:spChg chg="mod">
+          <ac:chgData name="pragathi mudavath" userId="78fa310ea366d2e9" providerId="LiveId" clId="{789AFF9C-6324-4289-A034-E6789D76A855}" dt="2026-09-02T08:15:24.383" v="44" actId="255"/>
+          <ac:spMkLst>
+            <pc:docMk/>
+            <pc:sldMk cId="0" sldId="280"/>
+            <ac:spMk id="4" creationId="{00000000-0000-0000-0000-000000000000}"/>
+          </ac:spMkLst>
+        </pc:spChg>
+        <pc:spChg chg="mod">
+          <ac:chgData name="pragathi mudavath" userId="78fa310ea366d2e9" providerId="LiveId" clId="{789AFF9C-6324-4289-A034-E6789D76A855}" dt="2026-09-02T08:15:24.383" v="44" actId="255"/>
+          <ac:spMkLst>
+            <pc:docMk/>
+            <pc:sldMk cId="0" sldId="280"/>
+            <ac:spMk id="5" creationId="{00000000-0000-0000-0000-000000000000}"/>
+          </ac:spMkLst>
+        </pc:spChg>
+        <pc:spChg chg="mod">
+          <ac:chgData name="pragathi mudavath" userId="78fa310ea366d2e9" providerId="LiveId" clId="{789AFF9C-6324-4289-A034-E6789D76A855}" dt="2026-09-02T08:15:24.383" v="44" actId="255"/>
+          <ac:spMkLst>
+            <pc:docMk/>
+            <pc:sldMk cId="0" sldId="280"/>
+            <ac:spMk id="6" creationId="{00000000-0000-0000-0000-000000000000}"/>
+          </ac:spMkLst>
+        </pc:spChg>
+        <pc:spChg chg="mod">
+          <ac:chgData name="pragathi mudavath" userId="78fa310ea366d2e9" providerId="LiveId" clId="{789AFF9C-6324-4289-A034-E6789D76A855}" dt="2026-09-02T08:15:24.383" v="44" actId="255"/>
+          <ac:spMkLst>
+            <pc:docMk/>
+            <pc:sldMk cId="0" sldId="280"/>
+            <ac:spMk id="7" creationId="{00000000-0000-0000-0000-000000000000}"/>
+          </ac:spMkLst>
+        </pc:spChg>
+      </pc:sldChg>
+      <pc:sldChg chg="modSp mod">
+        <pc:chgData name="pragathi mudavath" userId="78fa310ea366d2e9" providerId="LiveId" clId="{789AFF9C-6324-4289-A034-E6789D76A855}" dt="2026-09-02T08:15:33.423" v="46" actId="255"/>
+        <pc:sldMkLst>
+          <pc:docMk/>
+          <pc:sldMk cId="0" sldId="281"/>
+        </pc:sldMkLst>
+        <pc:spChg chg="mod">
+          <ac:chgData name="pragathi mudavath" userId="78fa310ea366d2e9" providerId="LiveId" clId="{789AFF9C-6324-4289-A034-E6789D76A855}" dt="2026-09-02T08:15:33.423" v="46" actId="255"/>
+          <ac:spMkLst>
+            <pc:docMk/>
+            <pc:sldMk cId="0" sldId="281"/>
+            <ac:spMk id="2" creationId="{00000000-0000-0000-0000-000000000000}"/>
+          </ac:spMkLst>
+        </pc:spChg>
+        <pc:spChg chg="mod">
+          <ac:chgData name="pragathi mudavath" userId="78fa310ea366d2e9" providerId="LiveId" clId="{789AFF9C-6324-4289-A034-E6789D76A855}" dt="2026-09-02T08:15:33.423" v="46" actId="255"/>
+          <ac:spMkLst>
+            <pc:docMk/>
+            <pc:sldMk cId="0" sldId="281"/>
+            <ac:spMk id="3" creationId="{00000000-0000-0000-0000-000000000000}"/>
+          </ac:spMkLst>
+        </pc:spChg>
+        <pc:spChg chg="mod">
+          <ac:chgData name="pragathi mudavath" userId="78fa310ea366d2e9" providerId="LiveId" clId="{789AFF9C-6324-4289-A034-E6789D76A855}" dt="2026-09-02T08:15:33.423" v="46" actId="255"/>
+          <ac:spMkLst>
+            <pc:docMk/>
+            <pc:sldMk cId="0" sldId="281"/>
+            <ac:spMk id="4" creationId="{00000000-0000-0000-0000-000000000000}"/>
+          </ac:spMkLst>
+        </pc:spChg>
+        <pc:spChg chg="mod">
+          <ac:chgData name="pragathi mudavath" userId="78fa310ea366d2e9" providerId="LiveId" clId="{789AFF9C-6324-4289-A034-E6789D76A855}" dt="2026-09-02T08:15:33.423" v="46" actId="255"/>
+          <ac:spMkLst>
+            <pc:docMk/>
+            <pc:sldMk cId="0" sldId="281"/>
+            <ac:spMk id="5" creationId="{00000000-0000-0000-0000-000000000000}"/>
+          </ac:spMkLst>
+        </pc:spChg>
+        <pc:spChg chg="mod">
+          <ac:chgData name="pragathi mudavath" userId="78fa310ea366d2e9" providerId="LiveId" clId="{789AFF9C-6324-4289-A034-E6789D76A855}" dt="2026-09-02T08:15:33.423" v="46" actId="255"/>
+          <ac:spMkLst>
+            <pc:docMk/>
+            <pc:sldMk cId="0" sldId="281"/>
+            <ac:spMk id="6" creationId="{00000000-0000-0000-0000-000000000000}"/>
+          </ac:spMkLst>
+        </pc:spChg>
+        <pc:spChg chg="mod">
+          <ac:chgData name="pragathi mudavath" userId="78fa310ea366d2e9" providerId="LiveId" clId="{789AFF9C-6324-4289-A034-E6789D76A855}" dt="2026-09-02T08:15:33.423" v="46" actId="255"/>
+          <ac:spMkLst>
+            <pc:docMk/>
+            <pc:sldMk cId="0" sldId="281"/>
+            <ac:spMk id="7" creationId="{00000000-0000-0000-0000-000000000000}"/>
+          </ac:spMkLst>
+        </pc:spChg>
+        <pc:spChg chg="mod">
+          <ac:chgData name="pragathi mudavath" userId="78fa310ea366d2e9" providerId="LiveId" clId="{789AFF9C-6324-4289-A034-E6789D76A855}" dt="2026-09-02T08:15:33.423" v="46" actId="255"/>
+          <ac:spMkLst>
+            <pc:docMk/>
+            <pc:sldMk cId="0" sldId="281"/>
+            <ac:spMk id="8" creationId="{00000000-0000-0000-0000-000000000000}"/>
+          </ac:spMkLst>
+        </pc:spChg>
+        <pc:spChg chg="mod">
+          <ac:chgData name="pragathi mudavath" userId="78fa310ea366d2e9" providerId="LiveId" clId="{789AFF9C-6324-4289-A034-E6789D76A855}" dt="2026-09-02T08:15:33.423" v="46" actId="255"/>
+          <ac:spMkLst>
+            <pc:docMk/>
+            <pc:sldMk cId="0" sldId="281"/>
+            <ac:spMk id="9" creationId="{00000000-0000-0000-0000-000000000000}"/>
+          </ac:spMkLst>
+        </pc:spChg>
+        <pc:spChg chg="mod">
+          <ac:chgData name="pragathi mudavath" userId="78fa310ea366d2e9" providerId="LiveId" clId="{789AFF9C-6324-4289-A034-E6789D76A855}" dt="2026-09-02T08:15:33.423" v="46" actId="255"/>
+          <ac:spMkLst>
+            <pc:docMk/>
+            <pc:sldMk cId="0" sldId="281"/>
+            <ac:spMk id="10" creationId="{00000000-0000-0000-0000-000000000000}"/>
+          </ac:spMkLst>
+        </pc:spChg>
+        <pc:spChg chg="mod">
+          <ac:chgData name="pragathi mudavath" userId="78fa310ea366d2e9" providerId="LiveId" clId="{789AFF9C-6324-4289-A034-E6789D76A855}" dt="2026-09-02T08:15:33.423" v="46" actId="255"/>
+          <ac:spMkLst>
+            <pc:docMk/>
+            <pc:sldMk cId="0" sldId="281"/>
+            <ac:spMk id="11" creationId="{00000000-0000-0000-0000-000000000000}"/>
+          </ac:spMkLst>
+        </pc:spChg>
+      </pc:sldChg>
+      <pc:sldChg chg="modSp mod">
+        <pc:chgData name="pragathi mudavath" userId="78fa310ea366d2e9" providerId="LiveId" clId="{789AFF9C-6324-4289-A034-E6789D76A855}" dt="2026-09-02T08:15:45.252" v="47" actId="255"/>
+        <pc:sldMkLst>
+          <pc:docMk/>
+          <pc:sldMk cId="0" sldId="282"/>
+        </pc:sldMkLst>
+        <pc:spChg chg="mod">
+          <ac:chgData name="pragathi mudavath" userId="78fa310ea366d2e9" providerId="LiveId" clId="{789AFF9C-6324-4289-A034-E6789D76A855}" dt="2026-09-02T08:15:45.252" v="47" actId="255"/>
+          <ac:spMkLst>
+            <pc:docMk/>
+            <pc:sldMk cId="0" sldId="282"/>
+            <ac:spMk id="2" creationId="{00000000-0000-0000-0000-000000000000}"/>
+          </ac:spMkLst>
+        </pc:spChg>
+        <pc:spChg chg="mod">
+          <ac:chgData name="pragathi mudavath" userId="78fa310ea366d2e9" providerId="LiveId" clId="{789AFF9C-6324-4289-A034-E6789D76A855}" dt="2026-09-02T08:15:45.252" v="47" actId="255"/>
+          <ac:spMkLst>
+            <pc:docMk/>
+            <pc:sldMk cId="0" sldId="282"/>
+            <ac:spMk id="3" creationId="{00000000-0000-0000-0000-000000000000}"/>
+          </ac:spMkLst>
+        </pc:spChg>
+        <pc:spChg chg="mod">
+          <ac:chgData name="pragathi mudavath" userId="78fa310ea366d2e9" providerId="LiveId" clId="{789AFF9C-6324-4289-A034-E6789D76A855}" dt="2026-09-02T08:15:45.252" v="47" actId="255"/>
+          <ac:spMkLst>
+            <pc:docMk/>
+            <pc:sldMk cId="0" sldId="282"/>
+            <ac:spMk id="4" creationId="{00000000-0000-0000-0000-000000000000}"/>
+          </ac:spMkLst>
+        </pc:spChg>
+        <pc:spChg chg="mod">
+          <ac:chgData name="pragathi mudavath" userId="78fa310ea366d2e9" providerId="LiveId" clId="{789AFF9C-6324-4289-A034-E6789D76A855}" dt="2026-09-02T08:15:45.252" v="47" actId="255"/>
+          <ac:spMkLst>
+            <pc:docMk/>
+            <pc:sldMk cId="0" sldId="282"/>
+            <ac:spMk id="5" creationId="{00000000-0000-0000-0000-000000000000}"/>
+          </ac:spMkLst>
+        </pc:spChg>
+        <pc:spChg chg="mod">
+          <ac:chgData name="pragathi mudavath" userId="78fa310ea366d2e9" providerId="LiveId" clId="{789AFF9C-6324-4289-A034-E6789D76A855}" dt="2026-09-02T08:15:45.252" v="47" actId="255"/>
+          <ac:spMkLst>
+            <pc:docMk/>
+            <pc:sldMk cId="0" sldId="282"/>
+            <ac:spMk id="6" creationId="{00000000-0000-0000-0000-000000000000}"/>
+          </ac:spMkLst>
+        </pc:spChg>
+        <pc:spChg chg="mod">
+          <ac:chgData name="pragathi mudavath" userId="78fa310ea366d2e9" providerId="LiveId" clId="{789AFF9C-6324-4289-A034-E6789D76A855}" dt="2026-09-02T08:15:45.252" v="47" actId="255"/>
+          <ac:spMkLst>
+            <pc:docMk/>
+            <pc:sldMk cId="0" sldId="282"/>
+            <ac:spMk id="7" creationId="{00000000-0000-0000-0000-000000000000}"/>
+          </ac:spMkLst>
+        </pc:spChg>
+      </pc:sldChg>
+      <pc:sldChg chg="modSp mod">
+        <pc:chgData name="pragathi mudavath" userId="78fa310ea366d2e9" providerId="LiveId" clId="{789AFF9C-6324-4289-A034-E6789D76A855}" dt="2026-09-02T08:15:55.346" v="48" actId="255"/>
+        <pc:sldMkLst>
+          <pc:docMk/>
+          <pc:sldMk cId="0" sldId="283"/>
+        </pc:sldMkLst>
+        <pc:spChg chg="mod">
+          <ac:chgData name="pragathi mudavath" userId="78fa310ea366d2e9" providerId="LiveId" clId="{789AFF9C-6324-4289-A034-E6789D76A855}" dt="2026-09-02T08:15:55.346" v="48" actId="255"/>
+          <ac:spMkLst>
+            <pc:docMk/>
+            <pc:sldMk cId="0" sldId="283"/>
+            <ac:spMk id="2" creationId="{00000000-0000-0000-0000-000000000000}"/>
+          </ac:spMkLst>
+        </pc:spChg>
+        <pc:spChg chg="mod">
+          <ac:chgData name="pragathi mudavath" userId="78fa310ea366d2e9" providerId="LiveId" clId="{789AFF9C-6324-4289-A034-E6789D76A855}" dt="2026-09-02T08:15:55.346" v="48" actId="255"/>
+          <ac:spMkLst>
+            <pc:docMk/>
+            <pc:sldMk cId="0" sldId="283"/>
+            <ac:spMk id="3" creationId="{00000000-0000-0000-0000-000000000000}"/>
+          </ac:spMkLst>
+        </pc:spChg>
+        <pc:spChg chg="mod">
+          <ac:chgData name="pragathi mudavath" userId="78fa310ea366d2e9" providerId="LiveId" clId="{789AFF9C-6324-4289-A034-E6789D76A855}" dt="2026-09-02T08:15:55.346" v="48" actId="255"/>
+          <ac:spMkLst>
+            <pc:docMk/>
+            <pc:sldMk cId="0" sldId="283"/>
+            <ac:spMk id="4" creationId="{00000000-0000-0000-0000-000000000000}"/>
+          </ac:spMkLst>
+        </pc:spChg>
+        <pc:spChg chg="mod">
+          <ac:chgData name="pragathi mudavath" userId="78fa310ea366d2e9" providerId="LiveId" clId="{789AFF9C-6324-4289-A034-E6789D76A855}" dt="2026-09-02T08:15:55.346" v="48" actId="255"/>
+          <ac:spMkLst>
+            <pc:docMk/>
+            <pc:sldMk cId="0" sldId="283"/>
+            <ac:spMk id="5" creationId="{00000000-0000-0000-0000-000000000000}"/>
+          </ac:spMkLst>
+        </pc:spChg>
+        <pc:spChg chg="mod">
+          <ac:chgData name="pragathi mudavath" userId="78fa310ea366d2e9" providerId="LiveId" clId="{789AFF9C-6324-4289-A034-E6789D76A855}" dt="2026-09-02T08:15:55.346" v="48" actId="255"/>
+          <ac:spMkLst>
+            <pc:docMk/>
+            <pc:sldMk cId="0" sldId="283"/>
+            <ac:spMk id="6" creationId="{00000000-0000-0000-0000-000000000000}"/>
+          </ac:spMkLst>
+        </pc:spChg>
+        <pc:spChg chg="mod">
+          <ac:chgData name="pragathi mudavath" userId="78fa310ea366d2e9" providerId="LiveId" clId="{789AFF9C-6324-4289-A034-E6789D76A855}" dt="2026-09-02T08:15:55.346" v="48" actId="255"/>
+          <ac:spMkLst>
+            <pc:docMk/>
+            <pc:sldMk cId="0" sldId="283"/>
+            <ac:spMk id="7" creationId="{00000000-0000-0000-0000-000000000000}"/>
+          </ac:spMkLst>
+        </pc:spChg>
+        <pc:spChg chg="mod">
+          <ac:chgData name="pragathi mudavath" userId="78fa310ea366d2e9" providerId="LiveId" clId="{789AFF9C-6324-4289-A034-E6789D76A855}" dt="2026-09-02T08:15:55.346" v="48" actId="255"/>
+          <ac:spMkLst>
+            <pc:docMk/>
+            <pc:sldMk cId="0" sldId="283"/>
+            <ac:spMk id="8" creationId="{00000000-0000-0000-0000-000000000000}"/>
+          </ac:spMkLst>
+        </pc:spChg>
+      </pc:sldChg>
+    </pc:docChg>
+  </pc:docChgLst>
+</pc:chgInfo>
 </file>
 
 <file path=ppt/slideLayouts/slideLayout1.xml><?xml version="1.0" encoding="utf-8"?>
@@ -176,10 +1802,9 @@
           <a:lstStyle/>
           <a:p>
             <a:r>
-              <a:rPr lang="en-US" smtClean="0"/>
+              <a:rPr lang="en-US"/>
               <a:t>Click to edit Master title style</a:t>
             </a:r>
-            <a:endParaRPr lang="en-US"/>
           </a:p>
         </p:txBody>
       </p:sp>
@@ -295,10 +1920,9 @@
           </a:lstStyle>
           <a:p>
             <a:r>
-              <a:rPr lang="en-US" smtClean="0"/>
+              <a:rPr lang="en-US"/>
               <a:t>Click to edit Master subtitle style</a:t>
             </a:r>
-            <a:endParaRPr lang="en-US"/>
           </a:p>
         </p:txBody>
       </p:sp>
@@ -319,7 +1943,7 @@
           <a:p>
             <a:fld id="{5BCAD085-E8A6-8845-BD4E-CB4CCA059FC4}" type="datetimeFigureOut">
               <a:rPr lang="en-US" smtClean="0"/>
-              <a:t>1/27/13</a:t>
+              <a:t>9/2/2026</a:t>
             </a:fld>
             <a:endParaRPr lang="en-US"/>
           </a:p>
@@ -413,10 +2037,9 @@
           <a:lstStyle/>
           <a:p>
             <a:r>
-              <a:rPr lang="en-US" smtClean="0"/>
+              <a:rPr lang="en-US"/>
               <a:t>Click to edit Master title style</a:t>
             </a:r>
-            <a:endParaRPr lang="en-US"/>
           </a:p>
         </p:txBody>
       </p:sp>
@@ -437,38 +2060,37 @@
           <a:p>
             <a:pPr lvl="0"/>
             <a:r>
-              <a:rPr lang="en-US" smtClean="0"/>
+              <a:rPr lang="en-US"/>
               <a:t>Click to edit Master text styles</a:t>
             </a:r>
           </a:p>
           <a:p>
             <a:pPr lvl="1"/>
             <a:r>
-              <a:rPr lang="en-US" smtClean="0"/>
+              <a:rPr lang="en-US"/>
               <a:t>Second level</a:t>
             </a:r>
           </a:p>
           <a:p>
             <a:pPr lvl="2"/>
             <a:r>
-              <a:rPr lang="en-US" smtClean="0"/>
+              <a:rPr lang="en-US"/>
               <a:t>Third level</a:t>
             </a:r>
           </a:p>
           <a:p>
             <a:pPr lvl="3"/>
             <a:r>
-              <a:rPr lang="en-US" smtClean="0"/>
+              <a:rPr lang="en-US"/>
               <a:t>Fourth level</a:t>
             </a:r>
           </a:p>
           <a:p>
             <a:pPr lvl="4"/>
             <a:r>
-              <a:rPr lang="en-US" smtClean="0"/>
+              <a:rPr lang="en-US"/>
               <a:t>Fifth level</a:t>
             </a:r>
-            <a:endParaRPr lang="en-US"/>
           </a:p>
         </p:txBody>
       </p:sp>
@@ -489,7 +2111,7 @@
           <a:p>
             <a:fld id="{5BCAD085-E8A6-8845-BD4E-CB4CCA059FC4}" type="datetimeFigureOut">
               <a:rPr lang="en-US" smtClean="0"/>
-              <a:t>1/27/13</a:t>
+              <a:t>9/2/2026</a:t>
             </a:fld>
             <a:endParaRPr lang="en-US"/>
           </a:p>
@@ -588,10 +2210,9 @@
           <a:lstStyle/>
           <a:p>
             <a:r>
-              <a:rPr lang="en-US" smtClean="0"/>
+              <a:rPr lang="en-US"/>
               <a:t>Click to edit Master title style</a:t>
             </a:r>
-            <a:endParaRPr lang="en-US"/>
           </a:p>
         </p:txBody>
       </p:sp>
@@ -617,38 +2238,37 @@
           <a:p>
             <a:pPr lvl="0"/>
             <a:r>
-              <a:rPr lang="en-US" smtClean="0"/>
+              <a:rPr lang="en-US"/>
               <a:t>Click to edit Master text styles</a:t>
             </a:r>
           </a:p>
           <a:p>
             <a:pPr lvl="1"/>
             <a:r>
-              <a:rPr lang="en-US" smtClean="0"/>
+              <a:rPr lang="en-US"/>
               <a:t>Second level</a:t>
             </a:r>
           </a:p>
           <a:p>
             <a:pPr lvl="2"/>
             <a:r>
-              <a:rPr lang="en-US" smtClean="0"/>
+              <a:rPr lang="en-US"/>
               <a:t>Third level</a:t>
             </a:r>
           </a:p>
           <a:p>
             <a:pPr lvl="3"/>
             <a:r>
-              <a:rPr lang="en-US" smtClean="0"/>
+              <a:rPr lang="en-US"/>
               <a:t>Fourth level</a:t>
             </a:r>
           </a:p>
           <a:p>
             <a:pPr lvl="4"/>
             <a:r>
-              <a:rPr lang="en-US" smtClean="0"/>
+              <a:rPr lang="en-US"/>
               <a:t>Fifth level</a:t>
             </a:r>
-            <a:endParaRPr lang="en-US"/>
           </a:p>
         </p:txBody>
       </p:sp>
@@ -669,7 +2289,7 @@
           <a:p>
             <a:fld id="{5BCAD085-E8A6-8845-BD4E-CB4CCA059FC4}" type="datetimeFigureOut">
               <a:rPr lang="en-US" smtClean="0"/>
-              <a:t>1/27/13</a:t>
+              <a:t>9/2/2026</a:t>
             </a:fld>
             <a:endParaRPr lang="en-US"/>
           </a:p>
@@ -763,10 +2383,9 @@
           <a:lstStyle/>
           <a:p>
             <a:r>
-              <a:rPr lang="en-US" smtClean="0"/>
+              <a:rPr lang="en-US"/>
               <a:t>Click to edit Master title style</a:t>
             </a:r>
-            <a:endParaRPr lang="en-US"/>
           </a:p>
         </p:txBody>
       </p:sp>
@@ -787,38 +2406,37 @@
           <a:p>
             <a:pPr lvl="0"/>
             <a:r>
-              <a:rPr lang="en-US" smtClean="0"/>
+              <a:rPr lang="en-US"/>
               <a:t>Click to edit Master text styles</a:t>
             </a:r>
           </a:p>
           <a:p>
             <a:pPr lvl="1"/>
             <a:r>
-              <a:rPr lang="en-US" smtClean="0"/>
+              <a:rPr lang="en-US"/>
               <a:t>Second level</a:t>
             </a:r>
           </a:p>
           <a:p>
             <a:pPr lvl="2"/>
             <a:r>
-              <a:rPr lang="en-US" smtClean="0"/>
+              <a:rPr lang="en-US"/>
               <a:t>Third level</a:t>
             </a:r>
           </a:p>
           <a:p>
             <a:pPr lvl="3"/>
             <a:r>
-              <a:rPr lang="en-US" smtClean="0"/>
+              <a:rPr lang="en-US"/>
               <a:t>Fourth level</a:t>
             </a:r>
           </a:p>
           <a:p>
             <a:pPr lvl="4"/>
             <a:r>
-              <a:rPr lang="en-US" smtClean="0"/>
+              <a:rPr lang="en-US"/>
               <a:t>Fifth level</a:t>
             </a:r>
-            <a:endParaRPr lang="en-US"/>
           </a:p>
         </p:txBody>
       </p:sp>
@@ -839,7 +2457,7 @@
           <a:p>
             <a:fld id="{5BCAD085-E8A6-8845-BD4E-CB4CCA059FC4}" type="datetimeFigureOut">
               <a:rPr lang="en-US" smtClean="0"/>
-              <a:t>1/27/13</a:t>
+              <a:t>9/2/2026</a:t>
             </a:fld>
             <a:endParaRPr lang="en-US"/>
           </a:p>
@@ -942,10 +2560,9 @@
           </a:lstStyle>
           <a:p>
             <a:r>
-              <a:rPr lang="en-US" smtClean="0"/>
+              <a:rPr lang="en-US"/>
               <a:t>Click to edit Master title style</a:t>
             </a:r>
-            <a:endParaRPr lang="en-US"/>
           </a:p>
         </p:txBody>
       </p:sp>
@@ -1062,7 +2679,7 @@
           <a:p>
             <a:pPr lvl="0"/>
             <a:r>
-              <a:rPr lang="en-US" smtClean="0"/>
+              <a:rPr lang="en-US"/>
               <a:t>Click to edit Master text styles</a:t>
             </a:r>
           </a:p>
@@ -1085,7 +2702,7 @@
           <a:p>
             <a:fld id="{5BCAD085-E8A6-8845-BD4E-CB4CCA059FC4}" type="datetimeFigureOut">
               <a:rPr lang="en-US" smtClean="0"/>
-              <a:t>1/27/13</a:t>
+              <a:t>9/2/2026</a:t>
             </a:fld>
             <a:endParaRPr lang="en-US"/>
           </a:p>
@@ -1179,10 +2796,9 @@
           <a:lstStyle/>
           <a:p>
             <a:r>
-              <a:rPr lang="en-US" smtClean="0"/>
+              <a:rPr lang="en-US"/>
               <a:t>Click to edit Master title style</a:t>
             </a:r>
-            <a:endParaRPr lang="en-US"/>
           </a:p>
         </p:txBody>
       </p:sp>
@@ -1236,38 +2852,37 @@
           <a:p>
             <a:pPr lvl="0"/>
             <a:r>
-              <a:rPr lang="en-US" smtClean="0"/>
+              <a:rPr lang="en-US"/>
               <a:t>Click to edit Master text styles</a:t>
             </a:r>
           </a:p>
           <a:p>
             <a:pPr lvl="1"/>
             <a:r>
-              <a:rPr lang="en-US" smtClean="0"/>
+              <a:rPr lang="en-US"/>
               <a:t>Second level</a:t>
             </a:r>
           </a:p>
           <a:p>
             <a:pPr lvl="2"/>
             <a:r>
-              <a:rPr lang="en-US" smtClean="0"/>
+              <a:rPr lang="en-US"/>
               <a:t>Third level</a:t>
             </a:r>
           </a:p>
           <a:p>
             <a:pPr lvl="3"/>
             <a:r>
-              <a:rPr lang="en-US" smtClean="0"/>
+              <a:rPr lang="en-US"/>
               <a:t>Fourth level</a:t>
             </a:r>
           </a:p>
           <a:p>
             <a:pPr lvl="4"/>
             <a:r>
-              <a:rPr lang="en-US" smtClean="0"/>
+              <a:rPr lang="en-US"/>
               <a:t>Fifth level</a:t>
             </a:r>
-            <a:endParaRPr lang="en-US"/>
           </a:p>
         </p:txBody>
       </p:sp>
@@ -1321,38 +2936,37 @@
           <a:p>
             <a:pPr lvl="0"/>
             <a:r>
-              <a:rPr lang="en-US" smtClean="0"/>
+              <a:rPr lang="en-US"/>
               <a:t>Click to edit Master text styles</a:t>
             </a:r>
           </a:p>
           <a:p>
             <a:pPr lvl="1"/>
             <a:r>
-              <a:rPr lang="en-US" smtClean="0"/>
+              <a:rPr lang="en-US"/>
               <a:t>Second level</a:t>
             </a:r>
           </a:p>
           <a:p>
             <a:pPr lvl="2"/>
             <a:r>
-              <a:rPr lang="en-US" smtClean="0"/>
+              <a:rPr lang="en-US"/>
               <a:t>Third level</a:t>
             </a:r>
           </a:p>
           <a:p>
             <a:pPr lvl="3"/>
             <a:r>
-              <a:rPr lang="en-US" smtClean="0"/>
+              <a:rPr lang="en-US"/>
               <a:t>Fourth level</a:t>
             </a:r>
           </a:p>
           <a:p>
             <a:pPr lvl="4"/>
             <a:r>
-              <a:rPr lang="en-US" smtClean="0"/>
+              <a:rPr lang="en-US"/>
               <a:t>Fifth level</a:t>
             </a:r>
-            <a:endParaRPr lang="en-US"/>
           </a:p>
         </p:txBody>
       </p:sp>
@@ -1373,7 +2987,7 @@
           <a:p>
             <a:fld id="{5BCAD085-E8A6-8845-BD4E-CB4CCA059FC4}" type="datetimeFigureOut">
               <a:rPr lang="en-US" smtClean="0"/>
-              <a:t>1/27/13</a:t>
+              <a:t>9/2/2026</a:t>
             </a:fld>
             <a:endParaRPr lang="en-US"/>
           </a:p>
@@ -1471,10 +3085,9 @@
           </a:lstStyle>
           <a:p>
             <a:r>
-              <a:rPr lang="en-US" smtClean="0"/>
+              <a:rPr lang="en-US"/>
               <a:t>Click to edit Master title style</a:t>
             </a:r>
-            <a:endParaRPr lang="en-US"/>
           </a:p>
         </p:txBody>
       </p:sp>
@@ -1537,7 +3150,7 @@
           <a:p>
             <a:pPr lvl="0"/>
             <a:r>
-              <a:rPr lang="en-US" smtClean="0"/>
+              <a:rPr lang="en-US"/>
               <a:t>Click to edit Master text styles</a:t>
             </a:r>
           </a:p>
@@ -1593,38 +3206,37 @@
           <a:p>
             <a:pPr lvl="0"/>
             <a:r>
-              <a:rPr lang="en-US" smtClean="0"/>
+              <a:rPr lang="en-US"/>
               <a:t>Click to edit Master text styles</a:t>
             </a:r>
           </a:p>
           <a:p>
             <a:pPr lvl="1"/>
             <a:r>
-              <a:rPr lang="en-US" smtClean="0"/>
+              <a:rPr lang="en-US"/>
               <a:t>Second level</a:t>
             </a:r>
           </a:p>
           <a:p>
             <a:pPr lvl="2"/>
             <a:r>
-              <a:rPr lang="en-US" smtClean="0"/>
+              <a:rPr lang="en-US"/>
               <a:t>Third level</a:t>
             </a:r>
           </a:p>
           <a:p>
             <a:pPr lvl="3"/>
             <a:r>
-              <a:rPr lang="en-US" smtClean="0"/>
+              <a:rPr lang="en-US"/>
               <a:t>Fourth level</a:t>
             </a:r>
           </a:p>
           <a:p>
             <a:pPr lvl="4"/>
             <a:r>
-              <a:rPr lang="en-US" smtClean="0"/>
+              <a:rPr lang="en-US"/>
               <a:t>Fifth level</a:t>
             </a:r>
-            <a:endParaRPr lang="en-US"/>
           </a:p>
         </p:txBody>
       </p:sp>
@@ -1687,7 +3299,7 @@
           <a:p>
             <a:pPr lvl="0"/>
             <a:r>
-              <a:rPr lang="en-US" smtClean="0"/>
+              <a:rPr lang="en-US"/>
               <a:t>Click to edit Master text styles</a:t>
             </a:r>
           </a:p>
@@ -1743,38 +3355,37 @@
           <a:p>
             <a:pPr lvl="0"/>
             <a:r>
-              <a:rPr lang="en-US" smtClean="0"/>
+              <a:rPr lang="en-US"/>
               <a:t>Click to edit Master text styles</a:t>
             </a:r>
           </a:p>
           <a:p>
             <a:pPr lvl="1"/>
             <a:r>
-              <a:rPr lang="en-US" smtClean="0"/>
+              <a:rPr lang="en-US"/>
               <a:t>Second level</a:t>
             </a:r>
           </a:p>
           <a:p>
             <a:pPr lvl="2"/>
             <a:r>
-              <a:rPr lang="en-US" smtClean="0"/>
+              <a:rPr lang="en-US"/>
               <a:t>Third level</a:t>
             </a:r>
           </a:p>
           <a:p>
             <a:pPr lvl="3"/>
             <a:r>
-              <a:rPr lang="en-US" smtClean="0"/>
+              <a:rPr lang="en-US"/>
               <a:t>Fourth level</a:t>
             </a:r>
           </a:p>
           <a:p>
             <a:pPr lvl="4"/>
             <a:r>
-              <a:rPr lang="en-US" smtClean="0"/>
+              <a:rPr lang="en-US"/>
               <a:t>Fifth level</a:t>
             </a:r>
-            <a:endParaRPr lang="en-US"/>
           </a:p>
         </p:txBody>
       </p:sp>
@@ -1795,7 +3406,7 @@
           <a:p>
             <a:fld id="{5BCAD085-E8A6-8845-BD4E-CB4CCA059FC4}" type="datetimeFigureOut">
               <a:rPr lang="en-US" smtClean="0"/>
-              <a:t>1/27/13</a:t>
+              <a:t>9/2/2026</a:t>
             </a:fld>
             <a:endParaRPr lang="en-US"/>
           </a:p>
@@ -1889,10 +3500,9 @@
           <a:lstStyle/>
           <a:p>
             <a:r>
-              <a:rPr lang="en-US" smtClean="0"/>
+              <a:rPr lang="en-US"/>
               <a:t>Click to edit Master title style</a:t>
             </a:r>
-            <a:endParaRPr lang="en-US"/>
           </a:p>
         </p:txBody>
       </p:sp>
@@ -1913,7 +3523,7 @@
           <a:p>
             <a:fld id="{5BCAD085-E8A6-8845-BD4E-CB4CCA059FC4}" type="datetimeFigureOut">
               <a:rPr lang="en-US" smtClean="0"/>
-              <a:t>1/27/13</a:t>
+              <a:t>9/2/2026</a:t>
             </a:fld>
             <a:endParaRPr lang="en-US"/>
           </a:p>
@@ -2008,7 +3618,7 @@
           <a:p>
             <a:fld id="{5BCAD085-E8A6-8845-BD4E-CB4CCA059FC4}" type="datetimeFigureOut">
               <a:rPr lang="en-US" smtClean="0"/>
-              <a:t>1/27/13</a:t>
+              <a:t>9/2/2026</a:t>
             </a:fld>
             <a:endParaRPr lang="en-US"/>
           </a:p>
@@ -2111,10 +3721,9 @@
           </a:lstStyle>
           <a:p>
             <a:r>
-              <a:rPr lang="en-US" smtClean="0"/>
+              <a:rPr lang="en-US"/>
               <a:t>Click to edit Master title style</a:t>
             </a:r>
-            <a:endParaRPr lang="en-US"/>
           </a:p>
         </p:txBody>
       </p:sp>
@@ -2168,38 +3777,37 @@
           <a:p>
             <a:pPr lvl="0"/>
             <a:r>
-              <a:rPr lang="en-US" smtClean="0"/>
+              <a:rPr lang="en-US"/>
               <a:t>Click to edit Master text styles</a:t>
             </a:r>
           </a:p>
           <a:p>
             <a:pPr lvl="1"/>
             <a:r>
-              <a:rPr lang="en-US" smtClean="0"/>
+              <a:rPr lang="en-US"/>
               <a:t>Second level</a:t>
             </a:r>
           </a:p>
           <a:p>
             <a:pPr lvl="2"/>
             <a:r>
-              <a:rPr lang="en-US" smtClean="0"/>
+              <a:rPr lang="en-US"/>
               <a:t>Third level</a:t>
             </a:r>
           </a:p>
           <a:p>
             <a:pPr lvl="3"/>
             <a:r>
-              <a:rPr lang="en-US" smtClean="0"/>
+              <a:rPr lang="en-US"/>
               <a:t>Fourth level</a:t>
             </a:r>
           </a:p>
           <a:p>
             <a:pPr lvl="4"/>
             <a:r>
-              <a:rPr lang="en-US" smtClean="0"/>
+              <a:rPr lang="en-US"/>
               <a:t>Fifth level</a:t>
             </a:r>
-            <a:endParaRPr lang="en-US"/>
           </a:p>
         </p:txBody>
       </p:sp>
@@ -2262,7 +3870,7 @@
           <a:p>
             <a:pPr lvl="0"/>
             <a:r>
-              <a:rPr lang="en-US" smtClean="0"/>
+              <a:rPr lang="en-US"/>
               <a:t>Click to edit Master text styles</a:t>
             </a:r>
           </a:p>
@@ -2285,7 +3893,7 @@
           <a:p>
             <a:fld id="{5BCAD085-E8A6-8845-BD4E-CB4CCA059FC4}" type="datetimeFigureOut">
               <a:rPr lang="en-US" smtClean="0"/>
-              <a:t>1/27/13</a:t>
+              <a:t>9/2/2026</a:t>
             </a:fld>
             <a:endParaRPr lang="en-US"/>
           </a:p>
@@ -2388,10 +3996,9 @@
           </a:lstStyle>
           <a:p>
             <a:r>
-              <a:rPr lang="en-US" smtClean="0"/>
+              <a:rPr lang="en-US"/>
               <a:t>Click to edit Master title style</a:t>
             </a:r>
-            <a:endParaRPr lang="en-US"/>
           </a:p>
         </p:txBody>
       </p:sp>
@@ -2515,7 +4122,7 @@
           <a:p>
             <a:pPr lvl="0"/>
             <a:r>
-              <a:rPr lang="en-US" smtClean="0"/>
+              <a:rPr lang="en-US"/>
               <a:t>Click to edit Master text styles</a:t>
             </a:r>
           </a:p>
@@ -2538,7 +4145,7 @@
           <a:p>
             <a:fld id="{5BCAD085-E8A6-8845-BD4E-CB4CCA059FC4}" type="datetimeFigureOut">
               <a:rPr lang="en-US" smtClean="0"/>
-              <a:t>1/27/13</a:t>
+              <a:t>9/2/2026</a:t>
             </a:fld>
             <a:endParaRPr lang="en-US"/>
           </a:p>
@@ -2647,10 +4254,9 @@
           <a:lstStyle/>
           <a:p>
             <a:r>
-              <a:rPr lang="en-US" smtClean="0"/>
+              <a:rPr lang="en-US"/>
               <a:t>Click to edit Master title style</a:t>
             </a:r>
-            <a:endParaRPr lang="en-US"/>
           </a:p>
         </p:txBody>
       </p:sp>
@@ -2681,38 +4287,37 @@
           <a:p>
             <a:pPr lvl="0"/>
             <a:r>
-              <a:rPr lang="en-US" smtClean="0"/>
+              <a:rPr lang="en-US"/>
               <a:t>Click to edit Master text styles</a:t>
             </a:r>
           </a:p>
           <a:p>
             <a:pPr lvl="1"/>
             <a:r>
-              <a:rPr lang="en-US" smtClean="0"/>
+              <a:rPr lang="en-US"/>
               <a:t>Second level</a:t>
             </a:r>
           </a:p>
           <a:p>
             <a:pPr lvl="2"/>
             <a:r>
-              <a:rPr lang="en-US" smtClean="0"/>
+              <a:rPr lang="en-US"/>
               <a:t>Third level</a:t>
             </a:r>
           </a:p>
           <a:p>
             <a:pPr lvl="3"/>
             <a:r>
-              <a:rPr lang="en-US" smtClean="0"/>
+              <a:rPr lang="en-US"/>
               <a:t>Fourth level</a:t>
             </a:r>
           </a:p>
           <a:p>
             <a:pPr lvl="4"/>
             <a:r>
-              <a:rPr lang="en-US" smtClean="0"/>
+              <a:rPr lang="en-US"/>
               <a:t>Fifth level</a:t>
             </a:r>
-            <a:endParaRPr lang="en-US"/>
           </a:p>
         </p:txBody>
       </p:sp>
@@ -2751,7 +4356,7 @@
           <a:p>
             <a:fld id="{5BCAD085-E8A6-8845-BD4E-CB4CCA059FC4}" type="datetimeFigureOut">
               <a:rPr lang="en-US" smtClean="0"/>
-              <a:t>1/27/13</a:t>
+              <a:t>9/2/2026</a:t>
             </a:fld>
             <a:endParaRPr lang="en-US"/>
           </a:p>
@@ -3110,7 +4715,7 @@
 </file>
 
 <file path=ppt/slides/slide1.xml><?xml version="1.0" encoding="utf-8"?>
-<p:sld xmlns:a="http://schemas.openxmlformats.org/drawingml/2006/main" xmlns:p="http://schemas.openxmlformats.org/presentationml/2006/main" xmlns:r="http://schemas.openxmlformats.org/officeDocument/2006/relationships">
+<p:sld xmlns:a="http://schemas.openxmlformats.org/drawingml/2006/main" xmlns:r="http://schemas.openxmlformats.org/officeDocument/2006/relationships" xmlns:p="http://schemas.openxmlformats.org/presentationml/2006/main">
   <p:cSld>
     <p:spTree>
       <p:nvGrpSpPr>
@@ -3118,7 +4723,14 @@
         <p:cNvGrpSpPr/>
         <p:nvPr/>
       </p:nvGrpSpPr>
-      <p:grpSpPr/>
+      <p:grpSpPr>
+        <a:xfrm>
+          <a:off x="0" y="0"/>
+          <a:ext cx="0" cy="0"/>
+          <a:chOff x="0" y="0"/>
+          <a:chExt cx="0" cy="0"/>
+        </a:xfrm>
+      </p:grpSpPr>
       <p:sp>
         <p:nvSpPr>
           <p:cNvPr id="2" name="Rectangle 1"/>
@@ -3159,6 +4771,7 @@
           <a:lstStyle/>
           <a:p>
             <a:pPr algn="ctr"/>
+            <a:endParaRPr/>
           </a:p>
         </p:txBody>
       </p:sp>
@@ -3202,6 +4815,7 @@
           <a:lstStyle/>
           <a:p>
             <a:pPr algn="ctr"/>
+            <a:endParaRPr/>
           </a:p>
         </p:txBody>
       </p:sp>
@@ -3243,7 +4857,7 @@
           </a:fontRef>
         </p:style>
         <p:txBody>
-          <a:bodyPr rtlCol="0" anchor="ctr" wrap="square" lIns="731520" tIns="548640"/>
+          <a:bodyPr wrap="square" lIns="731520" tIns="548640" rtlCol="0" anchor="ctr"/>
           <a:lstStyle/>
           <a:p>
             <a:pPr algn="ctr">
@@ -3254,7 +4868,20 @@
               </a:defRPr>
             </a:pPr>
             <a:r>
-              <a:t>THE ART OF LIVING • SRI SRI YOGA</a:t>
+              <a:rPr dirty="0"/>
+              <a:t>THE ART OF LIVING </a:t>
+            </a:r>
+            <a:r>
+              <a:rPr lang="en-US" dirty="0"/>
+              <a:t>• SRI </a:t>
+            </a:r>
+            <a:r>
+              <a:rPr lang="en-US" dirty="0" err="1"/>
+              <a:t>SRI</a:t>
+            </a:r>
+            <a:r>
+              <a:rPr lang="en-US" dirty="0"/>
+              <a:t> YOGA</a:t>
             </a:r>
           </a:p>
           <a:p>
@@ -3269,41 +4896,15 @@
               </a:defRPr>
             </a:pPr>
             <a:r>
+              <a:rPr lang="en-US" dirty="0"/>
               <a:t>Subscription Journey, Payment UX &amp;</a:t>
             </a:r>
-            <a:br/>
-            <a:r>
+            <a:br>
+              <a:rPr lang="en-US" dirty="0"/>
+            </a:br>
+            <a:r>
+              <a:rPr lang="en-US" dirty="0"/>
               <a:t>Lifecycle Strategy</a:t>
-            </a:r>
-          </a:p>
-          <a:p>
-            <a:pPr>
-              <a:spcBef>
-                <a:spcPts val="800"/>
-              </a:spcBef>
-              <a:defRPr sz="1400">
-                <a:solidFill>
-                  <a:srgbClr val="64748B"/>
-                </a:solidFill>
-              </a:defRPr>
-            </a:pPr>
-            <a:r>
-              <a:t>Comprehensive Research, Competitor Benchmarks, 'Pay First -&gt; Profile After' Architecture &amp; Executive Roadmap</a:t>
-            </a:r>
-          </a:p>
-          <a:p>
-            <a:pPr>
-              <a:spcBef>
-                <a:spcPts val="3200"/>
-              </a:spcBef>
-              <a:defRPr sz="1100" b="1">
-                <a:solidFill>
-                  <a:srgbClr val="9A3412"/>
-                </a:solidFill>
-              </a:defRPr>
-            </a:pPr>
-            <a:r>
-              <a:t>Prepared for: Product, Business, Legal &amp; Leadership Teams | September 2026</a:t>
             </a:r>
           </a:p>
         </p:txBody>
@@ -3317,7 +4918,7 @@
 </file>
 
 <file path=ppt/slides/slide10.xml><?xml version="1.0" encoding="utf-8"?>
-<p:sld xmlns:a="http://schemas.openxmlformats.org/drawingml/2006/main" xmlns:p="http://schemas.openxmlformats.org/presentationml/2006/main" xmlns:r="http://schemas.openxmlformats.org/officeDocument/2006/relationships">
+<p:sld xmlns:a="http://schemas.openxmlformats.org/drawingml/2006/main" xmlns:r="http://schemas.openxmlformats.org/officeDocument/2006/relationships" xmlns:p="http://schemas.openxmlformats.org/presentationml/2006/main">
   <p:cSld>
     <p:spTree>
       <p:nvGrpSpPr>
@@ -3325,7 +4926,14 @@
         <p:cNvGrpSpPr/>
         <p:nvPr/>
       </p:nvGrpSpPr>
-      <p:grpSpPr/>
+      <p:grpSpPr>
+        <a:xfrm>
+          <a:off x="0" y="0"/>
+          <a:ext cx="0" cy="0"/>
+          <a:chOff x="0" y="0"/>
+          <a:chExt cx="0" cy="0"/>
+        </a:xfrm>
+      </p:grpSpPr>
       <p:sp>
         <p:nvSpPr>
           <p:cNvPr id="2" name="Rectangle 1"/>
@@ -3366,6 +4974,7 @@
           <a:lstStyle/>
           <a:p>
             <a:pPr algn="ctr"/>
+            <a:endParaRPr sz="1600"/>
           </a:p>
         </p:txBody>
       </p:sp>
@@ -3378,7 +4987,7 @@
         <p:spPr>
           <a:xfrm>
             <a:off x="731520" y="365760"/>
-            <a:ext cx="10698480" cy="274320"/>
+            <a:ext cx="10698480" cy="246221"/>
           </a:xfrm>
           <a:prstGeom prst="rect">
             <a:avLst/>
@@ -3399,6 +5008,7 @@
               </a:defRPr>
             </a:pPr>
             <a:r>
+              <a:rPr sz="1600"/>
               <a:t>LANDING PAGE ARCHITECTURE</a:t>
             </a:r>
           </a:p>
@@ -3413,7 +5023,7 @@
         <p:spPr>
           <a:xfrm>
             <a:off x="731520" y="640080"/>
-            <a:ext cx="10698480" cy="502920"/>
+            <a:ext cx="10698480" cy="246221"/>
           </a:xfrm>
           <a:prstGeom prst="rect">
             <a:avLst/>
@@ -3434,6 +5044,7 @@
               </a:defRPr>
             </a:pPr>
             <a:r>
+              <a:rPr sz="1600"/>
               <a:t>Landing Page Trust: Certified Teacher Profiles ('Meet Your Faculty')</a:t>
             </a:r>
           </a:p>
@@ -3448,7 +5059,7 @@
         <p:spPr>
           <a:xfrm>
             <a:off x="731520" y="1170432"/>
-            <a:ext cx="10698480" cy="320040"/>
+            <a:ext cx="10698480" cy="246221"/>
           </a:xfrm>
           <a:prstGeom prst="rect">
             <a:avLst/>
@@ -3469,6 +5080,7 @@
               </a:defRPr>
             </a:pPr>
             <a:r>
+              <a:rPr sz="1600"/>
               <a:t>Establishing spiritual lineage, authenticity, and instructor credibility prior to purchase decision</a:t>
             </a:r>
           </a:p>
@@ -3512,7 +5124,7 @@
           </a:fontRef>
         </p:style>
         <p:txBody>
-          <a:bodyPr rtlCol="0" anchor="ctr" lIns="274320" rIns="274320" tIns="274320"/>
+          <a:bodyPr lIns="274320" tIns="274320" rIns="274320" rtlCol="0" anchor="ctr"/>
           <a:lstStyle/>
           <a:p>
             <a:pPr algn="ctr">
@@ -3523,6 +5135,7 @@
               </a:defRPr>
             </a:pPr>
             <a:r>
+              <a:rPr sz="1600"/>
               <a:t>WHY TEACHER PROFILES ARE ESSENTIAL:</a:t>
             </a:r>
           </a:p>
@@ -3538,18 +5151,28 @@
               </a:defRPr>
             </a:pPr>
             <a:r>
+              <a:rPr sz="1600"/>
               <a:t>• Spiritual &amp; Pedagogical Trust: Art of Living students value direct teacher connection and certified ashram lineage.</a:t>
             </a:r>
-            <a:br/>
-            <a:r>
+            <a:br>
+              <a:rPr sz="1600"/>
+            </a:br>
+            <a:r>
+              <a:rPr sz="1600"/>
               <a:t>• Expertise Transparency: Showcasing 10+ years of teaching experience, AYUSH ministry certifications, and international ashram training builds confidence.</a:t>
             </a:r>
-            <a:br/>
-            <a:r>
+            <a:br>
+              <a:rPr sz="1600"/>
+            </a:br>
+            <a:r>
+              <a:rPr sz="1600"/>
               <a:t>• Human Connection: Converts a faceless subscription into a personalized mentorship with trusted yoga masters.</a:t>
             </a:r>
-            <a:br/>
-            <a:r>
+            <a:br>
+              <a:rPr sz="1600"/>
+            </a:br>
+            <a:r>
+              <a:rPr sz="1600"/>
               <a:t>• Reduced Purchase Anxiety: First-time yogis feel reassured that qualified teachers will guide posture alignments.</a:t>
             </a:r>
           </a:p>
@@ -3593,7 +5216,7 @@
           </a:fontRef>
         </p:style>
         <p:txBody>
-          <a:bodyPr rtlCol="0" anchor="ctr" lIns="274320" rIns="274320" tIns="274320"/>
+          <a:bodyPr lIns="274320" tIns="274320" rIns="274320" rtlCol="0" anchor="ctr"/>
           <a:lstStyle/>
           <a:p>
             <a:pPr algn="ctr">
@@ -3604,6 +5227,7 @@
               </a:defRPr>
             </a:pPr>
             <a:r>
+              <a:rPr sz="1600"/>
               <a:t>RECOMMENDED FACULTY CARD SPECIFICATION:</a:t>
             </a:r>
           </a:p>
@@ -3619,22 +5243,35 @@
               </a:defRPr>
             </a:pPr>
             <a:r>
+              <a:rPr sz="1600"/>
               <a:t>• High-Quality Studio Photo: Warm, serene, professional portrait in traditional yoga attire.</a:t>
             </a:r>
-            <a:br/>
-            <a:r>
+            <a:br>
+              <a:rPr sz="1600"/>
+            </a:br>
+            <a:r>
+              <a:rPr sz="1600"/>
               <a:t>• Name &amp; Title: e.g., 'Swami Paramjyoti' / 'Priya Sharma, Senior Sri Sri Yoga Faculty'.</a:t>
             </a:r>
-            <a:br/>
-            <a:r>
+            <a:br>
+              <a:rPr sz="1600"/>
+            </a:br>
+            <a:r>
+              <a:rPr sz="1600"/>
               <a:t>• Ashram Lineage &amp; Experience: e.g., '14+ Years Experience | Trained at Bangalore International Ashram'.</a:t>
             </a:r>
-            <a:br/>
-            <a:r>
+            <a:br>
+              <a:rPr sz="1600"/>
+            </a:br>
+            <a:r>
+              <a:rPr sz="1600"/>
               <a:t>• Specialization Badges: Pranayama, Hatha Yoga, Sukshma Vyayama, Therapeutic Alignment.</a:t>
             </a:r>
-            <a:br/>
-            <a:r>
+            <a:br>
+              <a:rPr sz="1600"/>
+            </a:br>
+            <a:r>
+              <a:rPr sz="1600"/>
               <a:t>• Faculty Quote: A short 1-line inspiring philosophy from the teacher.</a:t>
             </a:r>
           </a:p>
@@ -3649,7 +5286,7 @@
 </file>
 
 <file path=ppt/slides/slide11.xml><?xml version="1.0" encoding="utf-8"?>
-<p:sld xmlns:a="http://schemas.openxmlformats.org/drawingml/2006/main" xmlns:p="http://schemas.openxmlformats.org/presentationml/2006/main" xmlns:r="http://schemas.openxmlformats.org/officeDocument/2006/relationships">
+<p:sld xmlns:a="http://schemas.openxmlformats.org/drawingml/2006/main" xmlns:r="http://schemas.openxmlformats.org/officeDocument/2006/relationships" xmlns:p="http://schemas.openxmlformats.org/presentationml/2006/main">
   <p:cSld>
     <p:spTree>
       <p:nvGrpSpPr>
@@ -3657,7 +5294,14 @@
         <p:cNvGrpSpPr/>
         <p:nvPr/>
       </p:nvGrpSpPr>
-      <p:grpSpPr/>
+      <p:grpSpPr>
+        <a:xfrm>
+          <a:off x="0" y="0"/>
+          <a:ext cx="0" cy="0"/>
+          <a:chOff x="0" y="0"/>
+          <a:chExt cx="0" cy="0"/>
+        </a:xfrm>
+      </p:grpSpPr>
       <p:sp>
         <p:nvSpPr>
           <p:cNvPr id="2" name="Rectangle 1"/>
@@ -3698,6 +5342,7 @@
           <a:lstStyle/>
           <a:p>
             <a:pPr algn="ctr"/>
+            <a:endParaRPr sz="1600"/>
           </a:p>
         </p:txBody>
       </p:sp>
@@ -3710,7 +5355,7 @@
         <p:spPr>
           <a:xfrm>
             <a:off x="731520" y="365760"/>
-            <a:ext cx="10698480" cy="274320"/>
+            <a:ext cx="10698480" cy="246221"/>
           </a:xfrm>
           <a:prstGeom prst="rect">
             <a:avLst/>
@@ -3731,6 +5376,7 @@
               </a:defRPr>
             </a:pPr>
             <a:r>
+              <a:rPr sz="1600"/>
               <a:t>MARKET INTELLIGENCE</a:t>
             </a:r>
           </a:p>
@@ -3745,7 +5391,7 @@
         <p:spPr>
           <a:xfrm>
             <a:off x="731520" y="640080"/>
-            <a:ext cx="10698480" cy="502920"/>
+            <a:ext cx="10698480" cy="246221"/>
           </a:xfrm>
           <a:prstGeom prst="rect">
             <a:avLst/>
@@ -3766,6 +5412,7 @@
               </a:defRPr>
             </a:pPr>
             <a:r>
+              <a:rPr sz="1600"/>
               <a:t>Competitive Landscape: Benchmark of 6 Leading Indian Wellness Brands</a:t>
             </a:r>
           </a:p>
@@ -3780,7 +5427,7 @@
         <p:spPr>
           <a:xfrm>
             <a:off x="731520" y="1170432"/>
-            <a:ext cx="10698480" cy="320040"/>
+            <a:ext cx="10698480" cy="246221"/>
           </a:xfrm>
           <a:prstGeom prst="rect">
             <a:avLst/>
@@ -3801,6 +5448,7 @@
               </a:defRPr>
             </a:pPr>
             <a:r>
+              <a:rPr sz="1600"/>
               <a:t>Comparative analysis of Times Health+, Kamya Health, Isha Yoga, Satvic Movement, Cult.fit, and Habuild</a:t>
             </a:r>
           </a:p>
@@ -3812,7 +5460,13 @@
           <p:cNvGraphicFramePr>
             <a:graphicFrameLocks noGrp="1"/>
           </p:cNvGraphicFramePr>
-          <p:nvPr/>
+          <p:nvPr>
+            <p:extLst>
+              <p:ext uri="{D42A27DB-BD31-4B8C-83A1-F6EECF244321}">
+                <p14:modId xmlns:p14="http://schemas.microsoft.com/office/powerpoint/2010/main" val="3545606981"/>
+              </p:ext>
+            </p:extLst>
+          </p:nvPr>
         </p:nvGraphicFramePr>
         <p:xfrm>
           <a:off x="731520" y="1600200"/>
@@ -3825,11 +5479,41 @@
                 <a:tableStyleId>{5C22544A-7EE6-4342-B048-85BDC9FD1C3A}</a:tableStyleId>
               </a:tblPr>
               <a:tblGrid>
-                <a:gridCol w="2011680"/>
-                <a:gridCol w="2194560"/>
-                <a:gridCol w="2011680"/>
-                <a:gridCol w="2286000"/>
-                <a:gridCol w="2224735"/>
+                <a:gridCol w="2011680">
+                  <a:extLst>
+                    <a:ext uri="{9D8B030D-6E8A-4147-A177-3AD203B41FA5}">
+                      <a16:colId xmlns:a16="http://schemas.microsoft.com/office/drawing/2014/main" val="20000"/>
+                    </a:ext>
+                  </a:extLst>
+                </a:gridCol>
+                <a:gridCol w="2194560">
+                  <a:extLst>
+                    <a:ext uri="{9D8B030D-6E8A-4147-A177-3AD203B41FA5}">
+                      <a16:colId xmlns:a16="http://schemas.microsoft.com/office/drawing/2014/main" val="20001"/>
+                    </a:ext>
+                  </a:extLst>
+                </a:gridCol>
+                <a:gridCol w="2011680">
+                  <a:extLst>
+                    <a:ext uri="{9D8B030D-6E8A-4147-A177-3AD203B41FA5}">
+                      <a16:colId xmlns:a16="http://schemas.microsoft.com/office/drawing/2014/main" val="20002"/>
+                    </a:ext>
+                  </a:extLst>
+                </a:gridCol>
+                <a:gridCol w="2286000">
+                  <a:extLst>
+                    <a:ext uri="{9D8B030D-6E8A-4147-A177-3AD203B41FA5}">
+                      <a16:colId xmlns:a16="http://schemas.microsoft.com/office/drawing/2014/main" val="20003"/>
+                    </a:ext>
+                  </a:extLst>
+                </a:gridCol>
+                <a:gridCol w="2224735">
+                  <a:extLst>
+                    <a:ext uri="{9D8B030D-6E8A-4147-A177-3AD203B41FA5}">
+                      <a16:colId xmlns:a16="http://schemas.microsoft.com/office/drawing/2014/main" val="20004"/>
+                    </a:ext>
+                  </a:extLst>
+                </a:gridCol>
               </a:tblGrid>
               <a:tr h="640080">
                 <a:tc>
@@ -3845,6 +5529,7 @@
                         </a:defRPr>
                       </a:pPr>
                       <a:r>
+                        <a:rPr sz="1600"/>
                         <a:t>Platform</a:t>
                       </a:r>
                     </a:p>
@@ -3868,6 +5553,7 @@
                         </a:defRPr>
                       </a:pPr>
                       <a:r>
+                        <a:rPr sz="1600"/>
                         <a:t>Pricing &amp; Duration</a:t>
                       </a:r>
                     </a:p>
@@ -3891,6 +5577,7 @@
                         </a:defRPr>
                       </a:pPr>
                       <a:r>
+                        <a:rPr sz="1600"/>
                         <a:t>Payment Model</a:t>
                       </a:r>
                     </a:p>
@@ -3914,6 +5601,7 @@
                         </a:defRPr>
                       </a:pPr>
                       <a:r>
+                        <a:rPr sz="1600"/>
                         <a:t>Registration Timing</a:t>
                       </a:r>
                     </a:p>
@@ -3937,6 +5625,7 @@
                         </a:defRPr>
                       </a:pPr>
                       <a:r>
+                        <a:rPr sz="1600"/>
                         <a:t>Pause / Cancellation</a:t>
                       </a:r>
                     </a:p>
@@ -3947,6 +5636,11 @@
                     </a:solidFill>
                   </a:tcPr>
                 </a:tc>
+                <a:extLst>
+                  <a:ext uri="{0D108BD9-81ED-4DB2-BD59-A6C34878D82A}">
+                    <a16:rowId xmlns:a16="http://schemas.microsoft.com/office/drawing/2014/main" val="10000"/>
+                  </a:ext>
+                </a:extLst>
               </a:tr>
               <a:tr h="640080">
                 <a:tc>
@@ -3962,6 +5656,7 @@
                         </a:defRPr>
                       </a:pPr>
                       <a:r>
+                        <a:rPr sz="1600"/>
                         <a:t>Habuild Yoga</a:t>
                       </a:r>
                     </a:p>
@@ -3985,6 +5680,7 @@
                         </a:defRPr>
                       </a:pPr>
                       <a:r>
+                        <a:rPr sz="1600"/>
                         <a:t>₹1,999 / 3 Mo (WhatsApp led)</a:t>
                       </a:r>
                     </a:p>
@@ -4008,6 +5704,7 @@
                         </a:defRPr>
                       </a:pPr>
                       <a:r>
+                        <a:rPr sz="1600"/>
                         <a:t>1-Time Upfront</a:t>
                       </a:r>
                     </a:p>
@@ -4031,6 +5728,7 @@
                         </a:defRPr>
                       </a:pPr>
                       <a:r>
+                        <a:rPr sz="1600"/>
                         <a:t>Payment first, profile on WhatsApp</a:t>
                       </a:r>
                     </a:p>
@@ -4054,6 +5752,7 @@
                         </a:defRPr>
                       </a:pPr>
                       <a:r>
+                        <a:rPr sz="1600"/>
                         <a:t>WhatsApp support pause</a:t>
                       </a:r>
                     </a:p>
@@ -4064,6 +5763,11 @@
                     </a:solidFill>
                   </a:tcPr>
                 </a:tc>
+                <a:extLst>
+                  <a:ext uri="{0D108BD9-81ED-4DB2-BD59-A6C34878D82A}">
+                    <a16:rowId xmlns:a16="http://schemas.microsoft.com/office/drawing/2014/main" val="10001"/>
+                  </a:ext>
+                </a:extLst>
               </a:tr>
               <a:tr h="640080">
                 <a:tc>
@@ -4079,6 +5783,7 @@
                         </a:defRPr>
                       </a:pPr>
                       <a:r>
+                        <a:rPr sz="1600"/>
                         <a:t>Cult / Cult.fit</a:t>
                       </a:r>
                     </a:p>
@@ -4102,6 +5807,7 @@
                         </a:defRPr>
                       </a:pPr>
                       <a:r>
+                        <a:rPr sz="1600"/>
                         <a:t>₹14,990 / yr (Cultpass)</a:t>
                       </a:r>
                     </a:p>
@@ -4125,6 +5831,7 @@
                         </a:defRPr>
                       </a:pPr>
                       <a:r>
+                        <a:rPr sz="1600"/>
                         <a:t>1-Time + Auto-Debit</a:t>
                       </a:r>
                     </a:p>
@@ -4148,6 +5855,7 @@
                         </a:defRPr>
                       </a:pPr>
                       <a:r>
+                        <a:rPr sz="1600"/>
                         <a:t>Account login -&gt; Pay -&gt; Profile</a:t>
                       </a:r>
                     </a:p>
@@ -4171,6 +5879,7 @@
                         </a:defRPr>
                       </a:pPr>
                       <a:r>
+                        <a:rPr sz="1600"/>
                         <a:t>App pause slider (15-45 days)</a:t>
                       </a:r>
                     </a:p>
@@ -4181,6 +5890,11 @@
                     </a:solidFill>
                   </a:tcPr>
                 </a:tc>
+                <a:extLst>
+                  <a:ext uri="{0D108BD9-81ED-4DB2-BD59-A6C34878D82A}">
+                    <a16:rowId xmlns:a16="http://schemas.microsoft.com/office/drawing/2014/main" val="10002"/>
+                  </a:ext>
+                </a:extLst>
               </a:tr>
               <a:tr h="640080">
                 <a:tc>
@@ -4196,6 +5910,7 @@
                         </a:defRPr>
                       </a:pPr>
                       <a:r>
+                        <a:rPr sz="1600"/>
                         <a:t>Satvic Movement</a:t>
                       </a:r>
                     </a:p>
@@ -4219,6 +5934,7 @@
                         </a:defRPr>
                       </a:pPr>
                       <a:r>
+                        <a:rPr sz="1600"/>
                         <a:t>$40/mo, $90/3mo, $290/yr</a:t>
                       </a:r>
                     </a:p>
@@ -4242,6 +5958,7 @@
                         </a:defRPr>
                       </a:pPr>
                       <a:r>
+                        <a:rPr sz="1600"/>
                         <a:t>Auto-Renew Default</a:t>
                       </a:r>
                     </a:p>
@@ -4265,6 +5982,7 @@
                         </a:defRPr>
                       </a:pPr>
                       <a:r>
+                        <a:rPr sz="1600"/>
                         <a:t>Minimal checkout form -&gt; Pay</a:t>
                       </a:r>
                     </a:p>
@@ -4288,6 +6006,7 @@
                         </a:defRPr>
                       </a:pPr>
                       <a:r>
+                        <a:rPr sz="1600" dirty="0"/>
                         <a:t>Self-serve customer portal</a:t>
                       </a:r>
                     </a:p>
@@ -4298,6 +6017,11 @@
                     </a:solidFill>
                   </a:tcPr>
                 </a:tc>
+                <a:extLst>
+                  <a:ext uri="{0D108BD9-81ED-4DB2-BD59-A6C34878D82A}">
+                    <a16:rowId xmlns:a16="http://schemas.microsoft.com/office/drawing/2014/main" val="10003"/>
+                  </a:ext>
+                </a:extLst>
               </a:tr>
               <a:tr h="640080">
                 <a:tc>
@@ -4313,6 +6037,7 @@
                         </a:defRPr>
                       </a:pPr>
                       <a:r>
+                        <a:rPr sz="1600"/>
                         <a:t>Isha Yoga / Inner Eng.</a:t>
                       </a:r>
                     </a:p>
@@ -4336,6 +6061,7 @@
                         </a:defRPr>
                       </a:pPr>
                       <a:r>
+                        <a:rPr sz="1600"/>
                         <a:t>₹1,500 - ₹3,500 / program</a:t>
                       </a:r>
                     </a:p>
@@ -4359,6 +6085,7 @@
                         </a:defRPr>
                       </a:pPr>
                       <a:r>
+                        <a:rPr sz="1600"/>
                         <a:t>1-Time Enrollment</a:t>
                       </a:r>
                     </a:p>
@@ -4382,6 +6109,7 @@
                         </a:defRPr>
                       </a:pPr>
                       <a:r>
+                        <a:rPr sz="1600"/>
                         <a:t>Enrollment fee -&gt; Portal profile</a:t>
                       </a:r>
                     </a:p>
@@ -4405,6 +6133,7 @@
                         </a:defRPr>
                       </a:pPr>
                       <a:r>
+                        <a:rPr sz="1600"/>
                         <a:t>Non-refundable, transferrable</a:t>
                       </a:r>
                     </a:p>
@@ -4415,6 +6144,11 @@
                     </a:solidFill>
                   </a:tcPr>
                 </a:tc>
+                <a:extLst>
+                  <a:ext uri="{0D108BD9-81ED-4DB2-BD59-A6C34878D82A}">
+                    <a16:rowId xmlns:a16="http://schemas.microsoft.com/office/drawing/2014/main" val="10004"/>
+                  </a:ext>
+                </a:extLst>
               </a:tr>
               <a:tr h="640080">
                 <a:tc>
@@ -4430,6 +6164,7 @@
                         </a:defRPr>
                       </a:pPr>
                       <a:r>
+                        <a:rPr sz="1600"/>
                         <a:t>Times Health+</a:t>
                       </a:r>
                     </a:p>
@@ -4453,6 +6188,7 @@
                         </a:defRPr>
                       </a:pPr>
                       <a:r>
+                        <a:rPr sz="1600"/>
                         <a:t>₹999 / mo, ₹5,999 / yr</a:t>
                       </a:r>
                     </a:p>
@@ -4476,6 +6212,7 @@
                         </a:defRPr>
                       </a:pPr>
                       <a:r>
+                        <a:rPr sz="1600"/>
                         <a:t>Recurring Auto-Debit</a:t>
                       </a:r>
                     </a:p>
@@ -4499,6 +6236,7 @@
                         </a:defRPr>
                       </a:pPr>
                       <a:r>
+                        <a:rPr sz="1600"/>
                         <a:t>Account login -&gt; Pay -&gt; Schedule</a:t>
                       </a:r>
                     </a:p>
@@ -4522,6 +6260,7 @@
                         </a:defRPr>
                       </a:pPr>
                       <a:r>
+                        <a:rPr sz="1600"/>
                         <a:t>Self-serve cancel in 1-click</a:t>
                       </a:r>
                     </a:p>
@@ -4532,6 +6271,11 @@
                     </a:solidFill>
                   </a:tcPr>
                 </a:tc>
+                <a:extLst>
+                  <a:ext uri="{0D108BD9-81ED-4DB2-BD59-A6C34878D82A}">
+                    <a16:rowId xmlns:a16="http://schemas.microsoft.com/office/drawing/2014/main" val="10005"/>
+                  </a:ext>
+                </a:extLst>
               </a:tr>
               <a:tr h="640080">
                 <a:tc>
@@ -4547,6 +6291,7 @@
                         </a:defRPr>
                       </a:pPr>
                       <a:r>
+                        <a:rPr sz="1600"/>
                         <a:t>Kamya Health</a:t>
                       </a:r>
                     </a:p>
@@ -4570,6 +6315,7 @@
                         </a:defRPr>
                       </a:pPr>
                       <a:r>
+                        <a:rPr sz="1600"/>
                         <a:t>₹1,499 / 21-Day Challenge</a:t>
                       </a:r>
                     </a:p>
@@ -4593,6 +6339,7 @@
                         </a:defRPr>
                       </a:pPr>
                       <a:r>
+                        <a:rPr sz="1600"/>
                         <a:t>1-Time Challenge Fee</a:t>
                       </a:r>
                     </a:p>
@@ -4616,6 +6363,7 @@
                         </a:defRPr>
                       </a:pPr>
                       <a:r>
+                        <a:rPr sz="1600"/>
                         <a:t>Challenge sign-up -&gt; Community</a:t>
                       </a:r>
                     </a:p>
@@ -4639,6 +6387,7 @@
                         </a:defRPr>
                       </a:pPr>
                       <a:r>
+                        <a:rPr sz="1600" dirty="0"/>
                         <a:t>Non-refundable fixed cohort</a:t>
                       </a:r>
                     </a:p>
@@ -4649,6 +6398,11 @@
                     </a:solidFill>
                   </a:tcPr>
                 </a:tc>
+                <a:extLst>
+                  <a:ext uri="{0D108BD9-81ED-4DB2-BD59-A6C34878D82A}">
+                    <a16:rowId xmlns:a16="http://schemas.microsoft.com/office/drawing/2014/main" val="10006"/>
+                  </a:ext>
+                </a:extLst>
               </a:tr>
             </a:tbl>
           </a:graphicData>
@@ -4663,7 +6417,7 @@
 </file>
 
 <file path=ppt/slides/slide12.xml><?xml version="1.0" encoding="utf-8"?>
-<p:sld xmlns:a="http://schemas.openxmlformats.org/drawingml/2006/main" xmlns:p="http://schemas.openxmlformats.org/presentationml/2006/main" xmlns:r="http://schemas.openxmlformats.org/officeDocument/2006/relationships">
+<p:sld xmlns:a="http://schemas.openxmlformats.org/drawingml/2006/main" xmlns:r="http://schemas.openxmlformats.org/officeDocument/2006/relationships" xmlns:p="http://schemas.openxmlformats.org/presentationml/2006/main">
   <p:cSld>
     <p:spTree>
       <p:nvGrpSpPr>
@@ -4671,7 +6425,14 @@
         <p:cNvGrpSpPr/>
         <p:nvPr/>
       </p:nvGrpSpPr>
-      <p:grpSpPr/>
+      <p:grpSpPr>
+        <a:xfrm>
+          <a:off x="0" y="0"/>
+          <a:ext cx="0" cy="0"/>
+          <a:chOff x="0" y="0"/>
+          <a:chExt cx="0" cy="0"/>
+        </a:xfrm>
+      </p:grpSpPr>
       <p:sp>
         <p:nvSpPr>
           <p:cNvPr id="2" name="Rectangle 1"/>
@@ -4712,6 +6473,7 @@
           <a:lstStyle/>
           <a:p>
             <a:pPr algn="ctr"/>
+            <a:endParaRPr sz="1600"/>
           </a:p>
         </p:txBody>
       </p:sp>
@@ -4724,7 +6486,7 @@
         <p:spPr>
           <a:xfrm>
             <a:off x="731520" y="365760"/>
-            <a:ext cx="10698480" cy="274320"/>
+            <a:ext cx="10698480" cy="246221"/>
           </a:xfrm>
           <a:prstGeom prst="rect">
             <a:avLst/>
@@ -4745,6 +6507,7 @@
               </a:defRPr>
             </a:pPr>
             <a:r>
+              <a:rPr sz="1600"/>
               <a:t>COMPETITOR DEEP DIVE</a:t>
             </a:r>
           </a:p>
@@ -4758,8 +6521,8 @@
         </p:nvSpPr>
         <p:spPr>
           <a:xfrm>
-            <a:off x="731520" y="640080"/>
-            <a:ext cx="10698480" cy="502920"/>
+            <a:off x="762000" y="594360"/>
+            <a:ext cx="10698480" cy="246221"/>
           </a:xfrm>
           <a:prstGeom prst="rect">
             <a:avLst/>
@@ -4780,6 +6543,7 @@
               </a:defRPr>
             </a:pPr>
             <a:r>
+              <a:rPr sz="1600"/>
               <a:t>Cult.fit Package Architecture &amp; Subscription Mechanics</a:t>
             </a:r>
           </a:p>
@@ -4794,7 +6558,7 @@
         <p:spPr>
           <a:xfrm>
             <a:off x="731520" y="1170432"/>
-            <a:ext cx="10698480" cy="320040"/>
+            <a:ext cx="10698480" cy="246221"/>
           </a:xfrm>
           <a:prstGeom prst="rect">
             <a:avLst/>
@@ -4815,6 +6579,7 @@
               </a:defRPr>
             </a:pPr>
             <a:r>
+              <a:rPr sz="1600"/>
               <a:t>Analyzing Cultpass subscription tiers, pause entitlement slider, and cancellation UX</a:t>
             </a:r>
           </a:p>
@@ -4858,7 +6623,7 @@
           </a:fontRef>
         </p:style>
         <p:txBody>
-          <a:bodyPr rtlCol="0" anchor="ctr" lIns="274320" rIns="274320" tIns="274320"/>
+          <a:bodyPr lIns="274320" tIns="274320" rIns="274320" rtlCol="0" anchor="ctr"/>
           <a:lstStyle/>
           <a:p>
             <a:pPr algn="ctr">
@@ -4869,6 +6634,7 @@
               </a:defRPr>
             </a:pPr>
             <a:r>
+              <a:rPr sz="1600"/>
               <a:t>CULT.FIT SUBSCRIPTION MECHANICS:</a:t>
             </a:r>
           </a:p>
@@ -4884,18 +6650,28 @@
               </a:defRPr>
             </a:pPr>
             <a:r>
+              <a:rPr sz="1600"/>
               <a:t>• Tiered Package Structure: Cultpass ELITE (All centers + At-Home), Cultpass PRO (Gyms), Cultpass HOME (Digital online classes).</a:t>
             </a:r>
-            <a:br/>
-            <a:r>
+            <a:br>
+              <a:rPr sz="1600"/>
+            </a:br>
+            <a:r>
+              <a:rPr sz="1600"/>
               <a:t>• Pause Entitlement Pool: 3-Month Plan (15 pause days), 6-Month Plan (30 pause days), 12-Month Plan (45 pause days).</a:t>
             </a:r>
-            <a:br/>
-            <a:r>
+            <a:br>
+              <a:rPr sz="1600"/>
+            </a:br>
+            <a:r>
+              <a:rPr sz="1600"/>
               <a:t>• Seamless In-App Pause: Interactive slider allows members to select start date and end date. Automatically recalculates subscription expiry date.</a:t>
             </a:r>
-            <a:br/>
-            <a:r>
+            <a:br>
+              <a:rPr sz="1600"/>
+            </a:br>
+            <a:r>
+              <a:rPr sz="1600"/>
               <a:t>• Early Unpause Credit: Resuming early refunds unused pause days back to the user's available pool immediately.</a:t>
             </a:r>
           </a:p>
@@ -4939,7 +6715,7 @@
           </a:fontRef>
         </p:style>
         <p:txBody>
-          <a:bodyPr rtlCol="0" anchor="ctr" lIns="274320" rIns="274320" tIns="274320"/>
+          <a:bodyPr lIns="274320" tIns="274320" rIns="274320" rtlCol="0" anchor="ctr"/>
           <a:lstStyle/>
           <a:p>
             <a:pPr algn="ctr">
@@ -4950,6 +6726,7 @@
               </a:defRPr>
             </a:pPr>
             <a:r>
+              <a:rPr sz="1600"/>
               <a:t>WHAT SRI SRI YOGA SHOULD ADOPT:</a:t>
             </a:r>
           </a:p>
@@ -4965,18 +6742,28 @@
               </a:defRPr>
             </a:pPr>
             <a:r>
+              <a:rPr sz="1600"/>
               <a:t>✅ 15d / 30d / 45d Pause Entitlement Matrix: Proven standard in Indian fitness/wellness industry.</a:t>
             </a:r>
-            <a:br/>
-            <a:r>
+            <a:br>
+              <a:rPr sz="1600"/>
+            </a:br>
+            <a:r>
+              <a:rPr sz="1600"/>
               <a:t>✅ Early Resume Refund: Prevents user frustration if travel plans change.</a:t>
             </a:r>
-            <a:br/>
-            <a:r>
+            <a:br>
+              <a:rPr sz="1600"/>
+            </a:br>
+            <a:r>
+              <a:rPr sz="1600"/>
               <a:t>✅ Clear Visual Expiry Display: Showing 'Your subscription will now expire on [New Date]' builds trust.</a:t>
             </a:r>
-            <a:br/>
-            <a:r>
+            <a:br>
+              <a:rPr sz="1600"/>
+            </a:br>
+            <a:r>
+              <a:rPr sz="1600"/>
               <a:t>❌ Avoid Cult's Heavy Transfer Fees: Keep pause and rescheduling 100% free for Sri Sri Yoga members.</a:t>
             </a:r>
           </a:p>
@@ -4991,7 +6778,7 @@
 </file>
 
 <file path=ppt/slides/slide13.xml><?xml version="1.0" encoding="utf-8"?>
-<p:sld xmlns:a="http://schemas.openxmlformats.org/drawingml/2006/main" xmlns:p="http://schemas.openxmlformats.org/presentationml/2006/main" xmlns:r="http://schemas.openxmlformats.org/officeDocument/2006/relationships">
+<p:sld xmlns:a="http://schemas.openxmlformats.org/drawingml/2006/main" xmlns:r="http://schemas.openxmlformats.org/officeDocument/2006/relationships" xmlns:p="http://schemas.openxmlformats.org/presentationml/2006/main">
   <p:cSld>
     <p:spTree>
       <p:nvGrpSpPr>
@@ -4999,7 +6786,14 @@
         <p:cNvGrpSpPr/>
         <p:nvPr/>
       </p:nvGrpSpPr>
-      <p:grpSpPr/>
+      <p:grpSpPr>
+        <a:xfrm>
+          <a:off x="0" y="0"/>
+          <a:ext cx="0" cy="0"/>
+          <a:chOff x="0" y="0"/>
+          <a:chExt cx="0" cy="0"/>
+        </a:xfrm>
+      </p:grpSpPr>
       <p:sp>
         <p:nvSpPr>
           <p:cNvPr id="2" name="Rectangle 1"/>
@@ -5040,6 +6834,7 @@
           <a:lstStyle/>
           <a:p>
             <a:pPr algn="ctr"/>
+            <a:endParaRPr sz="1600"/>
           </a:p>
         </p:txBody>
       </p:sp>
@@ -5052,7 +6847,7 @@
         <p:spPr>
           <a:xfrm>
             <a:off x="731520" y="365760"/>
-            <a:ext cx="10698480" cy="274320"/>
+            <a:ext cx="10698480" cy="246221"/>
           </a:xfrm>
           <a:prstGeom prst="rect">
             <a:avLst/>
@@ -5073,6 +6868,7 @@
               </a:defRPr>
             </a:pPr>
             <a:r>
+              <a:rPr sz="1600"/>
               <a:t>COMPETITOR DEEP DIVE</a:t>
             </a:r>
           </a:p>
@@ -5087,7 +6883,7 @@
         <p:spPr>
           <a:xfrm>
             <a:off x="731520" y="640080"/>
-            <a:ext cx="10698480" cy="502920"/>
+            <a:ext cx="10698480" cy="246221"/>
           </a:xfrm>
           <a:prstGeom prst="rect">
             <a:avLst/>
@@ -5108,6 +6904,7 @@
               </a:defRPr>
             </a:pPr>
             <a:r>
+              <a:rPr sz="1600"/>
               <a:t>Habuild Deep Dive: WhatsApp-Led Onboarding &amp; Retention</a:t>
             </a:r>
           </a:p>
@@ -5122,7 +6919,7 @@
         <p:spPr>
           <a:xfrm>
             <a:off x="731520" y="1170432"/>
-            <a:ext cx="10698480" cy="320040"/>
+            <a:ext cx="10698480" cy="246221"/>
           </a:xfrm>
           <a:prstGeom prst="rect">
             <a:avLst/>
@@ -5143,6 +6940,7 @@
               </a:defRPr>
             </a:pPr>
             <a:r>
+              <a:rPr sz="1600"/>
               <a:t>How Habuild achieved scale via zero-friction checkout and WhatsApp daily habit formation</a:t>
             </a:r>
           </a:p>
@@ -5186,7 +6984,7 @@
           </a:fontRef>
         </p:style>
         <p:txBody>
-          <a:bodyPr rtlCol="0" anchor="ctr" lIns="274320" rIns="274320" tIns="274320"/>
+          <a:bodyPr lIns="274320" tIns="274320" rIns="274320" rtlCol="0" anchor="ctr"/>
           <a:lstStyle/>
           <a:p>
             <a:pPr algn="ctr">
@@ -5197,6 +6995,7 @@
               </a:defRPr>
             </a:pPr>
             <a:r>
+              <a:rPr sz="1600"/>
               <a:t>HABUILD MODEL HIGHLIGHTS:</a:t>
             </a:r>
           </a:p>
@@ -5212,18 +7011,28 @@
               </a:defRPr>
             </a:pPr>
             <a:r>
+              <a:rPr sz="1600"/>
               <a:t>• WhatsApp-First Ecosystem: Users sign up with only Mobile number -&gt; Instant payment -&gt; All daily Zoom links and reminders delivered via WhatsApp bot.</a:t>
             </a:r>
-            <a:br/>
-            <a:r>
+            <a:br>
+              <a:rPr sz="1600"/>
+            </a:br>
+            <a:r>
+              <a:rPr sz="1600"/>
               <a:t>• Upfront 1-Time Purchases: ₹1,999 for 3 Months or ₹3,999 for Annual pass. No forced auto-debit resistance.</a:t>
             </a:r>
-            <a:br/>
-            <a:r>
+            <a:br>
+              <a:rPr sz="1600"/>
+            </a:br>
+            <a:r>
+              <a:rPr sz="1600"/>
               <a:t>• Attendance Streak Gamification: WhatsApp bot tracks daily attendance streaks, badges, and teacher shout-outs.</a:t>
             </a:r>
-            <a:br/>
-            <a:r>
+            <a:br>
+              <a:rPr sz="1600"/>
+            </a:br>
+            <a:r>
+              <a:rPr sz="1600"/>
               <a:t>• Minimal Web UI: Zero complicated web portals; all customer interactions live where users already spend time.</a:t>
             </a:r>
           </a:p>
@@ -5267,7 +7076,7 @@
           </a:fontRef>
         </p:style>
         <p:txBody>
-          <a:bodyPr rtlCol="0" anchor="ctr" lIns="274320" rIns="274320" tIns="274320"/>
+          <a:bodyPr lIns="274320" tIns="274320" rIns="274320" rtlCol="0" anchor="ctr"/>
           <a:lstStyle/>
           <a:p>
             <a:pPr algn="ctr">
@@ -5278,6 +7087,7 @@
               </a:defRPr>
             </a:pPr>
             <a:r>
+              <a:rPr sz="1600"/>
               <a:t>KEY TAKEAWAYS FOR ART OF LIVING:</a:t>
             </a:r>
           </a:p>
@@ -5293,14 +7103,21 @@
               </a:defRPr>
             </a:pPr>
             <a:r>
+              <a:rPr sz="1600"/>
               <a:t>1. WhatsApp OTP &amp; Link Delivery: Integrate Juspay + WhatsApp notifications for instant class joining links.</a:t>
             </a:r>
-            <a:br/>
-            <a:r>
+            <a:br>
+              <a:rPr sz="1600"/>
+            </a:br>
+            <a:r>
+              <a:rPr sz="1600"/>
               <a:t>2. Daily Habit Building: Send daily morning reminders 15 minutes before chosen batch.</a:t>
             </a:r>
-            <a:br/>
-            <a:r>
+            <a:br>
+              <a:rPr sz="1600"/>
+            </a:br>
+            <a:r>
+              <a:rPr sz="1600"/>
               <a:t>3. Frictionless Upfront Pricing: Offer 1-time upfront payments to avoid mandate drop-offs among older demographics.</a:t>
             </a:r>
           </a:p>
@@ -5315,7 +7132,7 @@
 </file>
 
 <file path=ppt/slides/slide14.xml><?xml version="1.0" encoding="utf-8"?>
-<p:sld xmlns:a="http://schemas.openxmlformats.org/drawingml/2006/main" xmlns:p="http://schemas.openxmlformats.org/presentationml/2006/main" xmlns:r="http://schemas.openxmlformats.org/officeDocument/2006/relationships">
+<p:sld xmlns:a="http://schemas.openxmlformats.org/drawingml/2006/main" xmlns:r="http://schemas.openxmlformats.org/officeDocument/2006/relationships" xmlns:p="http://schemas.openxmlformats.org/presentationml/2006/main">
   <p:cSld>
     <p:spTree>
       <p:nvGrpSpPr>
@@ -5323,7 +7140,14 @@
         <p:cNvGrpSpPr/>
         <p:nvPr/>
       </p:nvGrpSpPr>
-      <p:grpSpPr/>
+      <p:grpSpPr>
+        <a:xfrm>
+          <a:off x="0" y="0"/>
+          <a:ext cx="0" cy="0"/>
+          <a:chOff x="0" y="0"/>
+          <a:chExt cx="0" cy="0"/>
+        </a:xfrm>
+      </p:grpSpPr>
       <p:sp>
         <p:nvSpPr>
           <p:cNvPr id="2" name="Rectangle 1"/>
@@ -5364,6 +7188,7 @@
           <a:lstStyle/>
           <a:p>
             <a:pPr algn="ctr"/>
+            <a:endParaRPr sz="1600"/>
           </a:p>
         </p:txBody>
       </p:sp>
@@ -5376,7 +7201,7 @@
         <p:spPr>
           <a:xfrm>
             <a:off x="731520" y="365760"/>
-            <a:ext cx="10698480" cy="274320"/>
+            <a:ext cx="10698480" cy="246221"/>
           </a:xfrm>
           <a:prstGeom prst="rect">
             <a:avLst/>
@@ -5397,6 +7222,7 @@
               </a:defRPr>
             </a:pPr>
             <a:r>
+              <a:rPr sz="1600"/>
               <a:t>PAYMENT ECONOMICS</a:t>
             </a:r>
           </a:p>
@@ -5411,7 +7237,7 @@
         <p:spPr>
           <a:xfrm>
             <a:off x="731520" y="640080"/>
-            <a:ext cx="10698480" cy="502920"/>
+            <a:ext cx="10698480" cy="246221"/>
           </a:xfrm>
           <a:prstGeom prst="rect">
             <a:avLst/>
@@ -5432,6 +7258,7 @@
               </a:defRPr>
             </a:pPr>
             <a:r>
+              <a:rPr sz="1600"/>
               <a:t>Payment Model Trade-Offs: 1-Time Upfront vs Recurring Auto-Payment</a:t>
             </a:r>
           </a:p>
@@ -5446,7 +7273,7 @@
         <p:spPr>
           <a:xfrm>
             <a:off x="731520" y="1170432"/>
-            <a:ext cx="10698480" cy="320040"/>
+            <a:ext cx="10698480" cy="246221"/>
           </a:xfrm>
           <a:prstGeom prst="rect">
             <a:avLst/>
@@ -5467,6 +7294,7 @@
               </a:defRPr>
             </a:pPr>
             <a:r>
+              <a:rPr sz="1600"/>
               <a:t>Evaluating customer friction, mandate resistance, revenue predictability, and chargeback risks</a:t>
             </a:r>
           </a:p>
@@ -5510,7 +7338,7 @@
           </a:fontRef>
         </p:style>
         <p:txBody>
-          <a:bodyPr rtlCol="0" anchor="ctr" lIns="274320" rIns="274320" tIns="274320"/>
+          <a:bodyPr lIns="274320" tIns="274320" rIns="274320" rtlCol="0" anchor="ctr"/>
           <a:lstStyle/>
           <a:p>
             <a:pPr algn="ctr">
@@ -5521,6 +7349,7 @@
               </a:defRPr>
             </a:pPr>
             <a:r>
+              <a:rPr sz="1600"/>
               <a:t>1-TIME UPFRONT PAYMENT (3M / 6M / 12M)</a:t>
             </a:r>
           </a:p>
@@ -5536,35 +7365,59 @@
               </a:defRPr>
             </a:pPr>
             <a:r>
+              <a:rPr sz="1600"/>
               <a:t>✅ PROS:</a:t>
             </a:r>
-            <a:br/>
-            <a:r>
+            <a:br>
+              <a:rPr sz="1600"/>
+            </a:br>
+            <a:r>
+              <a:rPr sz="1600"/>
               <a:t>• Zero Mandate Friction: No e-mandate registration or card tokenization failures.</a:t>
             </a:r>
-            <a:br/>
-            <a:r>
+            <a:br>
+              <a:rPr sz="1600"/>
+            </a:br>
+            <a:r>
+              <a:rPr sz="1600"/>
               <a:t>• High Conversion: Indian consumers readily pay upfront for fixed-term wellness.</a:t>
             </a:r>
-            <a:br/>
-            <a:r>
+            <a:br>
+              <a:rPr sz="1600"/>
+            </a:br>
+            <a:r>
+              <a:rPr sz="1600"/>
               <a:t>• Zero Chargeback/Dispute Risk: No surprise debits or customer complaints.</a:t>
             </a:r>
-            <a:br/>
-            <a:r>
+            <a:br>
+              <a:rPr sz="1600"/>
+            </a:br>
+            <a:r>
+              <a:rPr sz="1600"/>
               <a:t>• Complete Trust: Avoids psychological fear of 'hidden recurring subscriptions'.</a:t>
             </a:r>
-            <a:br/>
-            <a:br/>
-            <a:r>
+            <a:br>
+              <a:rPr sz="1600"/>
+            </a:br>
+            <a:br>
+              <a:rPr sz="1600"/>
+            </a:br>
+            <a:r>
+              <a:rPr sz="1600"/>
               <a:t>❌ CONS:</a:t>
             </a:r>
-            <a:br/>
-            <a:r>
+            <a:br>
+              <a:rPr sz="1600"/>
+            </a:br>
+            <a:r>
+              <a:rPr sz="1600"/>
               <a:t>• Requires active renewal campaigns at cycle end.</a:t>
             </a:r>
-            <a:br/>
-            <a:r>
+            <a:br>
+              <a:rPr sz="1600"/>
+            </a:br>
+            <a:r>
+              <a:rPr sz="1600"/>
               <a:t>• Unpredictable revenue if reactivation cadence is weak.</a:t>
             </a:r>
           </a:p>
@@ -5608,7 +7461,7 @@
           </a:fontRef>
         </p:style>
         <p:txBody>
-          <a:bodyPr rtlCol="0" anchor="ctr" lIns="274320" rIns="274320" tIns="274320"/>
+          <a:bodyPr lIns="274320" tIns="274320" rIns="274320" rtlCol="0" anchor="ctr"/>
           <a:lstStyle/>
           <a:p>
             <a:pPr algn="ctr">
@@ -5619,6 +7472,7 @@
               </a:defRPr>
             </a:pPr>
             <a:r>
+              <a:rPr sz="1600"/>
               <a:t>RECURRING AUTO-PAYMENT (AUTOPAY / SI)</a:t>
             </a:r>
           </a:p>
@@ -5634,35 +7488,59 @@
               </a:defRPr>
             </a:pPr>
             <a:r>
+              <a:rPr sz="1600"/>
               <a:t>✅ PROS:</a:t>
             </a:r>
-            <a:br/>
-            <a:r>
+            <a:br>
+              <a:rPr sz="1600"/>
+            </a:br>
+            <a:r>
+              <a:rPr sz="1600"/>
               <a:t>• High Lifetime Value (LTV): Automatic renewal maximizes long-term retention.</a:t>
             </a:r>
-            <a:br/>
-            <a:r>
+            <a:br>
+              <a:rPr sz="1600"/>
+            </a:br>
+            <a:r>
+              <a:rPr sz="1600"/>
               <a:t>• Predictable Cash Flow: Consistent monthly/annual recurring revenue (ARR).</a:t>
             </a:r>
-            <a:br/>
-            <a:r>
+            <a:br>
+              <a:rPr sz="1600"/>
+            </a:br>
+            <a:r>
+              <a:rPr sz="1600"/>
               <a:t>• Reduced Operational Overhead: System handles recurring collection automatically.</a:t>
             </a:r>
-            <a:br/>
-            <a:br/>
-            <a:r>
+            <a:br>
+              <a:rPr sz="1600"/>
+            </a:br>
+            <a:br>
+              <a:rPr sz="1600"/>
+            </a:br>
+            <a:r>
+              <a:rPr sz="1600"/>
               <a:t>❌ CONS:</a:t>
             </a:r>
-            <a:br/>
-            <a:r>
+            <a:br>
+              <a:rPr sz="1600"/>
+            </a:br>
+            <a:r>
+              <a:rPr sz="1600"/>
               <a:t>• Mandate Drop-Off: Upfront e-mandate authentication causes 30-40% drop-off.</a:t>
             </a:r>
-            <a:br/>
-            <a:r>
+            <a:br>
+              <a:rPr sz="1600"/>
+            </a:br>
+            <a:r>
+              <a:rPr sz="1600"/>
               <a:t>• Customer Hesitation: Users resist recurring debits for habit-based products.</a:t>
             </a:r>
-            <a:br/>
-            <a:r>
+            <a:br>
+              <a:rPr sz="1600"/>
+            </a:br>
+            <a:r>
+              <a:rPr sz="1600"/>
               <a:t>• Compliance Overhead: Strict RBI 24h pre-debit alerts &amp; cancellation rules required.</a:t>
             </a:r>
           </a:p>
@@ -5677,7 +7555,7 @@
 </file>
 
 <file path=ppt/slides/slide15.xml><?xml version="1.0" encoding="utf-8"?>
-<p:sld xmlns:a="http://schemas.openxmlformats.org/drawingml/2006/main" xmlns:p="http://schemas.openxmlformats.org/presentationml/2006/main" xmlns:r="http://schemas.openxmlformats.org/officeDocument/2006/relationships">
+<p:sld xmlns:a="http://schemas.openxmlformats.org/drawingml/2006/main" xmlns:r="http://schemas.openxmlformats.org/officeDocument/2006/relationships" xmlns:p="http://schemas.openxmlformats.org/presentationml/2006/main">
   <p:cSld>
     <p:spTree>
       <p:nvGrpSpPr>
@@ -5685,7 +7563,14 @@
         <p:cNvGrpSpPr/>
         <p:nvPr/>
       </p:nvGrpSpPr>
-      <p:grpSpPr/>
+      <p:grpSpPr>
+        <a:xfrm>
+          <a:off x="0" y="0"/>
+          <a:ext cx="0" cy="0"/>
+          <a:chOff x="0" y="0"/>
+          <a:chExt cx="0" cy="0"/>
+        </a:xfrm>
+      </p:grpSpPr>
       <p:sp>
         <p:nvSpPr>
           <p:cNvPr id="2" name="Rectangle 1"/>
@@ -5726,6 +7611,7 @@
           <a:lstStyle/>
           <a:p>
             <a:pPr algn="ctr"/>
+            <a:endParaRPr sz="1600"/>
           </a:p>
         </p:txBody>
       </p:sp>
@@ -5738,7 +7624,7 @@
         <p:spPr>
           <a:xfrm>
             <a:off x="731520" y="365760"/>
-            <a:ext cx="10698480" cy="274320"/>
+            <a:ext cx="10698480" cy="246221"/>
           </a:xfrm>
           <a:prstGeom prst="rect">
             <a:avLst/>
@@ -5759,6 +7645,7 @@
               </a:defRPr>
             </a:pPr>
             <a:r>
+              <a:rPr sz="1600"/>
               <a:t>RENEWAL REALITY</a:t>
             </a:r>
           </a:p>
@@ -5773,7 +7660,7 @@
         <p:spPr>
           <a:xfrm>
             <a:off x="731520" y="640080"/>
-            <a:ext cx="10698480" cy="502920"/>
+            <a:ext cx="10698480" cy="246221"/>
           </a:xfrm>
           <a:prstGeom prst="rect">
             <a:avLst/>
@@ -5794,6 +7681,7 @@
               </a:defRPr>
             </a:pPr>
             <a:r>
+              <a:rPr sz="1600"/>
               <a:t>The ~20% Renewal Rate Reality &amp; Retention Economics</a:t>
             </a:r>
           </a:p>
@@ -5808,7 +7696,7 @@
         <p:spPr>
           <a:xfrm>
             <a:off x="731520" y="1170432"/>
-            <a:ext cx="10698480" cy="320040"/>
+            <a:ext cx="10698480" cy="246221"/>
           </a:xfrm>
           <a:prstGeom prst="rect">
             <a:avLst/>
@@ -5829,6 +7717,7 @@
               </a:defRPr>
             </a:pPr>
             <a:r>
+              <a:rPr sz="1600"/>
               <a:t>Why forced auto-debit fails when organic renewal is ~20%, and the strategic metrics we must track</a:t>
             </a:r>
           </a:p>
@@ -5872,7 +7761,7 @@
           </a:fontRef>
         </p:style>
         <p:txBody>
-          <a:bodyPr rtlCol="0" anchor="ctr" lIns="274320" rIns="274320" tIns="274320"/>
+          <a:bodyPr lIns="274320" tIns="274320" rIns="274320" rtlCol="0" anchor="ctr"/>
           <a:lstStyle/>
           <a:p>
             <a:pPr algn="ctr">
@@ -5883,6 +7772,7 @@
               </a:defRPr>
             </a:pPr>
             <a:r>
+              <a:rPr sz="1600"/>
               <a:t>📊 BUSINESS REALITY: ~20% RENEWAL BASELINE</a:t>
             </a:r>
           </a:p>
@@ -5898,26 +7788,42 @@
               </a:defRPr>
             </a:pPr>
             <a:r>
+              <a:rPr sz="1600"/>
               <a:t>• Strategic Risk: If only ~20% of users naturally renew, forcing 100% of new users into recurring auto-debit triggers severe customer resistance, high cancellation rates, and payment gateway chargeback disputes.</a:t>
             </a:r>
-            <a:br/>
-            <a:r>
+            <a:br>
+              <a:rPr sz="1600"/>
+            </a:br>
+            <a:r>
+              <a:rPr sz="1600"/>
               <a:t>• Root Causes of Low Renewal:</a:t>
             </a:r>
-            <a:br/>
-            <a:r>
+            <a:br>
+              <a:rPr sz="1600"/>
+            </a:br>
+            <a:r>
+              <a:rPr sz="1600"/>
               <a:t>  1. Lack of daily attendance habit formation.</a:t>
             </a:r>
-            <a:br/>
-            <a:r>
+            <a:br>
+              <a:rPr sz="1600"/>
+            </a:br>
+            <a:r>
+              <a:rPr sz="1600"/>
               <a:t>  2. Absence of mid-cycle motivation or teacher check-ins.</a:t>
             </a:r>
-            <a:br/>
-            <a:r>
+            <a:br>
+              <a:rPr sz="1600"/>
+            </a:br>
+            <a:r>
+              <a:rPr sz="1600"/>
               <a:t>  3. Friction when users travel or fall sick without pause options.</a:t>
             </a:r>
-            <a:br/>
-            <a:r>
+            <a:br>
+              <a:rPr sz="1600"/>
+            </a:br>
+            <a:r>
+              <a:rPr sz="1600"/>
               <a:t>  4. Weak renewal communication (sent only on the day of expiry).</a:t>
             </a:r>
           </a:p>
@@ -5961,7 +7867,7 @@
           </a:fontRef>
         </p:style>
         <p:txBody>
-          <a:bodyPr rtlCol="0" anchor="ctr" lIns="274320" rIns="274320" tIns="274320"/>
+          <a:bodyPr lIns="274320" tIns="274320" rIns="274320" rtlCol="0" anchor="ctr"/>
           <a:lstStyle/>
           <a:p>
             <a:pPr algn="ctr">
@@ -5972,6 +7878,7 @@
               </a:defRPr>
             </a:pPr>
             <a:r>
+              <a:rPr sz="1600"/>
               <a:t>📈 MANDATORY LIFECYCLE METRICS TO TRACK:</a:t>
             </a:r>
           </a:p>
@@ -5987,26 +7894,42 @@
               </a:defRPr>
             </a:pPr>
             <a:r>
+              <a:rPr sz="1600"/>
               <a:t>1. Activation Rate: % of paid users attending First Live Session within 48h.</a:t>
             </a:r>
-            <a:br/>
-            <a:r>
+            <a:br>
+              <a:rPr sz="1600"/>
+            </a:br>
+            <a:r>
+              <a:rPr sz="1600"/>
               <a:t>2. WAU / Habit Index: Weekly attendance frequency (Target: &gt;= 3 sessions/wk).</a:t>
             </a:r>
-            <a:br/>
-            <a:r>
+            <a:br>
+              <a:rPr sz="1600"/>
+            </a:br>
+            <a:r>
+              <a:rPr sz="1600"/>
               <a:t>3. 30-Day &amp; 45-Day Retention: % active at end of Month 1.</a:t>
             </a:r>
-            <a:br/>
-            <a:r>
+            <a:br>
+              <a:rPr sz="1600"/>
+            </a:br>
+            <a:r>
+              <a:rPr sz="1600"/>
               <a:t>4. Pause Utilization: % using pause feature vs churn.</a:t>
             </a:r>
-            <a:br/>
-            <a:r>
+            <a:br>
+              <a:rPr sz="1600"/>
+            </a:br>
+            <a:r>
+              <a:rPr sz="1600"/>
               <a:t>5. Renewal Communication Conversion: Efficacy of T-14, T-7, and T-1 WhatsApp reminders.</a:t>
             </a:r>
-            <a:br/>
-            <a:r>
+            <a:br>
+              <a:rPr sz="1600"/>
+            </a:br>
+            <a:r>
+              <a:rPr sz="1600"/>
               <a:t>6. Reactivation Rate: % of expired members repurchasing within 60 days.</a:t>
             </a:r>
           </a:p>
@@ -6021,7 +7944,7 @@
 </file>
 
 <file path=ppt/slides/slide16.xml><?xml version="1.0" encoding="utf-8"?>
-<p:sld xmlns:a="http://schemas.openxmlformats.org/drawingml/2006/main" xmlns:p="http://schemas.openxmlformats.org/presentationml/2006/main" xmlns:r="http://schemas.openxmlformats.org/officeDocument/2006/relationships">
+<p:sld xmlns:a="http://schemas.openxmlformats.org/drawingml/2006/main" xmlns:r="http://schemas.openxmlformats.org/officeDocument/2006/relationships" xmlns:p="http://schemas.openxmlformats.org/presentationml/2006/main">
   <p:cSld>
     <p:spTree>
       <p:nvGrpSpPr>
@@ -6029,7 +7952,14 @@
         <p:cNvGrpSpPr/>
         <p:nvPr/>
       </p:nvGrpSpPr>
-      <p:grpSpPr/>
+      <p:grpSpPr>
+        <a:xfrm>
+          <a:off x="0" y="0"/>
+          <a:ext cx="0" cy="0"/>
+          <a:chOff x="0" y="0"/>
+          <a:chExt cx="0" cy="0"/>
+        </a:xfrm>
+      </p:grpSpPr>
       <p:sp>
         <p:nvSpPr>
           <p:cNvPr id="2" name="Rectangle 1"/>
@@ -6070,6 +8000,7 @@
           <a:lstStyle/>
           <a:p>
             <a:pPr algn="ctr"/>
+            <a:endParaRPr sz="1600"/>
           </a:p>
         </p:txBody>
       </p:sp>
@@ -6082,7 +8013,7 @@
         <p:spPr>
           <a:xfrm>
             <a:off x="731520" y="365760"/>
-            <a:ext cx="10698480" cy="274320"/>
+            <a:ext cx="10698480" cy="246221"/>
           </a:xfrm>
           <a:prstGeom prst="rect">
             <a:avLst/>
@@ -6103,6 +8034,7 @@
               </a:defRPr>
             </a:pPr>
             <a:r>
+              <a:rPr sz="1600"/>
               <a:t>BUSINESS MODELS</a:t>
             </a:r>
           </a:p>
@@ -6117,7 +8049,7 @@
         <p:spPr>
           <a:xfrm>
             <a:off x="731520" y="640080"/>
-            <a:ext cx="10698480" cy="502920"/>
+            <a:ext cx="10698480" cy="246221"/>
           </a:xfrm>
           <a:prstGeom prst="rect">
             <a:avLst/>
@@ -6138,6 +8070,7 @@
               </a:defRPr>
             </a:pPr>
             <a:r>
+              <a:rPr sz="1600"/>
               <a:t>Evaluating the 'No Renewal' Model (Fixed Expiry &amp; Voluntary Repurchase)</a:t>
             </a:r>
           </a:p>
@@ -6152,7 +8085,7 @@
         <p:spPr>
           <a:xfrm>
             <a:off x="731520" y="1170432"/>
-            <a:ext cx="10698480" cy="320040"/>
+            <a:ext cx="10698480" cy="246221"/>
           </a:xfrm>
           <a:prstGeom prst="rect">
             <a:avLst/>
@@ -6173,6 +8106,7 @@
               </a:defRPr>
             </a:pPr>
             <a:r>
+              <a:rPr sz="1600"/>
               <a:t>Assessing fixed-term cohort purchasing vs perpetual subscription commitments</a:t>
             </a:r>
           </a:p>
@@ -6216,7 +8150,7 @@
           </a:fontRef>
         </p:style>
         <p:txBody>
-          <a:bodyPr rtlCol="0" anchor="ctr" lIns="274320" rIns="274320" tIns="274320"/>
+          <a:bodyPr lIns="274320" tIns="274320" rIns="274320" rtlCol="0" anchor="ctr"/>
           <a:lstStyle/>
           <a:p>
             <a:pPr algn="ctr">
@@ -6227,6 +8161,7 @@
               </a:defRPr>
             </a:pPr>
             <a:r>
+              <a:rPr sz="1600"/>
               <a:t>HOW THE 'NO RENEWAL' MODEL WORKS:</a:t>
             </a:r>
           </a:p>
@@ -6242,14 +8177,21 @@
               </a:defRPr>
             </a:pPr>
             <a:r>
+              <a:rPr sz="1600"/>
               <a:t>• Principle: User purchases a defined package (e.g., 3-Month, 6-Month, or 12-Month access). At the end of the period, access expires cleanly unless the user actively chooses to repurchase.</a:t>
             </a:r>
-            <a:br/>
-            <a:r>
+            <a:br>
+              <a:rPr sz="1600"/>
+            </a:br>
+            <a:r>
+              <a:rPr sz="1600"/>
               <a:t>• Alignment with Indian Wellness: Follows traditional ashram/course enrollment mindset (like Happiness Program or Sahaj Samadhi).</a:t>
             </a:r>
-            <a:br/>
-            <a:r>
+            <a:br>
+              <a:rPr sz="1600"/>
+            </a:br>
+            <a:r>
+              <a:rPr sz="1600"/>
               <a:t>• Zero Involuntary Churn: No failed billing attempts, grace period headaches, or card expiry issues.</a:t>
             </a:r>
           </a:p>
@@ -6293,7 +8235,7 @@
           </a:fontRef>
         </p:style>
         <p:txBody>
-          <a:bodyPr rtlCol="0" anchor="ctr" lIns="274320" rIns="274320" tIns="274320"/>
+          <a:bodyPr lIns="274320" tIns="274320" rIns="274320" rtlCol="0" anchor="ctr"/>
           <a:lstStyle/>
           <a:p>
             <a:pPr algn="ctr">
@@ -6304,6 +8246,7 @@
               </a:defRPr>
             </a:pPr>
             <a:r>
+              <a:rPr sz="1600"/>
               <a:t>RECOMMENDED HYBRID MODEL (OPTION C):</a:t>
             </a:r>
           </a:p>
@@ -6319,14 +8262,21 @@
               </a:defRPr>
             </a:pPr>
             <a:r>
+              <a:rPr sz="1600"/>
               <a:t>• Default Setting: 1-Time Upfront Purchase (Maximizes initial checkout conversion).</a:t>
             </a:r>
-            <a:br/>
-            <a:r>
+            <a:br>
+              <a:rPr sz="1600"/>
+            </a:br>
+            <a:r>
+              <a:rPr sz="1600"/>
               <a:t>• Optional Toggle: 'Enable Auto-Renewal &amp; Save 10% / Get 15 Extra Pause Days'.</a:t>
             </a:r>
-            <a:br/>
-            <a:r>
+            <a:br>
+              <a:rPr sz="1600"/>
+            </a:br>
+            <a:r>
+              <a:rPr sz="1600"/>
               <a:t>• Result: Best of both worlds—captures high-intent recurring subscribers without repelling users who prefer fixed-term upfront payment.</a:t>
             </a:r>
           </a:p>
@@ -6341,7 +8291,7 @@
 </file>
 
 <file path=ppt/slides/slide17.xml><?xml version="1.0" encoding="utf-8"?>
-<p:sld xmlns:a="http://schemas.openxmlformats.org/drawingml/2006/main" xmlns:p="http://schemas.openxmlformats.org/presentationml/2006/main" xmlns:r="http://schemas.openxmlformats.org/officeDocument/2006/relationships">
+<p:sld xmlns:a="http://schemas.openxmlformats.org/drawingml/2006/main" xmlns:r="http://schemas.openxmlformats.org/officeDocument/2006/relationships" xmlns:p="http://schemas.openxmlformats.org/presentationml/2006/main">
   <p:cSld>
     <p:spTree>
       <p:nvGrpSpPr>
@@ -6349,7 +8299,14 @@
         <p:cNvGrpSpPr/>
         <p:nvPr/>
       </p:nvGrpSpPr>
-      <p:grpSpPr/>
+      <p:grpSpPr>
+        <a:xfrm>
+          <a:off x="0" y="0"/>
+          <a:ext cx="0" cy="0"/>
+          <a:chOff x="0" y="0"/>
+          <a:chExt cx="0" cy="0"/>
+        </a:xfrm>
+      </p:grpSpPr>
       <p:sp>
         <p:nvSpPr>
           <p:cNvPr id="2" name="Rectangle 1"/>
@@ -6390,6 +8347,7 @@
           <a:lstStyle/>
           <a:p>
             <a:pPr algn="ctr"/>
+            <a:endParaRPr sz="1600"/>
           </a:p>
         </p:txBody>
       </p:sp>
@@ -6402,7 +8360,7 @@
         <p:spPr>
           <a:xfrm>
             <a:off x="731520" y="365760"/>
-            <a:ext cx="10698480" cy="274320"/>
+            <a:ext cx="10698480" cy="246221"/>
           </a:xfrm>
           <a:prstGeom prst="rect">
             <a:avLst/>
@@ -6423,6 +8381,7 @@
               </a:defRPr>
             </a:pPr>
             <a:r>
+              <a:rPr sz="1600"/>
               <a:t>PRICING STRATEGY</a:t>
             </a:r>
           </a:p>
@@ -6437,7 +8396,7 @@
         <p:spPr>
           <a:xfrm>
             <a:off x="731520" y="640080"/>
-            <a:ext cx="10698480" cy="502920"/>
+            <a:ext cx="10698480" cy="246221"/>
           </a:xfrm>
           <a:prstGeom prst="rect">
             <a:avLst/>
@@ -6458,6 +8417,7 @@
               </a:defRPr>
             </a:pPr>
             <a:r>
+              <a:rPr sz="1600"/>
               <a:t>Sri Sri Yoga Pricing Architecture: 3M, 6M &amp; 12M Tiers</a:t>
             </a:r>
           </a:p>
@@ -6472,7 +8432,7 @@
         <p:spPr>
           <a:xfrm>
             <a:off x="731520" y="1170432"/>
-            <a:ext cx="10698480" cy="320040"/>
+            <a:ext cx="10698480" cy="246221"/>
           </a:xfrm>
           <a:prstGeom prst="rect">
             <a:avLst/>
@@ -6493,6 +8453,7 @@
               </a:defRPr>
             </a:pPr>
             <a:r>
+              <a:rPr sz="1600"/>
               <a:t>Balanced tier structure anchored on monthly value with built-in pause entitlements</a:t>
             </a:r>
           </a:p>
@@ -6536,7 +8497,7 @@
           </a:fontRef>
         </p:style>
         <p:txBody>
-          <a:bodyPr rtlCol="0" anchor="ctr" lIns="228600" rIns="228600" tIns="228600"/>
+          <a:bodyPr lIns="228600" tIns="228600" rIns="228600" rtlCol="0" anchor="ctr"/>
           <a:lstStyle/>
           <a:p>
             <a:pPr algn="ctr">
@@ -6547,6 +8508,7 @@
               </a:defRPr>
             </a:pPr>
             <a:r>
+              <a:rPr sz="1600"/>
               <a:t>3 Months Starter Plan</a:t>
             </a:r>
           </a:p>
@@ -6562,6 +8524,7 @@
               </a:defRPr>
             </a:pPr>
             <a:r>
+              <a:rPr sz="1600"/>
               <a:t>₹1,499 / 3 Months</a:t>
             </a:r>
           </a:p>
@@ -6577,6 +8540,7 @@
               </a:defRPr>
             </a:pPr>
             <a:r>
+              <a:rPr sz="1600"/>
               <a:t>₹499 / Month equivalent</a:t>
             </a:r>
           </a:p>
@@ -6592,22 +8556,35 @@
               </a:defRPr>
             </a:pPr>
             <a:r>
+              <a:rPr sz="1600"/>
               <a:t>• Live Daily Guided Yoga</a:t>
             </a:r>
-            <a:br/>
-            <a:r>
+            <a:br>
+              <a:rPr sz="1600"/>
+            </a:br>
+            <a:r>
+              <a:rPr sz="1600"/>
               <a:t>• Morning &amp; Evening Batches</a:t>
             </a:r>
-            <a:br/>
-            <a:r>
+            <a:br>
+              <a:rPr sz="1600"/>
+            </a:br>
+            <a:r>
+              <a:rPr sz="1600"/>
               <a:t>• 15 Days Pause Entitlement</a:t>
             </a:r>
-            <a:br/>
-            <a:r>
+            <a:br>
+              <a:rPr sz="1600"/>
+            </a:br>
+            <a:r>
+              <a:rPr sz="1600"/>
               <a:t>• Sri Sri Yoga Certificate</a:t>
             </a:r>
-            <a:br/>
-            <a:r>
+            <a:br>
+              <a:rPr sz="1600"/>
+            </a:br>
+            <a:r>
+              <a:rPr sz="1600"/>
               <a:t>• Web + Mobile App Access</a:t>
             </a:r>
           </a:p>
@@ -6651,7 +8628,7 @@
           </a:fontRef>
         </p:style>
         <p:txBody>
-          <a:bodyPr rtlCol="0" anchor="ctr" lIns="228600" rIns="228600" tIns="228600"/>
+          <a:bodyPr lIns="228600" tIns="228600" rIns="228600" rtlCol="0" anchor="ctr"/>
           <a:lstStyle/>
           <a:p>
             <a:pPr algn="ctr">
@@ -6662,6 +8639,7 @@
               </a:defRPr>
             </a:pPr>
             <a:r>
+              <a:rPr sz="1600"/>
               <a:t>6 Months Transformation</a:t>
             </a:r>
           </a:p>
@@ -6677,6 +8655,7 @@
               </a:defRPr>
             </a:pPr>
             <a:r>
+              <a:rPr sz="1600"/>
               <a:t>₹2,699 / 6 Months</a:t>
             </a:r>
           </a:p>
@@ -6692,6 +8671,7 @@
               </a:defRPr>
             </a:pPr>
             <a:r>
+              <a:rPr sz="1600"/>
               <a:t>₹449 / Month (Save 10%)</a:t>
             </a:r>
           </a:p>
@@ -6707,22 +8687,35 @@
               </a:defRPr>
             </a:pPr>
             <a:r>
+              <a:rPr sz="1600"/>
               <a:t>• All 3-Month Plan Inclusions</a:t>
             </a:r>
-            <a:br/>
-            <a:r>
+            <a:br>
+              <a:rPr sz="1600"/>
+            </a:br>
+            <a:r>
+              <a:rPr sz="1600"/>
               <a:t>• 30 Days Pause Entitlement</a:t>
             </a:r>
-            <a:br/>
-            <a:r>
+            <a:br>
+              <a:rPr sz="1600"/>
+            </a:br>
+            <a:r>
+              <a:rPr sz="1600"/>
               <a:t>• Monthly Masterclasses</a:t>
             </a:r>
-            <a:br/>
-            <a:r>
+            <a:br>
+              <a:rPr sz="1600"/>
+            </a:br>
+            <a:r>
+              <a:rPr sz="1600"/>
               <a:t>• Posture Correction Workshops</a:t>
             </a:r>
-            <a:br/>
-            <a:r>
+            <a:br>
+              <a:rPr sz="1600"/>
+            </a:br>
+            <a:r>
+              <a:rPr sz="1600"/>
               <a:t>• Priority Teacher Q&amp;A</a:t>
             </a:r>
           </a:p>
@@ -6766,7 +8759,7 @@
           </a:fontRef>
         </p:style>
         <p:txBody>
-          <a:bodyPr rtlCol="0" anchor="ctr" lIns="228600" rIns="228600" tIns="228600"/>
+          <a:bodyPr lIns="228600" tIns="228600" rIns="228600" rtlCol="0" anchor="ctr"/>
           <a:lstStyle/>
           <a:p>
             <a:pPr algn="ctr">
@@ -6777,6 +8770,7 @@
               </a:defRPr>
             </a:pPr>
             <a:r>
+              <a:rPr sz="1600"/>
               <a:t>12 Months Annual Yogi ⭐</a:t>
             </a:r>
           </a:p>
@@ -6792,6 +8786,7 @@
               </a:defRPr>
             </a:pPr>
             <a:r>
+              <a:rPr sz="1600"/>
               <a:t>₹4,999 / Year</a:t>
             </a:r>
           </a:p>
@@ -6807,6 +8802,7 @@
               </a:defRPr>
             </a:pPr>
             <a:r>
+              <a:rPr sz="1600"/>
               <a:t>₹416 / Month (Best Value)</a:t>
             </a:r>
           </a:p>
@@ -6822,22 +8818,35 @@
               </a:defRPr>
             </a:pPr>
             <a:r>
+              <a:rPr sz="1600"/>
               <a:t>• Complete 365-Day Access</a:t>
             </a:r>
-            <a:br/>
-            <a:r>
+            <a:br>
+              <a:rPr sz="1600"/>
+            </a:br>
+            <a:r>
+              <a:rPr sz="1600"/>
               <a:t>• 45 Days Pause Entitlement</a:t>
             </a:r>
-            <a:br/>
-            <a:r>
+            <a:br>
+              <a:rPr sz="1600"/>
+            </a:br>
+            <a:r>
+              <a:rPr sz="1600"/>
               <a:t>• Unlimited Masterclass Library</a:t>
             </a:r>
-            <a:br/>
-            <a:r>
+            <a:br>
+              <a:rPr sz="1600"/>
+            </a:br>
+            <a:r>
+              <a:rPr sz="1600"/>
               <a:t>• Ayurvedic Health Consult</a:t>
             </a:r>
-            <a:br/>
-            <a:r>
+            <a:br>
+              <a:rPr sz="1600"/>
+            </a:br>
+            <a:r>
+              <a:rPr sz="1600"/>
               <a:t>• Dedicated Mentor Support</a:t>
             </a:r>
           </a:p>
@@ -6852,7 +8861,7 @@
 </file>
 
 <file path=ppt/slides/slide18.xml><?xml version="1.0" encoding="utf-8"?>
-<p:sld xmlns:a="http://schemas.openxmlformats.org/drawingml/2006/main" xmlns:p="http://schemas.openxmlformats.org/presentationml/2006/main" xmlns:r="http://schemas.openxmlformats.org/officeDocument/2006/relationships">
+<p:sld xmlns:a="http://schemas.openxmlformats.org/drawingml/2006/main" xmlns:r="http://schemas.openxmlformats.org/officeDocument/2006/relationships" xmlns:p="http://schemas.openxmlformats.org/presentationml/2006/main">
   <p:cSld>
     <p:spTree>
       <p:nvGrpSpPr>
@@ -6860,7 +8869,14 @@
         <p:cNvGrpSpPr/>
         <p:nvPr/>
       </p:nvGrpSpPr>
-      <p:grpSpPr/>
+      <p:grpSpPr>
+        <a:xfrm>
+          <a:off x="0" y="0"/>
+          <a:ext cx="0" cy="0"/>
+          <a:chOff x="0" y="0"/>
+          <a:chExt cx="0" cy="0"/>
+        </a:xfrm>
+      </p:grpSpPr>
       <p:sp>
         <p:nvSpPr>
           <p:cNvPr id="2" name="Rectangle 1"/>
@@ -6901,6 +8917,7 @@
           <a:lstStyle/>
           <a:p>
             <a:pPr algn="ctr"/>
+            <a:endParaRPr sz="1600"/>
           </a:p>
         </p:txBody>
       </p:sp>
@@ -6913,7 +8930,7 @@
         <p:spPr>
           <a:xfrm>
             <a:off x="731520" y="365760"/>
-            <a:ext cx="10698480" cy="274320"/>
+            <a:ext cx="10698480" cy="246221"/>
           </a:xfrm>
           <a:prstGeom prst="rect">
             <a:avLst/>
@@ -6934,6 +8951,7 @@
               </a:defRPr>
             </a:pPr>
             <a:r>
+              <a:rPr sz="1600"/>
               <a:t>LIFECYCLE UX</a:t>
             </a:r>
           </a:p>
@@ -6948,7 +8966,7 @@
         <p:spPr>
           <a:xfrm>
             <a:off x="731520" y="640080"/>
-            <a:ext cx="10698480" cy="502920"/>
+            <a:ext cx="10698480" cy="246221"/>
           </a:xfrm>
           <a:prstGeom prst="rect">
             <a:avLst/>
@@ -6969,6 +8987,7 @@
               </a:defRPr>
             </a:pPr>
             <a:r>
+              <a:rPr sz="1600"/>
               <a:t>Pause / Resume Architecture &amp; Entitlement Pool (15d / 30d / 45d)</a:t>
             </a:r>
           </a:p>
@@ -6983,7 +9002,7 @@
         <p:spPr>
           <a:xfrm>
             <a:off x="731520" y="1170432"/>
-            <a:ext cx="10698480" cy="320040"/>
+            <a:ext cx="10698480" cy="246221"/>
           </a:xfrm>
           <a:prstGeom prst="rect">
             <a:avLst/>
@@ -7004,6 +9023,7 @@
               </a:defRPr>
             </a:pPr>
             <a:r>
+              <a:rPr sz="1600"/>
               <a:t>Preventing churn during travel, illness, or festivals with self-serve pause and early resume refunds</a:t>
             </a:r>
           </a:p>
@@ -7047,7 +9067,7 @@
           </a:fontRef>
         </p:style>
         <p:txBody>
-          <a:bodyPr rtlCol="0" anchor="ctr" lIns="274320" rIns="274320" tIns="274320"/>
+          <a:bodyPr lIns="274320" tIns="274320" rIns="274320" rtlCol="0" anchor="ctr"/>
           <a:lstStyle/>
           <a:p>
             <a:pPr algn="ctr">
@@ -7058,6 +9078,7 @@
               </a:defRPr>
             </a:pPr>
             <a:r>
+              <a:rPr sz="1600"/>
               <a:t>PAUSE ENTITLEMENT RULES BY PLAN:</a:t>
             </a:r>
           </a:p>
@@ -7073,35 +9094,59 @@
               </a:defRPr>
             </a:pPr>
             <a:r>
+              <a:rPr sz="1600"/>
               <a:t>• 3-Month Plan: 15 Days Pause Pool</a:t>
             </a:r>
-            <a:br/>
-            <a:r>
+            <a:br>
+              <a:rPr sz="1600"/>
+            </a:br>
+            <a:r>
+              <a:rPr sz="1600"/>
               <a:t>• 6-Month Plan: 30 Days Pause Pool</a:t>
             </a:r>
-            <a:br/>
-            <a:r>
+            <a:br>
+              <a:rPr sz="1600"/>
+            </a:br>
+            <a:r>
+              <a:rPr sz="1600"/>
               <a:t>• 12-Month Plan: 45 Days Pause Pool</a:t>
             </a:r>
-            <a:br/>
-            <a:br/>
-            <a:r>
+            <a:br>
+              <a:rPr sz="1600"/>
+            </a:br>
+            <a:br>
+              <a:rPr sz="1600"/>
+            </a:br>
+            <a:r>
+              <a:rPr sz="1600"/>
               <a:t>OPERATIONAL RULES:</a:t>
             </a:r>
-            <a:br/>
-            <a:r>
+            <a:br>
+              <a:rPr sz="1600"/>
+            </a:br>
+            <a:r>
+              <a:rPr sz="1600"/>
               <a:t>1. Minimum Pause Duration: 3 consecutive days.</a:t>
             </a:r>
-            <a:br/>
-            <a:r>
+            <a:br>
+              <a:rPr sz="1600"/>
+            </a:br>
+            <a:r>
+              <a:rPr sz="1600"/>
               <a:t>2. Maximum Pauses Allowed: Up to 3 pause events per subscription cycle.</a:t>
             </a:r>
-            <a:br/>
-            <a:r>
+            <a:br>
+              <a:rPr sz="1600"/>
+            </a:br>
+            <a:r>
+              <a:rPr sz="1600"/>
               <a:t>3. Date Extension Math: New Expiry Date = Original Expiry Date + Number of Days Paused.</a:t>
             </a:r>
-            <a:br/>
-            <a:r>
+            <a:br>
+              <a:rPr sz="1600"/>
+            </a:br>
+            <a:r>
+              <a:rPr sz="1600"/>
               <a:t>4. Expiration: Unused pause days expire when subscription ends (non-transferable).</a:t>
             </a:r>
           </a:p>
@@ -7145,7 +9190,7 @@
           </a:fontRef>
         </p:style>
         <p:txBody>
-          <a:bodyPr rtlCol="0" anchor="ctr" lIns="274320" rIns="274320" tIns="274320"/>
+          <a:bodyPr lIns="274320" tIns="274320" rIns="274320" rtlCol="0" anchor="ctr"/>
           <a:lstStyle/>
           <a:p>
             <a:pPr algn="ctr">
@@ -7156,6 +9201,7 @@
               </a:defRPr>
             </a:pPr>
             <a:r>
+              <a:rPr sz="1600"/>
               <a:t>EARLY RESUME REFUND MECHANICS:</a:t>
             </a:r>
           </a:p>
@@ -7171,26 +9217,42 @@
               </a:defRPr>
             </a:pPr>
             <a:r>
+              <a:rPr sz="1600"/>
               <a:t>• Scenario: User pauses for 10 days, but decides to resume after 4 days.</a:t>
             </a:r>
-            <a:br/>
-            <a:r>
+            <a:br>
+              <a:rPr sz="1600"/>
+            </a:br>
+            <a:r>
+              <a:rPr sz="1600"/>
               <a:t>• Immediate Recalculation:</a:t>
             </a:r>
-            <a:br/>
-            <a:r>
+            <a:br>
+              <a:rPr sz="1600"/>
+            </a:br>
+            <a:r>
+              <a:rPr sz="1600"/>
               <a:t>  - Days Consumed: 4 Days.</a:t>
             </a:r>
-            <a:br/>
-            <a:r>
+            <a:br>
+              <a:rPr sz="1600"/>
+            </a:br>
+            <a:r>
+              <a:rPr sz="1600"/>
               <a:t>  - Days Refunded to Balance: 6 Days.</a:t>
             </a:r>
-            <a:br/>
-            <a:r>
+            <a:br>
+              <a:rPr sz="1600"/>
+            </a:br>
+            <a:r>
+              <a:rPr sz="1600"/>
               <a:t>  - Subscription Extension: Adjusted by exact 4 days.</a:t>
             </a:r>
-            <a:br/>
-            <a:r>
+            <a:br>
+              <a:rPr sz="1600"/>
+            </a:br>
+            <a:r>
+              <a:rPr sz="1600"/>
               <a:t>• Class Booking Intercept: If a paused user clicks 'Join Today's Class', a friendly modal prompts: 'Resume &amp; Book Class now?'. Seamless 1-tap unpause.</a:t>
             </a:r>
           </a:p>
@@ -7205,7 +9267,7 @@
 </file>
 
 <file path=ppt/slides/slide19.xml><?xml version="1.0" encoding="utf-8"?>
-<p:sld xmlns:a="http://schemas.openxmlformats.org/drawingml/2006/main" xmlns:p="http://schemas.openxmlformats.org/presentationml/2006/main" xmlns:r="http://schemas.openxmlformats.org/officeDocument/2006/relationships">
+<p:sld xmlns:a="http://schemas.openxmlformats.org/drawingml/2006/main" xmlns:r="http://schemas.openxmlformats.org/officeDocument/2006/relationships" xmlns:p="http://schemas.openxmlformats.org/presentationml/2006/main">
   <p:cSld>
     <p:spTree>
       <p:nvGrpSpPr>
@@ -7213,7 +9275,14 @@
         <p:cNvGrpSpPr/>
         <p:nvPr/>
       </p:nvGrpSpPr>
-      <p:grpSpPr/>
+      <p:grpSpPr>
+        <a:xfrm>
+          <a:off x="0" y="0"/>
+          <a:ext cx="0" cy="0"/>
+          <a:chOff x="0" y="0"/>
+          <a:chExt cx="0" cy="0"/>
+        </a:xfrm>
+      </p:grpSpPr>
       <p:sp>
         <p:nvSpPr>
           <p:cNvPr id="2" name="Rectangle 1"/>
@@ -7254,6 +9323,7 @@
           <a:lstStyle/>
           <a:p>
             <a:pPr algn="ctr"/>
+            <a:endParaRPr sz="1600"/>
           </a:p>
         </p:txBody>
       </p:sp>
@@ -7266,7 +9336,7 @@
         <p:spPr>
           <a:xfrm>
             <a:off x="731520" y="365760"/>
-            <a:ext cx="10698480" cy="274320"/>
+            <a:ext cx="10698480" cy="246221"/>
           </a:xfrm>
           <a:prstGeom prst="rect">
             <a:avLst/>
@@ -7287,6 +9357,7 @@
               </a:defRPr>
             </a:pPr>
             <a:r>
+              <a:rPr sz="1600"/>
               <a:t>CANCELLATION UX</a:t>
             </a:r>
           </a:p>
@@ -7301,7 +9372,7 @@
         <p:spPr>
           <a:xfrm>
             <a:off x="731520" y="640080"/>
-            <a:ext cx="10698480" cy="502920"/>
+            <a:ext cx="10698480" cy="246221"/>
           </a:xfrm>
           <a:prstGeom prst="rect">
             <a:avLst/>
@@ -7322,6 +9393,7 @@
               </a:defRPr>
             </a:pPr>
             <a:r>
+              <a:rPr sz="1600"/>
               <a:t>Cancellation Best Practices &amp; Anti-Dark Pattern Architecture</a:t>
             </a:r>
           </a:p>
@@ -7336,7 +9408,7 @@
         <p:spPr>
           <a:xfrm>
             <a:off x="731520" y="1170432"/>
-            <a:ext cx="10698480" cy="320040"/>
+            <a:ext cx="10698480" cy="246221"/>
           </a:xfrm>
           <a:prstGeom prst="rect">
             <a:avLst/>
@@ -7357,6 +9429,7 @@
               </a:defRPr>
             </a:pPr>
             <a:r>
+              <a:rPr sz="1600"/>
               <a:t>Transparent self-serve cancellation that protects brand reputation and avoids chargeback disputes</a:t>
             </a:r>
           </a:p>
@@ -7400,7 +9473,7 @@
           </a:fontRef>
         </p:style>
         <p:txBody>
-          <a:bodyPr rtlCol="0" anchor="ctr" lIns="274320" rIns="274320" tIns="274320"/>
+          <a:bodyPr lIns="274320" tIns="274320" rIns="274320" rtlCol="0" anchor="ctr"/>
           <a:lstStyle/>
           <a:p>
             <a:pPr algn="ctr">
@@ -7411,6 +9484,7 @@
               </a:defRPr>
             </a:pPr>
             <a:r>
+              <a:rPr sz="1600"/>
               <a:t>ANTI-DARK PATTERN CANCELLATION PRINCIPLES:</a:t>
             </a:r>
           </a:p>
@@ -7426,18 +9500,28 @@
               </a:defRPr>
             </a:pPr>
             <a:r>
+              <a:rPr sz="1600"/>
               <a:t>• Easy to Find: Accessible directly from 'Manage Subscription' in customer profile. No requirement to call customer care or send emails.</a:t>
             </a:r>
-            <a:br/>
-            <a:r>
+            <a:br>
+              <a:rPr sz="1600"/>
+            </a:br>
+            <a:r>
+              <a:rPr sz="1600"/>
               <a:t>• Transparent Offer of Pause vs Cancel: Present 'Would you prefer to pause for 15 days instead?' without blocking cancellation.</a:t>
             </a:r>
-            <a:br/>
-            <a:r>
+            <a:br>
+              <a:rPr sz="1600"/>
+            </a:br>
+            <a:r>
+              <a:rPr sz="1600"/>
               <a:t>• Retain Paid Access: User retains full class access until the end of the currently paid billing period.</a:t>
             </a:r>
-            <a:br/>
-            <a:r>
+            <a:br>
+              <a:rPr sz="1600"/>
+            </a:br>
+            <a:r>
+              <a:rPr sz="1600"/>
               <a:t>• Instant Confirmation: Display clear confirmation on screen + dispatch instant confirmation via WhatsApp and Email.</a:t>
             </a:r>
           </a:p>
@@ -7481,7 +9565,7 @@
           </a:fontRef>
         </p:style>
         <p:txBody>
-          <a:bodyPr rtlCol="0" anchor="ctr" lIns="274320" rIns="274320" tIns="274320"/>
+          <a:bodyPr lIns="274320" tIns="274320" rIns="274320" rtlCol="0" anchor="ctr"/>
           <a:lstStyle/>
           <a:p>
             <a:pPr algn="ctr">
@@ -7492,6 +9576,7 @@
               </a:defRPr>
             </a:pPr>
             <a:r>
+              <a:rPr sz="1600"/>
               <a:t>DARK PATTERNS TO ELIMINATE:</a:t>
             </a:r>
           </a:p>
@@ -7507,23 +9592,38 @@
               </a:defRPr>
             </a:pPr>
             <a:r>
+              <a:rPr sz="1600"/>
               <a:t>❌ Hidden Cancel Buttons in deep submenus.</a:t>
             </a:r>
-            <a:br/>
-            <a:r>
+            <a:br>
+              <a:rPr sz="1600"/>
+            </a:br>
+            <a:r>
+              <a:rPr sz="1600"/>
               <a:t>❌ Requiring Phone Call to Support Agent to cancel.</a:t>
             </a:r>
-            <a:br/>
-            <a:r>
+            <a:br>
+              <a:rPr sz="1600"/>
+            </a:br>
+            <a:r>
+              <a:rPr sz="1600"/>
               <a:t>❌ Immediate Access Revocation when user has already paid for remainder of cycle.</a:t>
             </a:r>
-            <a:br/>
-            <a:r>
+            <a:br>
+              <a:rPr sz="1600"/>
+            </a:br>
+            <a:r>
+              <a:rPr sz="1600"/>
               <a:t>❌ Multi-Step 'Confirm 5 times' Guilt Trips.</a:t>
             </a:r>
-            <a:br/>
-            <a:br/>
-            <a:r>
+            <a:br>
+              <a:rPr sz="1600"/>
+            </a:br>
+            <a:br>
+              <a:rPr sz="1600"/>
+            </a:br>
+            <a:r>
+              <a:rPr sz="1600"/>
               <a:t>Ethical cancellation builds long-term spiritual trust, leading to 3x higher voluntary reactivation.</a:t>
             </a:r>
           </a:p>
@@ -7538,7 +9638,7 @@
 </file>
 
 <file path=ppt/slides/slide2.xml><?xml version="1.0" encoding="utf-8"?>
-<p:sld xmlns:a="http://schemas.openxmlformats.org/drawingml/2006/main" xmlns:p="http://schemas.openxmlformats.org/presentationml/2006/main" xmlns:r="http://schemas.openxmlformats.org/officeDocument/2006/relationships">
+<p:sld xmlns:a="http://schemas.openxmlformats.org/drawingml/2006/main" xmlns:r="http://schemas.openxmlformats.org/officeDocument/2006/relationships" xmlns:p="http://schemas.openxmlformats.org/presentationml/2006/main">
   <p:cSld>
     <p:spTree>
       <p:nvGrpSpPr>
@@ -7546,7 +9646,14 @@
         <p:cNvGrpSpPr/>
         <p:nvPr/>
       </p:nvGrpSpPr>
-      <p:grpSpPr/>
+      <p:grpSpPr>
+        <a:xfrm>
+          <a:off x="0" y="0"/>
+          <a:ext cx="0" cy="0"/>
+          <a:chOff x="0" y="0"/>
+          <a:chExt cx="0" cy="0"/>
+        </a:xfrm>
+      </p:grpSpPr>
       <p:sp>
         <p:nvSpPr>
           <p:cNvPr id="2" name="Rectangle 1"/>
@@ -7587,6 +9694,7 @@
           <a:lstStyle/>
           <a:p>
             <a:pPr algn="ctr"/>
+            <a:endParaRPr sz="1600"/>
           </a:p>
         </p:txBody>
       </p:sp>
@@ -7599,7 +9707,7 @@
         <p:spPr>
           <a:xfrm>
             <a:off x="731520" y="365760"/>
-            <a:ext cx="10698480" cy="274320"/>
+            <a:ext cx="10698480" cy="246221"/>
           </a:xfrm>
           <a:prstGeom prst="rect">
             <a:avLst/>
@@ -7620,6 +9728,7 @@
               </a:defRPr>
             </a:pPr>
             <a:r>
+              <a:rPr sz="1600"/>
               <a:t>EXECUTIVE BRIEFING</a:t>
             </a:r>
           </a:p>
@@ -7634,7 +9743,7 @@
         <p:spPr>
           <a:xfrm>
             <a:off x="731520" y="640080"/>
-            <a:ext cx="10698480" cy="502920"/>
+            <a:ext cx="10698480" cy="246221"/>
           </a:xfrm>
           <a:prstGeom prst="rect">
             <a:avLst/>
@@ -7655,6 +9764,7 @@
               </a:defRPr>
             </a:pPr>
             <a:r>
+              <a:rPr sz="1600"/>
               <a:t>Executive Summary: Transforming Sri Sri Yoga Digital Subscriptions</a:t>
             </a:r>
           </a:p>
@@ -7669,7 +9779,7 @@
         <p:spPr>
           <a:xfrm>
             <a:off x="731520" y="1170432"/>
-            <a:ext cx="10698480" cy="320040"/>
+            <a:ext cx="10698480" cy="246221"/>
           </a:xfrm>
           <a:prstGeom prst="rect">
             <a:avLst/>
@@ -7690,6 +9800,7 @@
               </a:defRPr>
             </a:pPr>
             <a:r>
+              <a:rPr sz="1600"/>
               <a:t>Strategic recommendations to maximize checkout conversion and curb subscriber churn</a:t>
             </a:r>
           </a:p>
@@ -7733,7 +9844,7 @@
           </a:fontRef>
         </p:style>
         <p:txBody>
-          <a:bodyPr rtlCol="0" anchor="ctr" lIns="228600" rIns="228600" tIns="228600"/>
+          <a:bodyPr lIns="228600" tIns="228600" rIns="228600" rtlCol="0" anchor="ctr"/>
           <a:lstStyle/>
           <a:p>
             <a:pPr algn="ctr">
@@ -7744,6 +9855,7 @@
               </a:defRPr>
             </a:pPr>
             <a:r>
+              <a:rPr sz="1600"/>
               <a:t>1. Pay First Architecture</a:t>
             </a:r>
           </a:p>
@@ -7759,6 +9871,7 @@
               </a:defRPr>
             </a:pPr>
             <a:r>
+              <a:rPr sz="1600"/>
               <a:t>Shift from pre-payment registration to 'Payment First -&gt; Progressive Profile After'. Eliminates high pre-checkout drop-off.</a:t>
             </a:r>
           </a:p>
@@ -7802,7 +9915,7 @@
           </a:fontRef>
         </p:style>
         <p:txBody>
-          <a:bodyPr rtlCol="0" anchor="ctr" lIns="228600" rIns="228600" tIns="228600"/>
+          <a:bodyPr lIns="228600" tIns="228600" rIns="228600" rtlCol="0" anchor="ctr"/>
           <a:lstStyle/>
           <a:p>
             <a:pPr algn="ctr">
@@ -7813,6 +9926,7 @@
               </a:defRPr>
             </a:pPr>
             <a:r>
+              <a:rPr sz="1600"/>
               <a:t>2. 3-Question Onboarding</a:t>
             </a:r>
           </a:p>
@@ -7828,6 +9942,7 @@
               </a:defRPr>
             </a:pPr>
             <a:r>
+              <a:rPr sz="1600"/>
               <a:t>Streamline pre-pay survey to 3 engaging questions (&lt;10s). Remove 'Time dedication' question due to fixed class timings.</a:t>
             </a:r>
           </a:p>
@@ -7871,7 +9986,7 @@
           </a:fontRef>
         </p:style>
         <p:txBody>
-          <a:bodyPr rtlCol="0" anchor="ctr" lIns="228600" rIns="228600" tIns="228600"/>
+          <a:bodyPr lIns="228600" tIns="228600" rIns="228600" rtlCol="0" anchor="ctr"/>
           <a:lstStyle/>
           <a:p>
             <a:pPr algn="ctr">
@@ -7882,6 +9997,7 @@
               </a:defRPr>
             </a:pPr>
             <a:r>
+              <a:rPr sz="1600"/>
               <a:t>3. Hybrid Payment Model</a:t>
             </a:r>
           </a:p>
@@ -7897,6 +10013,7 @@
               </a:defRPr>
             </a:pPr>
             <a:r>
+              <a:rPr sz="1600"/>
               <a:t>Default to 1-Time upfront purchase (3M/6M/12M) with optional Auto-Renew perk to navigate ~20% baseline renewal rate.</a:t>
             </a:r>
           </a:p>
@@ -7940,7 +10057,7 @@
           </a:fontRef>
         </p:style>
         <p:txBody>
-          <a:bodyPr rtlCol="0" anchor="ctr" lIns="228600" rIns="228600" tIns="228600"/>
+          <a:bodyPr lIns="228600" tIns="228600" rIns="228600" rtlCol="0" anchor="ctr"/>
           <a:lstStyle/>
           <a:p>
             <a:pPr algn="ctr">
@@ -7951,6 +10068,7 @@
               </a:defRPr>
             </a:pPr>
             <a:r>
+              <a:rPr sz="1600"/>
               <a:t>4. Lifecycle Safeguards</a:t>
             </a:r>
           </a:p>
@@ -7966,6 +10084,7 @@
               </a:defRPr>
             </a:pPr>
             <a:r>
+              <a:rPr sz="1600"/>
               <a:t>Implement structured Pause pools (15d/30d/45d) and transparent self-serve cancellation to establish high brand trust.</a:t>
             </a:r>
           </a:p>
@@ -7980,7 +10099,7 @@
 </file>
 
 <file path=ppt/slides/slide20.xml><?xml version="1.0" encoding="utf-8"?>
-<p:sld xmlns:a="http://schemas.openxmlformats.org/drawingml/2006/main" xmlns:p="http://schemas.openxmlformats.org/presentationml/2006/main" xmlns:r="http://schemas.openxmlformats.org/officeDocument/2006/relationships">
+<p:sld xmlns:a="http://schemas.openxmlformats.org/drawingml/2006/main" xmlns:r="http://schemas.openxmlformats.org/officeDocument/2006/relationships" xmlns:p="http://schemas.openxmlformats.org/presentationml/2006/main">
   <p:cSld>
     <p:spTree>
       <p:nvGrpSpPr>
@@ -7988,7 +10107,14 @@
         <p:cNvGrpSpPr/>
         <p:nvPr/>
       </p:nvGrpSpPr>
-      <p:grpSpPr/>
+      <p:grpSpPr>
+        <a:xfrm>
+          <a:off x="0" y="0"/>
+          <a:ext cx="0" cy="0"/>
+          <a:chOff x="0" y="0"/>
+          <a:chExt cx="0" cy="0"/>
+        </a:xfrm>
+      </p:grpSpPr>
       <p:sp>
         <p:nvSpPr>
           <p:cNvPr id="2" name="Rectangle 1"/>
@@ -8029,6 +10155,7 @@
           <a:lstStyle/>
           <a:p>
             <a:pPr algn="ctr"/>
+            <a:endParaRPr sz="1600"/>
           </a:p>
         </p:txBody>
       </p:sp>
@@ -8041,7 +10168,7 @@
         <p:spPr>
           <a:xfrm>
             <a:off x="731520" y="365760"/>
-            <a:ext cx="10698480" cy="274320"/>
+            <a:ext cx="10698480" cy="246221"/>
           </a:xfrm>
           <a:prstGeom prst="rect">
             <a:avLst/>
@@ -8062,6 +10189,7 @@
               </a:defRPr>
             </a:pPr>
             <a:r>
+              <a:rPr sz="1600"/>
               <a:t>PLAN SWITCHING</a:t>
             </a:r>
           </a:p>
@@ -8076,7 +10204,7 @@
         <p:spPr>
           <a:xfrm>
             <a:off x="731520" y="640080"/>
-            <a:ext cx="10698480" cy="502920"/>
+            <a:ext cx="10698480" cy="246221"/>
           </a:xfrm>
           <a:prstGeom prst="rect">
             <a:avLst/>
@@ -8097,6 +10225,7 @@
               </a:defRPr>
             </a:pPr>
             <a:r>
+              <a:rPr sz="1600"/>
               <a:t>Plan Upgrade, Downgrade &amp; Tier Switching Architecture</a:t>
             </a:r>
           </a:p>
@@ -8111,7 +10240,7 @@
         <p:spPr>
           <a:xfrm>
             <a:off x="731520" y="1170432"/>
-            <a:ext cx="10698480" cy="320040"/>
+            <a:ext cx="10698480" cy="246221"/>
           </a:xfrm>
           <a:prstGeom prst="rect">
             <a:avLst/>
@@ -8132,6 +10261,7 @@
               </a:defRPr>
             </a:pPr>
             <a:r>
+              <a:rPr sz="1600"/>
               <a:t>Immediate pro-rated upgrades and cycle-end downgrades with clear financial transparency</a:t>
             </a:r>
           </a:p>
@@ -8175,7 +10305,7 @@
           </a:fontRef>
         </p:style>
         <p:txBody>
-          <a:bodyPr rtlCol="0" anchor="ctr" lIns="274320" rIns="274320" tIns="274320"/>
+          <a:bodyPr lIns="274320" tIns="274320" rIns="274320" rtlCol="0" anchor="ctr"/>
           <a:lstStyle/>
           <a:p>
             <a:pPr algn="ctr">
@@ -8186,6 +10316,7 @@
               </a:defRPr>
             </a:pPr>
             <a:r>
+              <a:rPr sz="1600"/>
               <a:t>PLAN UPGRADES (e.g., 3M -&gt; 12M ANNUAL):</a:t>
             </a:r>
           </a:p>
@@ -8201,30 +10332,49 @@
               </a:defRPr>
             </a:pPr>
             <a:r>
+              <a:rPr sz="1600"/>
               <a:t>• Immediate Activation: Upgraded benefits (masterclasses, extra pause days) activate instantly upon confirmation.</a:t>
             </a:r>
-            <a:br/>
-            <a:r>
+            <a:br>
+              <a:rPr sz="1600"/>
+            </a:br>
+            <a:r>
+              <a:rPr sz="1600"/>
               <a:t>• Proration Credit: System calculates unused value of current plan and deducts it from the new plan charge.</a:t>
             </a:r>
-            <a:br/>
-            <a:r>
+            <a:br>
+              <a:rPr sz="1600"/>
+            </a:br>
+            <a:r>
+              <a:rPr sz="1600"/>
               <a:t>• Example Math:</a:t>
             </a:r>
-            <a:br/>
-            <a:r>
+            <a:br>
+              <a:rPr sz="1600"/>
+            </a:br>
+            <a:r>
+              <a:rPr sz="1600"/>
               <a:t>  - Current 3M Plan: ₹1,499 (45 days remaining = ₹750 credit)</a:t>
             </a:r>
-            <a:br/>
-            <a:r>
+            <a:br>
+              <a:rPr sz="1600"/>
+            </a:br>
+            <a:r>
+              <a:rPr sz="1600"/>
               <a:t>  - New 12M Plan: ₹4,999</a:t>
             </a:r>
-            <a:br/>
-            <a:r>
+            <a:br>
+              <a:rPr sz="1600"/>
+            </a:br>
+            <a:r>
+              <a:rPr sz="1600"/>
               <a:t>  - Amount Payable Today: ₹4,999 - ₹750 = ₹4,249.</a:t>
             </a:r>
-            <a:br/>
-            <a:r>
+            <a:br>
+              <a:rPr sz="1600"/>
+            </a:br>
+            <a:r>
+              <a:rPr sz="1600"/>
               <a:t>• Single Checkout: Processed in 1 click via Juspay.</a:t>
             </a:r>
           </a:p>
@@ -8268,7 +10418,7 @@
           </a:fontRef>
         </p:style>
         <p:txBody>
-          <a:bodyPr rtlCol="0" anchor="ctr" lIns="274320" rIns="274320" tIns="274320"/>
+          <a:bodyPr lIns="274320" tIns="274320" rIns="274320" rtlCol="0" anchor="ctr"/>
           <a:lstStyle/>
           <a:p>
             <a:pPr algn="ctr">
@@ -8279,6 +10429,7 @@
               </a:defRPr>
             </a:pPr>
             <a:r>
+              <a:rPr sz="1600"/>
               <a:t>PLAN DOWNGRADES (e.g., 12M -&gt; 3M):</a:t>
             </a:r>
           </a:p>
@@ -8294,18 +10445,28 @@
               </a:defRPr>
             </a:pPr>
             <a:r>
+              <a:rPr sz="1600"/>
               <a:t>• Effective Date: Takes effect at the end of the current paid billing cycle (no mid-cycle penalty).</a:t>
             </a:r>
-            <a:br/>
-            <a:r>
+            <a:br>
+              <a:rPr sz="1600"/>
+            </a:br>
+            <a:r>
+              <a:rPr sz="1600"/>
               <a:t>• Continued Access: User retains full annual privileges until the scheduled cycle end date.</a:t>
             </a:r>
-            <a:br/>
-            <a:r>
+            <a:br>
+              <a:rPr sz="1600"/>
+            </a:br>
+            <a:r>
+              <a:rPr sz="1600"/>
               <a:t>• Mandate Adjustment: Juspay recurring mandate is automatically updated to the lower amount for next cycle.</a:t>
             </a:r>
-            <a:br/>
-            <a:r>
+            <a:br>
+              <a:rPr sz="1600"/>
+            </a:br>
+            <a:r>
+              <a:rPr sz="1600"/>
               <a:t>• Confirmation: Instant WhatsApp notification confirming scheduled downgrade date.</a:t>
             </a:r>
           </a:p>
@@ -8320,7 +10481,7 @@
 </file>
 
 <file path=ppt/slides/slide21.xml><?xml version="1.0" encoding="utf-8"?>
-<p:sld xmlns:a="http://schemas.openxmlformats.org/drawingml/2006/main" xmlns:p="http://schemas.openxmlformats.org/presentationml/2006/main" xmlns:r="http://schemas.openxmlformats.org/officeDocument/2006/relationships">
+<p:sld xmlns:a="http://schemas.openxmlformats.org/drawingml/2006/main" xmlns:r="http://schemas.openxmlformats.org/officeDocument/2006/relationships" xmlns:p="http://schemas.openxmlformats.org/presentationml/2006/main">
   <p:cSld>
     <p:spTree>
       <p:nvGrpSpPr>
@@ -8328,7 +10489,14 @@
         <p:cNvGrpSpPr/>
         <p:nvPr/>
       </p:nvGrpSpPr>
-      <p:grpSpPr/>
+      <p:grpSpPr>
+        <a:xfrm>
+          <a:off x="0" y="0"/>
+          <a:ext cx="0" cy="0"/>
+          <a:chOff x="0" y="0"/>
+          <a:chExt cx="0" cy="0"/>
+        </a:xfrm>
+      </p:grpSpPr>
       <p:sp>
         <p:nvSpPr>
           <p:cNvPr id="2" name="Rectangle 1"/>
@@ -8369,6 +10537,7 @@
           <a:lstStyle/>
           <a:p>
             <a:pPr algn="ctr"/>
+            <a:endParaRPr sz="2000"/>
           </a:p>
         </p:txBody>
       </p:sp>
@@ -8381,7 +10550,7 @@
         <p:spPr>
           <a:xfrm>
             <a:off x="731520" y="365760"/>
-            <a:ext cx="10698480" cy="274320"/>
+            <a:ext cx="10698480" cy="307777"/>
           </a:xfrm>
           <a:prstGeom prst="rect">
             <a:avLst/>
@@ -8402,6 +10571,7 @@
               </a:defRPr>
             </a:pPr>
             <a:r>
+              <a:rPr sz="2000"/>
               <a:t>ACQUISITION STRATEGY</a:t>
             </a:r>
           </a:p>
@@ -8416,7 +10586,7 @@
         <p:spPr>
           <a:xfrm>
             <a:off x="731520" y="640080"/>
-            <a:ext cx="10698480" cy="502920"/>
+            <a:ext cx="10698480" cy="307777"/>
           </a:xfrm>
           <a:prstGeom prst="rect">
             <a:avLst/>
@@ -8437,6 +10607,7 @@
               </a:defRPr>
             </a:pPr>
             <a:r>
+              <a:rPr sz="2000"/>
               <a:t>Free Trial Architecture: 14-Day Evaluation &amp; Abuse Prevention</a:t>
             </a:r>
           </a:p>
@@ -8472,6 +10643,7 @@
               </a:defRPr>
             </a:pPr>
             <a:r>
+              <a:rPr sz="2000"/>
               <a:t>Structured free trial rules: 1 trial per user, automated transition notifications, and zero lock-in</a:t>
             </a:r>
           </a:p>
@@ -8515,7 +10687,7 @@
           </a:fontRef>
         </p:style>
         <p:txBody>
-          <a:bodyPr rtlCol="0" anchor="ctr" lIns="274320" rIns="274320" tIns="274320"/>
+          <a:bodyPr lIns="274320" tIns="274320" rIns="274320" rtlCol="0" anchor="ctr"/>
           <a:lstStyle/>
           <a:p>
             <a:pPr algn="ctr">
@@ -8526,6 +10698,7 @@
               </a:defRPr>
             </a:pPr>
             <a:r>
+              <a:rPr sz="2000"/>
               <a:t>FREE TRIAL ELIGIBILITY &amp; DURATION:</a:t>
             </a:r>
           </a:p>
@@ -8541,18 +10714,28 @@
               </a:defRPr>
             </a:pPr>
             <a:r>
+              <a:rPr sz="2000"/>
               <a:t>• Duration: 14 Days Full Access (Sufficient to experience 8-10 live yoga sessions and build a morning habit).</a:t>
             </a:r>
-            <a:br/>
-            <a:r>
+            <a:br>
+              <a:rPr sz="2000"/>
+            </a:br>
+            <a:r>
+              <a:rPr sz="2000"/>
               <a:t>• Eligibility: Strictly 1 Free Trial per unique Mobile Number and Email ID.</a:t>
             </a:r>
-            <a:br/>
-            <a:r>
+            <a:br>
+              <a:rPr sz="2000"/>
+            </a:br>
+            <a:r>
+              <a:rPr sz="2000"/>
               <a:t>• Zero Upfront Charge: ₹0 charged during trial period.</a:t>
             </a:r>
-            <a:br/>
-            <a:r>
+            <a:br>
+              <a:rPr sz="2000"/>
+            </a:br>
+            <a:r>
+              <a:rPr sz="2000"/>
               <a:t>• Mandate Registration: Optional ₹1 authorization via Juspay UPI/Card with instant refund for trial auto-conversion.</a:t>
             </a:r>
           </a:p>
@@ -8596,7 +10779,7 @@
           </a:fontRef>
         </p:style>
         <p:txBody>
-          <a:bodyPr rtlCol="0" anchor="ctr" lIns="274320" rIns="274320" tIns="274320"/>
+          <a:bodyPr lIns="274320" tIns="274320" rIns="274320" rtlCol="0" anchor="ctr"/>
           <a:lstStyle/>
           <a:p>
             <a:pPr algn="ctr">
@@ -8607,6 +10790,7 @@
               </a:defRPr>
             </a:pPr>
             <a:r>
+              <a:rPr sz="2000"/>
               <a:t>TRIAL TRANSITION CADENCE &amp; ALERTS:</a:t>
             </a:r>
           </a:p>
@@ -8622,18 +10806,28 @@
               </a:defRPr>
             </a:pPr>
             <a:r>
+              <a:rPr sz="2000"/>
               <a:t>• Day 0: Instant welcome WhatsApp with batch timing and Zoom link.</a:t>
             </a:r>
-            <a:br/>
-            <a:r>
+            <a:br>
+              <a:rPr sz="2000"/>
+            </a:br>
+            <a:r>
+              <a:rPr sz="2000"/>
               <a:t>• Day 7 (Mid-Trial): Milestone celebration: 'You have completed 5 yoga sessions! Meet your teacher for Q&amp;A.'</a:t>
             </a:r>
-            <a:br/>
-            <a:r>
+            <a:br>
+              <a:rPr sz="2000"/>
+            </a:br>
+            <a:r>
+              <a:rPr sz="2000"/>
               <a:t>• Day 11 (T-3 Advance Alert): Mandatory WhatsApp notification: 'Your 14-day trial ends in 3 days. Your subscription will activate on [Date]. Cancel anytime for ₹0.'</a:t>
             </a:r>
-            <a:br/>
-            <a:r>
+            <a:br>
+              <a:rPr sz="2000"/>
+            </a:br>
+            <a:r>
+              <a:rPr sz="2000"/>
               <a:t>• Day 14 (Execution): Trial converts to active paid membership.</a:t>
             </a:r>
           </a:p>
@@ -8648,7 +10842,7 @@
 </file>
 
 <file path=ppt/slides/slide22.xml><?xml version="1.0" encoding="utf-8"?>
-<p:sld xmlns:a="http://schemas.openxmlformats.org/drawingml/2006/main" xmlns:p="http://schemas.openxmlformats.org/presentationml/2006/main" xmlns:r="http://schemas.openxmlformats.org/officeDocument/2006/relationships">
+<p:sld xmlns:a="http://schemas.openxmlformats.org/drawingml/2006/main" xmlns:r="http://schemas.openxmlformats.org/officeDocument/2006/relationships" xmlns:p="http://schemas.openxmlformats.org/presentationml/2006/main">
   <p:cSld>
     <p:spTree>
       <p:nvGrpSpPr>
@@ -8656,7 +10850,14 @@
         <p:cNvGrpSpPr/>
         <p:nvPr/>
       </p:nvGrpSpPr>
-      <p:grpSpPr/>
+      <p:grpSpPr>
+        <a:xfrm>
+          <a:off x="0" y="0"/>
+          <a:ext cx="0" cy="0"/>
+          <a:chOff x="0" y="0"/>
+          <a:chExt cx="0" cy="0"/>
+        </a:xfrm>
+      </p:grpSpPr>
       <p:sp>
         <p:nvSpPr>
           <p:cNvPr id="2" name="Rectangle 1"/>
@@ -8697,6 +10898,7 @@
           <a:lstStyle/>
           <a:p>
             <a:pPr algn="ctr"/>
+            <a:endParaRPr sz="1600"/>
           </a:p>
         </p:txBody>
       </p:sp>
@@ -8709,7 +10911,7 @@
         <p:spPr>
           <a:xfrm>
             <a:off x="731520" y="365760"/>
-            <a:ext cx="10698480" cy="274320"/>
+            <a:ext cx="10698480" cy="246221"/>
           </a:xfrm>
           <a:prstGeom prst="rect">
             <a:avLst/>
@@ -8730,6 +10932,7 @@
               </a:defRPr>
             </a:pPr>
             <a:r>
+              <a:rPr sz="1600"/>
               <a:t>ENTITLEMENT MODEL</a:t>
             </a:r>
           </a:p>
@@ -8744,7 +10947,7 @@
         <p:spPr>
           <a:xfrm>
             <a:off x="731520" y="640080"/>
-            <a:ext cx="10698480" cy="502920"/>
+            <a:ext cx="10698480" cy="246221"/>
           </a:xfrm>
           <a:prstGeom prst="rect">
             <a:avLst/>
@@ -8765,6 +10968,7 @@
               </a:defRPr>
             </a:pPr>
             <a:r>
+              <a:rPr sz="1600"/>
               <a:t>45-Day Companion Access &amp; Multi-Platform Entitlement Architecture</a:t>
             </a:r>
           </a:p>
@@ -8779,7 +10983,7 @@
         <p:spPr>
           <a:xfrm>
             <a:off x="731520" y="1170432"/>
-            <a:ext cx="10698480" cy="320040"/>
+            <a:ext cx="10698480" cy="246221"/>
           </a:xfrm>
           <a:prstGeom prst="rect">
             <a:avLst/>
@@ -8800,6 +11004,7 @@
               </a:defRPr>
             </a:pPr>
             <a:r>
+              <a:rPr sz="1600"/>
               <a:t>Seamless cross-platform authentication across Web and Art of Living Mobile App</a:t>
             </a:r>
           </a:p>
@@ -8843,7 +11048,7 @@
           </a:fontRef>
         </p:style>
         <p:txBody>
-          <a:bodyPr rtlCol="0" anchor="ctr" lIns="274320" rIns="274320" tIns="274320"/>
+          <a:bodyPr lIns="274320" tIns="274320" rIns="274320" rtlCol="0" anchor="ctr"/>
           <a:lstStyle/>
           <a:p>
             <a:pPr algn="ctr">
@@ -8854,6 +11059,7 @@
               </a:defRPr>
             </a:pPr>
             <a:r>
+              <a:rPr sz="1600"/>
               <a:t>45-DAY ACCESS ENTITLEMENT RESOLUTION:</a:t>
             </a:r>
           </a:p>
@@ -8869,18 +11075,28 @@
               </a:defRPr>
             </a:pPr>
             <a:r>
+              <a:rPr sz="1600"/>
               <a:t>• Context: Certain Art of Living flagship programs include 45-day guided yoga companion access.</a:t>
             </a:r>
-            <a:br/>
-            <a:r>
+            <a:br>
+              <a:rPr sz="1600"/>
+            </a:br>
+            <a:r>
+              <a:rPr sz="1600"/>
               <a:t>• Entitlement Creation: Upon course purchase, system generates a 45-day entitlement token linked to customer's phone number.</a:t>
             </a:r>
-            <a:br/>
-            <a:r>
+            <a:br>
+              <a:rPr sz="1600"/>
+            </a:br>
+            <a:r>
+              <a:rPr sz="1600"/>
               <a:t>• Expiry Countdown Display: Customer dashboard prominently displays '45-Day Immersion Access: 32 Days Remaining'.</a:t>
             </a:r>
-            <a:br/>
-            <a:r>
+            <a:br>
+              <a:rPr sz="1600"/>
+            </a:br>
+            <a:r>
+              <a:rPr sz="1600"/>
               <a:t>• Seamless Upgrade Bridge: At Day 35 (T-10), offer an exclusive 'Loyalty Transition Offer' to convert to the Annual 12-Month plan with 20% discount.</a:t>
             </a:r>
           </a:p>
@@ -8924,7 +11140,7 @@
           </a:fontRef>
         </p:style>
         <p:txBody>
-          <a:bodyPr rtlCol="0" anchor="ctr" lIns="274320" rIns="274320" tIns="274320"/>
+          <a:bodyPr lIns="274320" tIns="274320" rIns="274320" rtlCol="0" anchor="ctr"/>
           <a:lstStyle/>
           <a:p>
             <a:pPr algn="ctr">
@@ -8935,6 +11151,7 @@
               </a:defRPr>
             </a:pPr>
             <a:r>
+              <a:rPr sz="1600"/>
               <a:t>CROSS-PLATFORM APP ENTITLEMENT (WEB + AOL APP):</a:t>
             </a:r>
           </a:p>
@@ -8950,18 +11167,28 @@
               </a:defRPr>
             </a:pPr>
             <a:r>
+              <a:rPr sz="1600"/>
               <a:t>• Single Sign-On (SSO): Customer's verified Mobile Number unlocks:</a:t>
             </a:r>
-            <a:br/>
-            <a:r>
+            <a:br>
+              <a:rPr sz="1600"/>
+            </a:br>
+            <a:r>
+              <a:rPr sz="1600"/>
               <a:t>  1. Web Portal (Daily live Zoom join links, masterclass replays, billing).</a:t>
             </a:r>
-            <a:br/>
-            <a:r>
+            <a:br>
+              <a:rPr sz="1600"/>
+            </a:br>
+            <a:r>
+              <a:rPr sz="1600"/>
               <a:t>  2. Art of Living Mobile App (Audio meditations, offline sadhana player).</a:t>
             </a:r>
-            <a:br/>
-            <a:r>
+            <a:br>
+              <a:rPr sz="1600"/>
+            </a:br>
+            <a:r>
+              <a:rPr sz="1600"/>
               <a:t>• Cloud Sync: Attendance streak and profile data sync automatically across Web and Mobile App.</a:t>
             </a:r>
           </a:p>
@@ -8976,7 +11203,7 @@
 </file>
 
 <file path=ppt/slides/slide23.xml><?xml version="1.0" encoding="utf-8"?>
-<p:sld xmlns:a="http://schemas.openxmlformats.org/drawingml/2006/main" xmlns:p="http://schemas.openxmlformats.org/presentationml/2006/main" xmlns:r="http://schemas.openxmlformats.org/officeDocument/2006/relationships">
+<p:sld xmlns:a="http://schemas.openxmlformats.org/drawingml/2006/main" xmlns:r="http://schemas.openxmlformats.org/officeDocument/2006/relationships" xmlns:p="http://schemas.openxmlformats.org/presentationml/2006/main">
   <p:cSld>
     <p:spTree>
       <p:nvGrpSpPr>
@@ -8984,7 +11211,14 @@
         <p:cNvGrpSpPr/>
         <p:nvPr/>
       </p:nvGrpSpPr>
-      <p:grpSpPr/>
+      <p:grpSpPr>
+        <a:xfrm>
+          <a:off x="0" y="0"/>
+          <a:ext cx="0" cy="0"/>
+          <a:chOff x="0" y="0"/>
+          <a:chExt cx="0" cy="0"/>
+        </a:xfrm>
+      </p:grpSpPr>
       <p:sp>
         <p:nvSpPr>
           <p:cNvPr id="2" name="Rectangle 1"/>
@@ -9025,6 +11259,7 @@
           <a:lstStyle/>
           <a:p>
             <a:pPr algn="ctr"/>
+            <a:endParaRPr sz="1600"/>
           </a:p>
         </p:txBody>
       </p:sp>
@@ -9037,7 +11272,7 @@
         <p:spPr>
           <a:xfrm>
             <a:off x="731520" y="365760"/>
-            <a:ext cx="10698480" cy="274320"/>
+            <a:ext cx="10698480" cy="246221"/>
           </a:xfrm>
           <a:prstGeom prst="rect">
             <a:avLst/>
@@ -9058,6 +11293,7 @@
               </a:defRPr>
             </a:pPr>
             <a:r>
+              <a:rPr sz="1600"/>
               <a:t>AUTHENTICATION UX</a:t>
             </a:r>
           </a:p>
@@ -9072,7 +11308,7 @@
         <p:spPr>
           <a:xfrm>
             <a:off x="731520" y="640080"/>
-            <a:ext cx="10698480" cy="502920"/>
+            <a:ext cx="10698480" cy="246221"/>
           </a:xfrm>
           <a:prstGeom prst="rect">
             <a:avLst/>
@@ -9093,6 +11329,7 @@
               </a:defRPr>
             </a:pPr>
             <a:r>
+              <a:rPr sz="1600"/>
               <a:t>Authentication Cleanup: Removing Apple Login &amp; Streamlining Auth</a:t>
             </a:r>
           </a:p>
@@ -9107,7 +11344,7 @@
         <p:spPr>
           <a:xfrm>
             <a:off x="731520" y="1170432"/>
-            <a:ext cx="10698480" cy="320040"/>
+            <a:ext cx="10698480" cy="246221"/>
           </a:xfrm>
           <a:prstGeom prst="rect">
             <a:avLst/>
@@ -9128,6 +11365,7 @@
               </a:defRPr>
             </a:pPr>
             <a:r>
+              <a:rPr sz="1600"/>
               <a:t>Optimizing authentication for Indian demographics: Mobile/WhatsApp OTP &amp; Google 1-Tap</a:t>
             </a:r>
           </a:p>
@@ -9171,7 +11409,7 @@
           </a:fontRef>
         </p:style>
         <p:txBody>
-          <a:bodyPr rtlCol="0" anchor="ctr" lIns="274320" rIns="274320" tIns="274320"/>
+          <a:bodyPr lIns="274320" tIns="274320" rIns="274320" rtlCol="0" anchor="ctr"/>
           <a:lstStyle/>
           <a:p>
             <a:pPr algn="ctr">
@@ -9182,6 +11420,7 @@
               </a:defRPr>
             </a:pPr>
             <a:r>
+              <a:rPr sz="1600"/>
               <a:t>❌ REMOVED: APPLE LOGIN OPTION</a:t>
             </a:r>
           </a:p>
@@ -9197,18 +11436,28 @@
               </a:defRPr>
             </a:pPr>
             <a:r>
+              <a:rPr sz="1600"/>
               <a:t>• Rationale for Removal:</a:t>
             </a:r>
-            <a:br/>
-            <a:r>
+            <a:br>
+              <a:rPr sz="1600"/>
+            </a:br>
+            <a:r>
+              <a:rPr sz="1600"/>
               <a:t>  1. Hidden Email Issues: Apple Private Relay generates masked @privaterelay.appleid.com emails, breaking WhatsApp class reminders and CRM record linking.</a:t>
             </a:r>
-            <a:br/>
-            <a:r>
+            <a:br>
+              <a:rPr sz="1600"/>
+            </a:br>
+            <a:r>
+              <a:rPr sz="1600"/>
               <a:t>  2. Demographics: 88%+ of target Indian yoga audience uses Android / Mobile OTP.</a:t>
             </a:r>
-            <a:br/>
-            <a:r>
+            <a:br>
+              <a:rPr sz="1600"/>
+            </a:br>
+            <a:r>
+              <a:rPr sz="1600"/>
               <a:t>  3. Friction: Removing Apple Login simplifies the auth modal to a single clean primary action.</a:t>
             </a:r>
           </a:p>
@@ -9252,7 +11501,7 @@
           </a:fontRef>
         </p:style>
         <p:txBody>
-          <a:bodyPr rtlCol="0" anchor="ctr" lIns="274320" rIns="274320" tIns="274320"/>
+          <a:bodyPr lIns="274320" tIns="274320" rIns="274320" rtlCol="0" anchor="ctr"/>
           <a:lstStyle/>
           <a:p>
             <a:pPr algn="ctr">
@@ -9263,6 +11512,7 @@
               </a:defRPr>
             </a:pPr>
             <a:r>
+              <a:rPr sz="1600"/>
               <a:t>✅ RECOMMENDED PRIMARY LOGIN OPTIONS:</a:t>
             </a:r>
           </a:p>
@@ -9278,31 +11528,52 @@
               </a:defRPr>
             </a:pPr>
             <a:r>
+              <a:rPr sz="1600"/>
               <a:t>1. Mobile + WhatsApp OTP (Primary):</a:t>
             </a:r>
-            <a:br/>
-            <a:r>
+            <a:br>
+              <a:rPr sz="1600"/>
+            </a:br>
+            <a:r>
+              <a:rPr sz="1600"/>
               <a:t>   - User enters 10-digit number.</a:t>
             </a:r>
-            <a:br/>
-            <a:r>
+            <a:br>
+              <a:rPr sz="1600"/>
+            </a:br>
+            <a:r>
+              <a:rPr sz="1600"/>
               <a:t>   - Instant 4-digit OTP via SMS or WhatsApp.</a:t>
             </a:r>
-            <a:br/>
-            <a:r>
+            <a:br>
+              <a:rPr sz="1600"/>
+            </a:br>
+            <a:r>
+              <a:rPr sz="1600"/>
               <a:t>   - Auto-read OTP on mobile devices.</a:t>
             </a:r>
-            <a:br/>
-            <a:br/>
-            <a:r>
+            <a:br>
+              <a:rPr sz="1600"/>
+            </a:br>
+            <a:br>
+              <a:rPr sz="1600"/>
+            </a:br>
+            <a:r>
+              <a:rPr sz="1600"/>
               <a:t>2. Google 1-Tap (Secondary):</a:t>
             </a:r>
-            <a:br/>
-            <a:r>
+            <a:br>
+              <a:rPr sz="1600"/>
+            </a:br>
+            <a:r>
+              <a:rPr sz="1600"/>
               <a:t>   - 1-tap fast login on desktop Chrome and Android.</a:t>
             </a:r>
-            <a:br/>
-            <a:r>
+            <a:br>
+              <a:rPr sz="1600"/>
+            </a:br>
+            <a:r>
+              <a:rPr sz="1600"/>
               <a:t>   - Captures verified email address.</a:t>
             </a:r>
           </a:p>
@@ -9317,7 +11588,7 @@
 </file>
 
 <file path=ppt/slides/slide24.xml><?xml version="1.0" encoding="utf-8"?>
-<p:sld xmlns:a="http://schemas.openxmlformats.org/drawingml/2006/main" xmlns:p="http://schemas.openxmlformats.org/presentationml/2006/main" xmlns:r="http://schemas.openxmlformats.org/officeDocument/2006/relationships">
+<p:sld xmlns:a="http://schemas.openxmlformats.org/drawingml/2006/main" xmlns:r="http://schemas.openxmlformats.org/officeDocument/2006/relationships" xmlns:p="http://schemas.openxmlformats.org/presentationml/2006/main">
   <p:cSld>
     <p:spTree>
       <p:nvGrpSpPr>
@@ -9325,7 +11596,14 @@
         <p:cNvGrpSpPr/>
         <p:nvPr/>
       </p:nvGrpSpPr>
-      <p:grpSpPr/>
+      <p:grpSpPr>
+        <a:xfrm>
+          <a:off x="0" y="0"/>
+          <a:ext cx="0" cy="0"/>
+          <a:chOff x="0" y="0"/>
+          <a:chExt cx="0" cy="0"/>
+        </a:xfrm>
+      </p:grpSpPr>
       <p:sp>
         <p:nvSpPr>
           <p:cNvPr id="2" name="Rectangle 1"/>
@@ -9366,6 +11644,7 @@
           <a:lstStyle/>
           <a:p>
             <a:pPr algn="ctr"/>
+            <a:endParaRPr sz="1600"/>
           </a:p>
         </p:txBody>
       </p:sp>
@@ -9378,7 +11657,7 @@
         <p:spPr>
           <a:xfrm>
             <a:off x="731520" y="365760"/>
-            <a:ext cx="10698480" cy="274320"/>
+            <a:ext cx="10698480" cy="246221"/>
           </a:xfrm>
           <a:prstGeom prst="rect">
             <a:avLst/>
@@ -9399,6 +11678,7 @@
               </a:defRPr>
             </a:pPr>
             <a:r>
+              <a:rPr sz="1600"/>
               <a:t>COMPLIANCE UX</a:t>
             </a:r>
           </a:p>
@@ -9413,7 +11693,7 @@
         <p:spPr>
           <a:xfrm>
             <a:off x="731520" y="640080"/>
-            <a:ext cx="10698480" cy="502920"/>
+            <a:ext cx="10698480" cy="246221"/>
           </a:xfrm>
           <a:prstGeom prst="rect">
             <a:avLst/>
@@ -9434,6 +11714,7 @@
               </a:defRPr>
             </a:pPr>
             <a:r>
+              <a:rPr sz="1600"/>
               <a:t>Explicit User Consent &amp; Payment Authorization Architecture</a:t>
             </a:r>
           </a:p>
@@ -9448,7 +11729,7 @@
         <p:spPr>
           <a:xfrm>
             <a:off x="731520" y="1170432"/>
-            <a:ext cx="10698480" cy="320040"/>
+            <a:ext cx="10698480" cy="246221"/>
           </a:xfrm>
           <a:prstGeom prst="rect">
             <a:avLst/>
@@ -9469,6 +11750,7 @@
               </a:defRPr>
             </a:pPr>
             <a:r>
+              <a:rPr sz="1600"/>
               <a:t>Ensuring clear, unambiguous consent without deceptive pre-selected checkboxes</a:t>
             </a:r>
           </a:p>
@@ -9512,7 +11794,7 @@
           </a:fontRef>
         </p:style>
         <p:txBody>
-          <a:bodyPr rtlCol="0" anchor="ctr" lIns="274320" rIns="274320" tIns="274320"/>
+          <a:bodyPr lIns="274320" tIns="274320" rIns="274320" rtlCol="0" anchor="ctr"/>
           <a:lstStyle/>
           <a:p>
             <a:pPr algn="ctr">
@@ -9523,6 +11805,7 @@
               </a:defRPr>
             </a:pPr>
             <a:r>
+              <a:rPr sz="1600"/>
               <a:t>EXPLICIT CONSENT STANDARDS FOR CHECKOUT:</a:t>
             </a:r>
           </a:p>
@@ -9538,18 +11821,28 @@
               </a:defRPr>
             </a:pPr>
             <a:r>
+              <a:rPr sz="1600"/>
               <a:t>• Transparent Language: Clearly display: 'By subscribing, you authorize Sri Sri Yoga to charge ₹[Amount] every [Cycle] starting on [Date] until cancelled.'</a:t>
             </a:r>
-            <a:br/>
-            <a:r>
+            <a:br>
+              <a:rPr sz="1600"/>
+            </a:br>
+            <a:r>
+              <a:rPr sz="1600"/>
               <a:t>• No Pre-Ticked Checkboxes: Consent boxes must be actively checked by user or explicitly confirmed via the CTA button.</a:t>
             </a:r>
-            <a:br/>
-            <a:r>
+            <a:br>
+              <a:rPr sz="1600"/>
+            </a:br>
+            <a:r>
+              <a:rPr sz="1600"/>
               <a:t>• Linked Policies: Clickable links to [Terms of Service], [Privacy Policy] and [Health Waiver] visible adjacent to CTA.</a:t>
             </a:r>
-            <a:br/>
-            <a:r>
+            <a:br>
+              <a:rPr sz="1600"/>
+            </a:br>
+            <a:r>
+              <a:rPr sz="1600"/>
               <a:t>• Order Summary Breakdown: Displays Initial Charge, Plan Duration, Renewal Amount, and Next Billing Date.</a:t>
             </a:r>
           </a:p>
@@ -9593,7 +11886,7 @@
           </a:fontRef>
         </p:style>
         <p:txBody>
-          <a:bodyPr rtlCol="0" anchor="ctr" lIns="274320" rIns="274320" tIns="274320"/>
+          <a:bodyPr lIns="274320" tIns="274320" rIns="274320" rtlCol="0" anchor="ctr"/>
           <a:lstStyle/>
           <a:p>
             <a:pPr algn="ctr">
@@ -9604,6 +11897,7 @@
               </a:defRPr>
             </a:pPr>
             <a:r>
+              <a:rPr sz="1600"/>
               <a:t>SAMPLE VISUAL CONSENT COPY:</a:t>
             </a:r>
           </a:p>
@@ -9619,30 +11913,49 @@
               </a:defRPr>
             </a:pPr>
             <a:r>
+              <a:rPr sz="1600"/>
               <a:t>┌──────────────────────────────────────────────┐</a:t>
             </a:r>
-            <a:br/>
-            <a:r>
+            <a:br>
+              <a:rPr sz="1600"/>
+            </a:br>
+            <a:r>
+              <a:rPr sz="1600"/>
               <a:t>│ ☑️ I agree to the Terms of Service, Privacy  │</a:t>
             </a:r>
-            <a:br/>
-            <a:r>
+            <a:br>
+              <a:rPr sz="1600"/>
+            </a:br>
+            <a:r>
+              <a:rPr sz="1600"/>
               <a:t>│    Policy, and Online Yoga Health Waiver.   │</a:t>
             </a:r>
-            <a:br/>
-            <a:r>
+            <a:br>
+              <a:rPr sz="1600"/>
+            </a:br>
+            <a:r>
+              <a:rPr sz="1600"/>
               <a:t>│                                              │</a:t>
             </a:r>
-            <a:br/>
-            <a:r>
+            <a:br>
+              <a:rPr sz="1600"/>
+            </a:br>
+            <a:r>
+              <a:rPr sz="1600"/>
               <a:t>│ 🔒 100% Secure Payment via Juspay Gateway    │</a:t>
             </a:r>
-            <a:br/>
-            <a:r>
+            <a:br>
+              <a:rPr sz="1600"/>
+            </a:br>
+            <a:r>
+              <a:rPr sz="1600"/>
               <a:t>│    Cancel or Pause anytime in 1-Click       │</a:t>
             </a:r>
-            <a:br/>
-            <a:r>
+            <a:br>
+              <a:rPr sz="1600"/>
+            </a:br>
+            <a:r>
+              <a:rPr sz="1600"/>
               <a:t>└──────────────────────────────────────────────┘</a:t>
             </a:r>
           </a:p>
@@ -9657,7 +11970,7 @@
 </file>
 
 <file path=ppt/slides/slide25.xml><?xml version="1.0" encoding="utf-8"?>
-<p:sld xmlns:a="http://schemas.openxmlformats.org/drawingml/2006/main" xmlns:p="http://schemas.openxmlformats.org/presentationml/2006/main" xmlns:r="http://schemas.openxmlformats.org/officeDocument/2006/relationships">
+<p:sld xmlns:a="http://schemas.openxmlformats.org/drawingml/2006/main" xmlns:r="http://schemas.openxmlformats.org/officeDocument/2006/relationships" xmlns:p="http://schemas.openxmlformats.org/presentationml/2006/main">
   <p:cSld>
     <p:spTree>
       <p:nvGrpSpPr>
@@ -9665,7 +11978,14 @@
         <p:cNvGrpSpPr/>
         <p:nvPr/>
       </p:nvGrpSpPr>
-      <p:grpSpPr/>
+      <p:grpSpPr>
+        <a:xfrm>
+          <a:off x="0" y="0"/>
+          <a:ext cx="0" cy="0"/>
+          <a:chOff x="0" y="0"/>
+          <a:chExt cx="0" cy="0"/>
+        </a:xfrm>
+      </p:grpSpPr>
       <p:sp>
         <p:nvSpPr>
           <p:cNvPr id="2" name="Rectangle 1"/>
@@ -9706,6 +12026,7 @@
           <a:lstStyle/>
           <a:p>
             <a:pPr algn="ctr"/>
+            <a:endParaRPr sz="1600"/>
           </a:p>
         </p:txBody>
       </p:sp>
@@ -9718,7 +12039,7 @@
         <p:spPr>
           <a:xfrm>
             <a:off x="731520" y="365760"/>
-            <a:ext cx="10698480" cy="274320"/>
+            <a:ext cx="10698480" cy="246221"/>
           </a:xfrm>
           <a:prstGeom prst="rect">
             <a:avLst/>
@@ -9739,6 +12060,7 @@
               </a:defRPr>
             </a:pPr>
             <a:r>
+              <a:rPr sz="1600"/>
               <a:t>CONSUMER PROTECTION</a:t>
             </a:r>
           </a:p>
@@ -9753,7 +12075,7 @@
         <p:spPr>
           <a:xfrm>
             <a:off x="731520" y="640080"/>
-            <a:ext cx="10698480" cy="502920"/>
+            <a:ext cx="10698480" cy="246221"/>
           </a:xfrm>
           <a:prstGeom prst="rect">
             <a:avLst/>
@@ -9774,6 +12096,7 @@
               </a:defRPr>
             </a:pPr>
             <a:r>
+              <a:rPr sz="1600"/>
               <a:t>Refund Policy Framework &amp; Regulatory Guidelines (India)</a:t>
             </a:r>
           </a:p>
@@ -9788,7 +12111,7 @@
         <p:spPr>
           <a:xfrm>
             <a:off x="731520" y="1170432"/>
-            <a:ext cx="10698480" cy="320040"/>
+            <a:ext cx="10698480" cy="246221"/>
           </a:xfrm>
           <a:prstGeom prst="rect">
             <a:avLst/>
@@ -9809,6 +12132,7 @@
               </a:defRPr>
             </a:pPr>
             <a:r>
+              <a:rPr sz="1600"/>
               <a:t>Balancing consumer fairness, digital service non-reversibility, and payment gateway SLAs</a:t>
             </a:r>
           </a:p>
@@ -9852,7 +12176,7 @@
           </a:fontRef>
         </p:style>
         <p:txBody>
-          <a:bodyPr rtlCol="0" anchor="ctr" lIns="274320" rIns="274320" tIns="274320"/>
+          <a:bodyPr lIns="274320" tIns="274320" rIns="274320" rtlCol="0" anchor="ctr"/>
           <a:lstStyle/>
           <a:p>
             <a:pPr algn="ctr">
@@ -9863,6 +12187,7 @@
               </a:defRPr>
             </a:pPr>
             <a:r>
+              <a:rPr sz="1600"/>
               <a:t>RECOMMENDED REFUND POLICY MATRIX:</a:t>
             </a:r>
           </a:p>
@@ -9878,18 +12203,28 @@
               </a:defRPr>
             </a:pPr>
             <a:r>
+              <a:rPr sz="1600"/>
               <a:t>• Pre-Commencement Cancellation: 100% refund if cancelled before attending the first scheduled live session.</a:t>
             </a:r>
-            <a:br/>
-            <a:r>
+            <a:br>
+              <a:rPr sz="1600"/>
+            </a:br>
+            <a:r>
+              <a:rPr sz="1600"/>
               <a:t>• Duplicate / Accidental Debit: 100% automatic refund processed in 5-7 business days via Juspay.</a:t>
             </a:r>
-            <a:br/>
-            <a:r>
+            <a:br>
+              <a:rPr sz="1600"/>
+            </a:br>
+            <a:r>
+              <a:rPr sz="1600"/>
               <a:t>• Technical Non-Delivery: Full refund if live stream fails due to platform server downtime without makeup slots.</a:t>
             </a:r>
-            <a:br/>
-            <a:r>
+            <a:br>
+              <a:rPr sz="1600"/>
+            </a:br>
+            <a:r>
+              <a:rPr sz="1600"/>
               <a:t>• Post-Commencement: Non-refundable once live classes have been attended; user is offered Pause or Family Transfer option.</a:t>
             </a:r>
           </a:p>
@@ -9933,7 +12268,7 @@
           </a:fontRef>
         </p:style>
         <p:txBody>
-          <a:bodyPr rtlCol="0" anchor="ctr" lIns="274320" rIns="274320" tIns="274320"/>
+          <a:bodyPr lIns="274320" tIns="274320" rIns="274320" rtlCol="0" anchor="ctr"/>
           <a:lstStyle/>
           <a:p>
             <a:pPr algn="ctr">
@@ -9944,6 +12279,7 @@
               </a:defRPr>
             </a:pPr>
             <a:r>
+              <a:rPr sz="1600"/>
               <a:t>DISPUTE &amp; CHARGEBACK MANAGEMENT:</a:t>
             </a:r>
           </a:p>
@@ -9959,14 +12295,21 @@
               </a:defRPr>
             </a:pPr>
             <a:r>
+              <a:rPr sz="1600"/>
               <a:t>• 24-Hour Resolution SLA: Dedicated support queue for billing issues.</a:t>
             </a:r>
-            <a:br/>
-            <a:r>
+            <a:br>
+              <a:rPr sz="1600"/>
+            </a:br>
+            <a:r>
+              <a:rPr sz="1600"/>
               <a:t>• Juspay Gateway Webhook Logging: Comprehensive audit trail of payment timestamps, mandate tokens, and delivery notifications for dispute defense.</a:t>
             </a:r>
-            <a:br/>
-            <a:r>
+            <a:br>
+              <a:rPr sz="1600"/>
+            </a:br>
+            <a:r>
+              <a:rPr sz="1600"/>
               <a:t>• Proactive Goodwill Policy: Unused subscriptions can be converted into course credits for other Art of Living programs.</a:t>
             </a:r>
           </a:p>
@@ -9981,7 +12324,7 @@
 </file>
 
 <file path=ppt/slides/slide26.xml><?xml version="1.0" encoding="utf-8"?>
-<p:sld xmlns:a="http://schemas.openxmlformats.org/drawingml/2006/main" xmlns:p="http://schemas.openxmlformats.org/presentationml/2006/main" xmlns:r="http://schemas.openxmlformats.org/officeDocument/2006/relationships">
+<p:sld xmlns:a="http://schemas.openxmlformats.org/drawingml/2006/main" xmlns:r="http://schemas.openxmlformats.org/officeDocument/2006/relationships" xmlns:p="http://schemas.openxmlformats.org/presentationml/2006/main">
   <p:cSld>
     <p:spTree>
       <p:nvGrpSpPr>
@@ -9989,7 +12332,14 @@
         <p:cNvGrpSpPr/>
         <p:nvPr/>
       </p:nvGrpSpPr>
-      <p:grpSpPr/>
+      <p:grpSpPr>
+        <a:xfrm>
+          <a:off x="0" y="0"/>
+          <a:ext cx="0" cy="0"/>
+          <a:chOff x="0" y="0"/>
+          <a:chExt cx="0" cy="0"/>
+        </a:xfrm>
+      </p:grpSpPr>
       <p:sp>
         <p:nvSpPr>
           <p:cNvPr id="2" name="Rectangle 1"/>
@@ -10030,6 +12380,7 @@
           <a:lstStyle/>
           <a:p>
             <a:pPr algn="ctr"/>
+            <a:endParaRPr sz="2000"/>
           </a:p>
         </p:txBody>
       </p:sp>
@@ -10042,7 +12393,7 @@
         <p:spPr>
           <a:xfrm>
             <a:off x="731520" y="365760"/>
-            <a:ext cx="10698480" cy="274320"/>
+            <a:ext cx="10698480" cy="307777"/>
           </a:xfrm>
           <a:prstGeom prst="rect">
             <a:avLst/>
@@ -10063,6 +12414,7 @@
               </a:defRPr>
             </a:pPr>
             <a:r>
+              <a:rPr sz="2000"/>
               <a:t>SYSTEM ARCHITECTURE</a:t>
             </a:r>
           </a:p>
@@ -10077,7 +12429,7 @@
         <p:spPr>
           <a:xfrm>
             <a:off x="731520" y="640080"/>
-            <a:ext cx="10698480" cy="502920"/>
+            <a:ext cx="10698480" cy="307777"/>
           </a:xfrm>
           <a:prstGeom prst="rect">
             <a:avLst/>
@@ -10098,6 +12450,7 @@
               </a:defRPr>
             </a:pPr>
             <a:r>
+              <a:rPr sz="2000"/>
               <a:t>Complete Subscription State Machine &amp; Lifecycle Transitions</a:t>
             </a:r>
           </a:p>
@@ -10112,7 +12465,7 @@
         <p:spPr>
           <a:xfrm>
             <a:off x="731520" y="1170432"/>
-            <a:ext cx="10698480" cy="320040"/>
+            <a:ext cx="10698480" cy="307777"/>
           </a:xfrm>
           <a:prstGeom prst="rect">
             <a:avLst/>
@@ -10133,6 +12486,7 @@
               </a:defRPr>
             </a:pPr>
             <a:r>
+              <a:rPr sz="2000"/>
               <a:t>Formal lifecycle state diagram governing customer access, billing webhooks, and retry logic</a:t>
             </a:r>
           </a:p>
@@ -10176,7 +12530,7 @@
           </a:fontRef>
         </p:style>
         <p:txBody>
-          <a:bodyPr rtlCol="0" anchor="ctr" lIns="182880" rIns="182880" tIns="182880"/>
+          <a:bodyPr lIns="182880" tIns="182880" rIns="182880" rtlCol="0" anchor="ctr"/>
           <a:lstStyle/>
           <a:p>
             <a:pPr algn="ctr">
@@ -10187,6 +12541,7 @@
               </a:defRPr>
             </a:pPr>
             <a:r>
+              <a:rPr sz="2000"/>
               <a:t>1. TRIAL</a:t>
             </a:r>
           </a:p>
@@ -10202,6 +12557,7 @@
               </a:defRPr>
             </a:pPr>
             <a:r>
+              <a:rPr sz="2000"/>
               <a:t>14-day free access. ₹0 charge. Full class access.</a:t>
             </a:r>
           </a:p>
@@ -10245,7 +12601,7 @@
           </a:fontRef>
         </p:style>
         <p:txBody>
-          <a:bodyPr rtlCol="0" anchor="ctr" lIns="182880" rIns="182880" tIns="182880"/>
+          <a:bodyPr lIns="182880" tIns="182880" rIns="182880" rtlCol="0" anchor="ctr"/>
           <a:lstStyle/>
           <a:p>
             <a:pPr algn="ctr">
@@ -10256,6 +12612,7 @@
               </a:defRPr>
             </a:pPr>
             <a:r>
+              <a:rPr sz="2000"/>
               <a:t>2. ACTIVE</a:t>
             </a:r>
           </a:p>
@@ -10271,6 +12628,7 @@
               </a:defRPr>
             </a:pPr>
             <a:r>
+              <a:rPr sz="2000"/>
               <a:t>Paid membership. Daily Zoom links &amp; dashboard active.</a:t>
             </a:r>
           </a:p>
@@ -10314,7 +12672,7 @@
           </a:fontRef>
         </p:style>
         <p:txBody>
-          <a:bodyPr rtlCol="0" anchor="ctr" lIns="182880" rIns="182880" tIns="182880"/>
+          <a:bodyPr lIns="182880" tIns="182880" rIns="182880" rtlCol="0" anchor="ctr"/>
           <a:lstStyle/>
           <a:p>
             <a:pPr algn="ctr">
@@ -10325,6 +12683,7 @@
               </a:defRPr>
             </a:pPr>
             <a:r>
+              <a:rPr sz="2000"/>
               <a:t>3. PAUSED</a:t>
             </a:r>
           </a:p>
@@ -10340,6 +12699,7 @@
               </a:defRPr>
             </a:pPr>
             <a:r>
+              <a:rPr sz="2000"/>
               <a:t>Classes frozen. End date extended. Booking triggers unpause.</a:t>
             </a:r>
           </a:p>
@@ -10383,7 +12743,7 @@
           </a:fontRef>
         </p:style>
         <p:txBody>
-          <a:bodyPr rtlCol="0" anchor="ctr" lIns="182880" rIns="182880" tIns="182880"/>
+          <a:bodyPr lIns="182880" tIns="182880" rIns="182880" rtlCol="0" anchor="ctr"/>
           <a:lstStyle/>
           <a:p>
             <a:pPr algn="ctr">
@@ -10394,6 +12754,7 @@
               </a:defRPr>
             </a:pPr>
             <a:r>
+              <a:rPr sz="2000"/>
               <a:t>4. GRACE_PERIOD</a:t>
             </a:r>
           </a:p>
@@ -10409,6 +12770,7 @@
               </a:defRPr>
             </a:pPr>
             <a:r>
+              <a:rPr sz="2000"/>
               <a:t>Payment failed on renewal. 7-day retry grace. Access maintained.</a:t>
             </a:r>
           </a:p>
@@ -10452,7 +12814,7 @@
           </a:fontRef>
         </p:style>
         <p:txBody>
-          <a:bodyPr rtlCol="0" anchor="ctr" lIns="182880" rIns="182880" tIns="182880"/>
+          <a:bodyPr lIns="182880" tIns="182880" rIns="182880" rtlCol="0" anchor="ctr"/>
           <a:lstStyle/>
           <a:p>
             <a:pPr algn="ctr">
@@ -10463,6 +12825,7 @@
               </a:defRPr>
             </a:pPr>
             <a:r>
+              <a:rPr sz="2000"/>
               <a:t>5. CANCELLED</a:t>
             </a:r>
           </a:p>
@@ -10478,6 +12841,7 @@
               </a:defRPr>
             </a:pPr>
             <a:r>
+              <a:rPr sz="2000"/>
               <a:t>Auto-renew stopped. Access continues until cycle end.</a:t>
             </a:r>
           </a:p>
@@ -10521,7 +12885,7 @@
           </a:fontRef>
         </p:style>
         <p:txBody>
-          <a:bodyPr rtlCol="0" anchor="ctr" lIns="182880" rIns="182880" tIns="182880"/>
+          <a:bodyPr lIns="182880" tIns="182880" rIns="182880" rtlCol="0" anchor="ctr"/>
           <a:lstStyle/>
           <a:p>
             <a:pPr algn="ctr">
@@ -10532,6 +12896,7 @@
               </a:defRPr>
             </a:pPr>
             <a:r>
+              <a:rPr sz="2000"/>
               <a:t>6. EXPIRED</a:t>
             </a:r>
           </a:p>
@@ -10547,6 +12912,7 @@
               </a:defRPr>
             </a:pPr>
             <a:r>
+              <a:rPr sz="2000"/>
               <a:t>Subscription ended. Prompts 1-click repurchase.</a:t>
             </a:r>
           </a:p>
@@ -10561,7 +12927,7 @@
 </file>
 
 <file path=ppt/slides/slide27.xml><?xml version="1.0" encoding="utf-8"?>
-<p:sld xmlns:a="http://schemas.openxmlformats.org/drawingml/2006/main" xmlns:p="http://schemas.openxmlformats.org/presentationml/2006/main" xmlns:r="http://schemas.openxmlformats.org/officeDocument/2006/relationships">
+<p:sld xmlns:a="http://schemas.openxmlformats.org/drawingml/2006/main" xmlns:r="http://schemas.openxmlformats.org/officeDocument/2006/relationships" xmlns:p="http://schemas.openxmlformats.org/presentationml/2006/main">
   <p:cSld>
     <p:spTree>
       <p:nvGrpSpPr>
@@ -10569,7 +12935,14 @@
         <p:cNvGrpSpPr/>
         <p:nvPr/>
       </p:nvGrpSpPr>
-      <p:grpSpPr/>
+      <p:grpSpPr>
+        <a:xfrm>
+          <a:off x="0" y="0"/>
+          <a:ext cx="0" cy="0"/>
+          <a:chOff x="0" y="0"/>
+          <a:chExt cx="0" cy="0"/>
+        </a:xfrm>
+      </p:grpSpPr>
       <p:sp>
         <p:nvSpPr>
           <p:cNvPr id="2" name="Rectangle 1"/>
@@ -10610,6 +12983,7 @@
           <a:lstStyle/>
           <a:p>
             <a:pPr algn="ctr"/>
+            <a:endParaRPr sz="1600"/>
           </a:p>
         </p:txBody>
       </p:sp>
@@ -10622,7 +12996,7 @@
         <p:spPr>
           <a:xfrm>
             <a:off x="731520" y="365760"/>
-            <a:ext cx="10698480" cy="274320"/>
+            <a:ext cx="10698480" cy="246221"/>
           </a:xfrm>
           <a:prstGeom prst="rect">
             <a:avLst/>
@@ -10643,6 +13017,7 @@
               </a:defRPr>
             </a:pPr>
             <a:r>
+              <a:rPr sz="1600"/>
               <a:t>OPERATIONS CONSOLE</a:t>
             </a:r>
           </a:p>
@@ -10657,7 +13032,7 @@
         <p:spPr>
           <a:xfrm>
             <a:off x="731520" y="640080"/>
-            <a:ext cx="10698480" cy="502920"/>
+            <a:ext cx="10698480" cy="246221"/>
           </a:xfrm>
           <a:prstGeom prst="rect">
             <a:avLst/>
@@ -10678,6 +13053,7 @@
               </a:defRPr>
             </a:pPr>
             <a:r>
+              <a:rPr sz="1600"/>
               <a:t>Admin Operations Console &amp; Payment Traceability Ledger</a:t>
             </a:r>
           </a:p>
@@ -10692,7 +13068,7 @@
         <p:spPr>
           <a:xfrm>
             <a:off x="731520" y="1170432"/>
-            <a:ext cx="10698480" cy="320040"/>
+            <a:ext cx="10698480" cy="246221"/>
           </a:xfrm>
           <a:prstGeom prst="rect">
             <a:avLst/>
@@ -10713,6 +13089,7 @@
               </a:defRPr>
             </a:pPr>
             <a:r>
+              <a:rPr sz="1600"/>
               <a:t>Comprehensive toolset for subscription management, renewals, retry triggers, and Juspay logs</a:t>
             </a:r>
           </a:p>
@@ -10756,7 +13133,7 @@
           </a:fontRef>
         </p:style>
         <p:txBody>
-          <a:bodyPr rtlCol="0" anchor="ctr" lIns="274320" rIns="274320" tIns="274320"/>
+          <a:bodyPr lIns="274320" tIns="274320" rIns="274320" rtlCol="0" anchor="ctr"/>
           <a:lstStyle/>
           <a:p>
             <a:pPr algn="ctr">
@@ -10767,6 +13144,7 @@
               </a:defRPr>
             </a:pPr>
             <a:r>
+              <a:rPr sz="1600"/>
               <a:t>ADMIN OPERATIONAL MODULES BUILT:</a:t>
             </a:r>
           </a:p>
@@ -10782,22 +13160,35 @@
               </a:defRPr>
             </a:pPr>
             <a:r>
+              <a:rPr sz="1600"/>
               <a:t>1. Executive KPI Dashboard: Real-time active subscribers, monthly revenue, renewal success rates, and operational alerts.</a:t>
             </a:r>
-            <a:br/>
-            <a:r>
+            <a:br>
+              <a:rPr sz="1600"/>
+            </a:br>
+            <a:r>
+              <a:rPr sz="1600"/>
               <a:t>2. Subscriptions Management: Search by phone/name, filter by tier, view pause history, and trigger manual actions.</a:t>
             </a:r>
-            <a:br/>
-            <a:r>
+            <a:br>
+              <a:rPr sz="1600"/>
+            </a:br>
+            <a:r>
+              <a:rPr sz="1600"/>
               <a:t>3. Renewals &amp; Failed Retries: Track dunning grace periods and trigger manual retry webhooks.</a:t>
             </a:r>
-            <a:br/>
-            <a:r>
+            <a:br>
+              <a:rPr sz="1600"/>
+            </a:br>
+            <a:r>
+              <a:rPr sz="1600"/>
               <a:t>4. Course &amp; Plan Management: Configure batch slots, prices, and pause pools.</a:t>
             </a:r>
-            <a:br/>
-            <a:r>
+            <a:br>
+              <a:rPr sz="1600"/>
+            </a:br>
+            <a:r>
+              <a:rPr sz="1600"/>
               <a:t>5. Communications Center: Preview automated WhatsApp templates.</a:t>
             </a:r>
           </a:p>
@@ -10841,7 +13232,7 @@
           </a:fontRef>
         </p:style>
         <p:txBody>
-          <a:bodyPr rtlCol="0" anchor="ctr" lIns="274320" rIns="274320" tIns="274320"/>
+          <a:bodyPr lIns="274320" tIns="274320" rIns="274320" rtlCol="0" anchor="ctr"/>
           <a:lstStyle/>
           <a:p>
             <a:pPr algn="ctr">
@@ -10852,6 +13243,7 @@
               </a:defRPr>
             </a:pPr>
             <a:r>
+              <a:rPr sz="1600"/>
               <a:t>PAYMENTS &amp; MANDATES TRACEABILITY LEDGER:</a:t>
             </a:r>
           </a:p>
@@ -10867,14 +13259,21 @@
               </a:defRPr>
             </a:pPr>
             <a:r>
+              <a:rPr sz="1600"/>
               <a:t>• End-to-End Audit Trail: Customer ➔ Subscription ➔ Upgrade Event ➔ Payment ➔ Mandate Token.</a:t>
             </a:r>
-            <a:br/>
-            <a:r>
+            <a:br>
+              <a:rPr sz="1600"/>
+            </a:br>
+            <a:r>
+              <a:rPr sz="1600"/>
               <a:t>• Advanced Filter Drawer: Filter by Course Plan, Payment Method (UPI / Card / NetBanking), Status (Paid / Failed), and Transaction Type (Initial / Renewal / Upgrade).</a:t>
             </a:r>
-            <a:br/>
-            <a:r>
+            <a:br>
+              <a:rPr sz="1600"/>
+            </a:br>
+            <a:r>
+              <a:rPr sz="1600"/>
               <a:t>• Real-Time Webhook Logs: Inspect Juspay webhook payloads and signature verification status.</a:t>
             </a:r>
           </a:p>
@@ -10889,7 +13288,7 @@
 </file>
 
 <file path=ppt/slides/slide28.xml><?xml version="1.0" encoding="utf-8"?>
-<p:sld xmlns:a="http://schemas.openxmlformats.org/drawingml/2006/main" xmlns:p="http://schemas.openxmlformats.org/presentationml/2006/main" xmlns:r="http://schemas.openxmlformats.org/officeDocument/2006/relationships">
+<p:sld xmlns:a="http://schemas.openxmlformats.org/drawingml/2006/main" xmlns:r="http://schemas.openxmlformats.org/officeDocument/2006/relationships" xmlns:p="http://schemas.openxmlformats.org/presentationml/2006/main">
   <p:cSld>
     <p:spTree>
       <p:nvGrpSpPr>
@@ -10897,7 +13296,14 @@
         <p:cNvGrpSpPr/>
         <p:nvPr/>
       </p:nvGrpSpPr>
-      <p:grpSpPr/>
+      <p:grpSpPr>
+        <a:xfrm>
+          <a:off x="0" y="0"/>
+          <a:ext cx="0" cy="0"/>
+          <a:chOff x="0" y="0"/>
+          <a:chExt cx="0" cy="0"/>
+        </a:xfrm>
+      </p:grpSpPr>
       <p:sp>
         <p:nvSpPr>
           <p:cNvPr id="2" name="Rectangle 1"/>
@@ -10938,6 +13344,7 @@
           <a:lstStyle/>
           <a:p>
             <a:pPr algn="ctr"/>
+            <a:endParaRPr sz="2000"/>
           </a:p>
         </p:txBody>
       </p:sp>
@@ -10950,7 +13357,7 @@
         <p:spPr>
           <a:xfrm>
             <a:off x="731520" y="365760"/>
-            <a:ext cx="10698480" cy="274320"/>
+            <a:ext cx="10698480" cy="307777"/>
           </a:xfrm>
           <a:prstGeom prst="rect">
             <a:avLst/>
@@ -10971,6 +13378,7 @@
               </a:defRPr>
             </a:pPr>
             <a:r>
+              <a:rPr sz="2000"/>
               <a:t>PRODUCT REQUIREMENTS</a:t>
             </a:r>
           </a:p>
@@ -10985,7 +13393,7 @@
         <p:spPr>
           <a:xfrm>
             <a:off x="731520" y="640080"/>
-            <a:ext cx="10698480" cy="502920"/>
+            <a:ext cx="10698480" cy="307777"/>
           </a:xfrm>
           <a:prstGeom prst="rect">
             <a:avLst/>
@@ -11006,6 +13414,7 @@
               </a:defRPr>
             </a:pPr>
             <a:r>
+              <a:rPr sz="2000"/>
               <a:t>Subscription System Requirements Specification (PRD)</a:t>
             </a:r>
           </a:p>
@@ -11041,6 +13450,7 @@
               </a:defRPr>
             </a:pPr>
             <a:r>
+              <a:rPr sz="2000"/>
               <a:t>Summary of functional requirements across User Experience, Admin Console, and Backend Systems</a:t>
             </a:r>
           </a:p>
@@ -11084,7 +13494,7 @@
           </a:fontRef>
         </p:style>
         <p:txBody>
-          <a:bodyPr rtlCol="0" anchor="ctr" lIns="228600" rIns="228600" tIns="228600"/>
+          <a:bodyPr lIns="228600" tIns="228600" rIns="228600" rtlCol="0" anchor="ctr"/>
           <a:lstStyle/>
           <a:p>
             <a:pPr algn="ctr">
@@ -11095,6 +13505,7 @@
               </a:defRPr>
             </a:pPr>
             <a:r>
+              <a:rPr sz="2000"/>
               <a:t>User Capabilities</a:t>
             </a:r>
           </a:p>
@@ -11110,30 +13521,49 @@
               </a:defRPr>
             </a:pPr>
             <a:r>
+              <a:rPr sz="2000"/>
               <a:t>• Mobile/WhatsApp OTP login</a:t>
             </a:r>
-            <a:br/>
-            <a:r>
+            <a:br>
+              <a:rPr sz="2000"/>
+            </a:br>
+            <a:r>
+              <a:rPr sz="2000"/>
               <a:t>• 3-tap pre-pay questionnaire</a:t>
             </a:r>
-            <a:br/>
-            <a:r>
+            <a:br>
+              <a:rPr sz="2000"/>
+            </a:br>
+            <a:r>
+              <a:rPr sz="2000"/>
               <a:t>• 1-click Juspay checkout</a:t>
             </a:r>
-            <a:br/>
-            <a:r>
+            <a:br>
+              <a:rPr sz="2000"/>
+            </a:br>
+            <a:r>
+              <a:rPr sz="2000"/>
               <a:t>• Post-pay progressive profile</a:t>
             </a:r>
-            <a:br/>
-            <a:r>
+            <a:br>
+              <a:rPr sz="2000"/>
+            </a:br>
+            <a:r>
+              <a:rPr sz="2000"/>
               <a:t>• Self-serve pause &amp; resume</a:t>
             </a:r>
-            <a:br/>
-            <a:r>
+            <a:br>
+              <a:rPr sz="2000"/>
+            </a:br>
+            <a:r>
+              <a:rPr sz="2000"/>
               <a:t>• 1-click plan upgrade</a:t>
             </a:r>
-            <a:br/>
-            <a:r>
+            <a:br>
+              <a:rPr sz="2000"/>
+            </a:br>
+            <a:r>
+              <a:rPr sz="2000"/>
               <a:t>• Transparent cancellation</a:t>
             </a:r>
           </a:p>
@@ -11177,7 +13607,7 @@
           </a:fontRef>
         </p:style>
         <p:txBody>
-          <a:bodyPr rtlCol="0" anchor="ctr" lIns="228600" rIns="228600" tIns="228600"/>
+          <a:bodyPr lIns="228600" tIns="228600" rIns="228600" rtlCol="0" anchor="ctr"/>
           <a:lstStyle/>
           <a:p>
             <a:pPr algn="ctr">
@@ -11188,6 +13618,7 @@
               </a:defRPr>
             </a:pPr>
             <a:r>
+              <a:rPr sz="2000"/>
               <a:t>Admin Capabilities</a:t>
             </a:r>
           </a:p>
@@ -11203,30 +13634,49 @@
               </a:defRPr>
             </a:pPr>
             <a:r>
+              <a:rPr sz="2000"/>
               <a:t>• Executive operational KPIs</a:t>
             </a:r>
-            <a:br/>
-            <a:r>
+            <a:br>
+              <a:rPr sz="2000"/>
+            </a:br>
+            <a:r>
+              <a:rPr sz="2000"/>
               <a:t>• Subscriber search &amp; drawers</a:t>
             </a:r>
-            <a:br/>
-            <a:r>
+            <a:br>
+              <a:rPr sz="2000"/>
+            </a:br>
+            <a:r>
+              <a:rPr sz="2000"/>
               <a:t>• Payment ledger traceability</a:t>
             </a:r>
-            <a:br/>
-            <a:r>
+            <a:br>
+              <a:rPr sz="2000"/>
+            </a:br>
+            <a:r>
+              <a:rPr sz="2000"/>
               <a:t>• Failed renewal retry triggers</a:t>
             </a:r>
-            <a:br/>
-            <a:r>
+            <a:br>
+              <a:rPr sz="2000"/>
+            </a:br>
+            <a:r>
+              <a:rPr sz="2000"/>
               <a:t>• Manual pause overrides</a:t>
             </a:r>
-            <a:br/>
-            <a:r>
+            <a:br>
+              <a:rPr sz="2000"/>
+            </a:br>
+            <a:r>
+              <a:rPr sz="2000"/>
               <a:t>• Refund processing hooks</a:t>
             </a:r>
-            <a:br/>
-            <a:r>
+            <a:br>
+              <a:rPr sz="2000"/>
+            </a:br>
+            <a:r>
+              <a:rPr sz="2000"/>
               <a:t>• Course batch scheduler</a:t>
             </a:r>
           </a:p>
@@ -11270,7 +13720,7 @@
           </a:fontRef>
         </p:style>
         <p:txBody>
-          <a:bodyPr rtlCol="0" anchor="ctr" lIns="228600" rIns="228600" tIns="228600"/>
+          <a:bodyPr lIns="228600" tIns="228600" rIns="228600" rtlCol="0" anchor="ctr"/>
           <a:lstStyle/>
           <a:p>
             <a:pPr algn="ctr">
@@ -11281,6 +13731,7 @@
               </a:defRPr>
             </a:pPr>
             <a:r>
+              <a:rPr sz="2000"/>
               <a:t>System Capabilities</a:t>
             </a:r>
           </a:p>
@@ -11296,30 +13747,49 @@
               </a:defRPr>
             </a:pPr>
             <a:r>
+              <a:rPr sz="2000"/>
               <a:t>• Juspay webhook handlers</a:t>
             </a:r>
-            <a:br/>
-            <a:r>
+            <a:br>
+              <a:rPr sz="2000"/>
+            </a:br>
+            <a:r>
+              <a:rPr sz="2000"/>
               <a:t>• RBI pre-debit notifications</a:t>
             </a:r>
-            <a:br/>
-            <a:r>
+            <a:br>
+              <a:rPr sz="2000"/>
+            </a:br>
+            <a:r>
+              <a:rPr sz="2000"/>
               <a:t>• Dynamic date extension math</a:t>
             </a:r>
-            <a:br/>
-            <a:r>
+            <a:br>
+              <a:rPr sz="2000"/>
+            </a:br>
+            <a:r>
+              <a:rPr sz="2000"/>
               <a:t>• Dunning retry cadence</a:t>
             </a:r>
-            <a:br/>
-            <a:r>
+            <a:br>
+              <a:rPr sz="2000"/>
+            </a:br>
+            <a:r>
+              <a:rPr sz="2000"/>
               <a:t>• WhatsApp reminder bot</a:t>
             </a:r>
-            <a:br/>
-            <a:r>
+            <a:br>
+              <a:rPr sz="2000"/>
+            </a:br>
+            <a:r>
+              <a:rPr sz="2000"/>
               <a:t>• DPDP Act data encryption</a:t>
             </a:r>
-            <a:br/>
-            <a:r>
+            <a:br>
+              <a:rPr sz="2000"/>
+            </a:br>
+            <a:r>
+              <a:rPr sz="2000"/>
               <a:t>• SSO entitlement sync</a:t>
             </a:r>
           </a:p>
@@ -11334,7 +13804,7 @@
 </file>
 
 <file path=ppt/slides/slide29.xml><?xml version="1.0" encoding="utf-8"?>
-<p:sld xmlns:a="http://schemas.openxmlformats.org/drawingml/2006/main" xmlns:p="http://schemas.openxmlformats.org/presentationml/2006/main" xmlns:r="http://schemas.openxmlformats.org/officeDocument/2006/relationships">
+<p:sld xmlns:a="http://schemas.openxmlformats.org/drawingml/2006/main" xmlns:r="http://schemas.openxmlformats.org/officeDocument/2006/relationships" xmlns:p="http://schemas.openxmlformats.org/presentationml/2006/main">
   <p:cSld>
     <p:spTree>
       <p:nvGrpSpPr>
@@ -11342,7 +13812,14 @@
         <p:cNvGrpSpPr/>
         <p:nvPr/>
       </p:nvGrpSpPr>
-      <p:grpSpPr/>
+      <p:grpSpPr>
+        <a:xfrm>
+          <a:off x="0" y="0"/>
+          <a:ext cx="0" cy="0"/>
+          <a:chOff x="0" y="0"/>
+          <a:chExt cx="0" cy="0"/>
+        </a:xfrm>
+      </p:grpSpPr>
       <p:sp>
         <p:nvSpPr>
           <p:cNvPr id="2" name="Rectangle 1"/>
@@ -11383,6 +13860,7 @@
           <a:lstStyle/>
           <a:p>
             <a:pPr algn="ctr"/>
+            <a:endParaRPr/>
           </a:p>
         </p:txBody>
       </p:sp>
@@ -11529,7 +14007,7 @@
           </a:fontRef>
         </p:style>
         <p:txBody>
-          <a:bodyPr rtlCol="0" anchor="ctr" lIns="182880" rIns="182880" tIns="182880"/>
+          <a:bodyPr lIns="182880" tIns="182880" rIns="182880" rtlCol="0" anchor="ctr"/>
           <a:lstStyle/>
           <a:p>
             <a:pPr algn="ctr">
@@ -11610,7 +14088,7 @@
           </a:fontRef>
         </p:style>
         <p:txBody>
-          <a:bodyPr rtlCol="0" anchor="ctr" lIns="182880" rIns="182880" tIns="182880"/>
+          <a:bodyPr lIns="182880" tIns="182880" rIns="182880" rtlCol="0" anchor="ctr"/>
           <a:lstStyle/>
           <a:p>
             <a:pPr algn="ctr">
@@ -11687,7 +14165,7 @@
           </a:fontRef>
         </p:style>
         <p:txBody>
-          <a:bodyPr rtlCol="0" anchor="ctr" lIns="182880" rIns="182880" tIns="182880"/>
+          <a:bodyPr lIns="182880" tIns="182880" rIns="182880" rtlCol="0" anchor="ctr"/>
           <a:lstStyle/>
           <a:p>
             <a:pPr algn="ctr">
@@ -11764,7 +14242,7 @@
           </a:fontRef>
         </p:style>
         <p:txBody>
-          <a:bodyPr rtlCol="0" anchor="ctr" lIns="182880" rIns="182880" tIns="182880"/>
+          <a:bodyPr lIns="182880" tIns="182880" rIns="182880" rtlCol="0" anchor="ctr"/>
           <a:lstStyle/>
           <a:p>
             <a:pPr algn="ctr">
@@ -11841,7 +14319,7 @@
           </a:fontRef>
         </p:style>
         <p:txBody>
-          <a:bodyPr rtlCol="0" anchor="ctr" lIns="182880" rIns="182880" tIns="182880"/>
+          <a:bodyPr lIns="182880" tIns="182880" rIns="182880" rtlCol="0" anchor="ctr"/>
           <a:lstStyle/>
           <a:p>
             <a:pPr algn="ctr">
@@ -11889,7 +14367,7 @@
 </file>
 
 <file path=ppt/slides/slide3.xml><?xml version="1.0" encoding="utf-8"?>
-<p:sld xmlns:a="http://schemas.openxmlformats.org/drawingml/2006/main" xmlns:p="http://schemas.openxmlformats.org/presentationml/2006/main" xmlns:r="http://schemas.openxmlformats.org/officeDocument/2006/relationships">
+<p:sld xmlns:a="http://schemas.openxmlformats.org/drawingml/2006/main" xmlns:r="http://schemas.openxmlformats.org/officeDocument/2006/relationships" xmlns:p="http://schemas.openxmlformats.org/presentationml/2006/main">
   <p:cSld>
     <p:spTree>
       <p:nvGrpSpPr>
@@ -11897,7 +14375,14 @@
         <p:cNvGrpSpPr/>
         <p:nvPr/>
       </p:nvGrpSpPr>
-      <p:grpSpPr/>
+      <p:grpSpPr>
+        <a:xfrm>
+          <a:off x="0" y="0"/>
+          <a:ext cx="0" cy="0"/>
+          <a:chOff x="0" y="0"/>
+          <a:chExt cx="0" cy="0"/>
+        </a:xfrm>
+      </p:grpSpPr>
       <p:sp>
         <p:nvSpPr>
           <p:cNvPr id="2" name="Rectangle 1"/>
@@ -11938,6 +14423,7 @@
           <a:lstStyle/>
           <a:p>
             <a:pPr algn="ctr"/>
+            <a:endParaRPr sz="1600"/>
           </a:p>
         </p:txBody>
       </p:sp>
@@ -11950,7 +14436,7 @@
         <p:spPr>
           <a:xfrm>
             <a:off x="731520" y="365760"/>
-            <a:ext cx="10698480" cy="274320"/>
+            <a:ext cx="10698480" cy="246221"/>
           </a:xfrm>
           <a:prstGeom prst="rect">
             <a:avLst/>
@@ -11971,6 +14457,7 @@
               </a:defRPr>
             </a:pPr>
             <a:r>
+              <a:rPr sz="1600"/>
               <a:t>PROBLEM STATEMENT</a:t>
             </a:r>
           </a:p>
@@ -11985,7 +14472,7 @@
         <p:spPr>
           <a:xfrm>
             <a:off x="731520" y="640080"/>
-            <a:ext cx="10698480" cy="502920"/>
+            <a:ext cx="10698480" cy="246221"/>
           </a:xfrm>
           <a:prstGeom prst="rect">
             <a:avLst/>
@@ -12006,6 +14493,7 @@
               </a:defRPr>
             </a:pPr>
             <a:r>
+              <a:rPr sz="1600"/>
               <a:t>The Core Business Problem: High Pre-Payment Friction Peak</a:t>
             </a:r>
           </a:p>
@@ -12020,7 +14508,7 @@
         <p:spPr>
           <a:xfrm>
             <a:off x="731520" y="1170432"/>
-            <a:ext cx="10698480" cy="320040"/>
+            <a:ext cx="10698480" cy="246221"/>
           </a:xfrm>
           <a:prstGeom prst="rect">
             <a:avLst/>
@@ -12041,6 +14529,7 @@
               </a:defRPr>
             </a:pPr>
             <a:r>
+              <a:rPr sz="1600"/>
               <a:t>Current registration form demands extensive personal data before value delivery or purchase commitment</a:t>
             </a:r>
           </a:p>
@@ -12084,7 +14573,7 @@
           </a:fontRef>
         </p:style>
         <p:txBody>
-          <a:bodyPr rtlCol="0" anchor="ctr" lIns="274320" rIns="274320" tIns="274320"/>
+          <a:bodyPr lIns="274320" tIns="274320" rIns="274320" rtlCol="0" anchor="ctr"/>
           <a:lstStyle/>
           <a:p>
             <a:pPr algn="ctr">
@@ -12095,6 +14584,7 @@
               </a:defRPr>
             </a:pPr>
             <a:r>
+              <a:rPr sz="1600"/>
               <a:t>🔴 CURRENT FRICTION-HEAVY JOURNEY</a:t>
             </a:r>
           </a:p>
@@ -12110,6 +14600,7 @@
               </a:defRPr>
             </a:pPr>
             <a:r>
+              <a:rPr sz="1600"/>
               <a:t>Landing Page -&gt; Select Plan -&gt; OTP Login -&gt; 4 Questions -&gt; 8-Field Registration Form (Name, Age, WhatsApp, PIN, City) -&gt; Payment Gateway</a:t>
             </a:r>
           </a:p>
@@ -12125,14 +14616,21 @@
               </a:defRPr>
             </a:pPr>
             <a:r>
+              <a:rPr sz="1600"/>
               <a:t>• Friction Peak: Asking for age, postal code and full personal details BEFORE payment creates 40-55% drop-off at peak purchase intent.</a:t>
             </a:r>
-            <a:br/>
-            <a:r>
+            <a:br>
+              <a:rPr sz="1600"/>
+            </a:br>
+            <a:r>
+              <a:rPr sz="1600"/>
               <a:t>• Psychological Barrier: Users question why an online yoga course requires postal address before payment.</a:t>
             </a:r>
-            <a:br/>
-            <a:r>
+            <a:br>
+              <a:rPr sz="1600"/>
+            </a:br>
+            <a:r>
+              <a:rPr sz="1600"/>
               <a:t>• Mobile Typing Fatigue: 8 manual text fields on mobile leads to cart abandonment.</a:t>
             </a:r>
           </a:p>
@@ -12176,7 +14674,7 @@
           </a:fontRef>
         </p:style>
         <p:txBody>
-          <a:bodyPr rtlCol="0" anchor="ctr" lIns="274320" rIns="274320" tIns="274320"/>
+          <a:bodyPr lIns="274320" tIns="274320" rIns="274320" rtlCol="0" anchor="ctr"/>
           <a:lstStyle/>
           <a:p>
             <a:pPr algn="ctr">
@@ -12187,6 +14685,7 @@
               </a:defRPr>
             </a:pPr>
             <a:r>
+              <a:rPr sz="1600"/>
               <a:t>🟢 RECOMMENDED CONVERSION-FIRST PRINCIPLE</a:t>
             </a:r>
           </a:p>
@@ -12202,6 +14701,7 @@
               </a:defRPr>
             </a:pPr>
             <a:r>
+              <a:rPr sz="1600"/>
               <a:t>Landing Page -&gt; Select Plan -&gt; OTP (Mobile/WhatsApp) -&gt; 3 Quick 1-Tap Questions -&gt; PAYMENT -&gt; Success -&gt; Progressive Profile Setup</a:t>
             </a:r>
           </a:p>
@@ -12217,14 +14717,21 @@
               </a:defRPr>
             </a:pPr>
             <a:r>
+              <a:rPr sz="1600"/>
               <a:t>• Value First: Move financial transaction forward while buyer intent is highest.</a:t>
             </a:r>
-            <a:br/>
-            <a:r>
+            <a:br>
+              <a:rPr sz="1600"/>
+            </a:br>
+            <a:r>
+              <a:rPr sz="1600"/>
               <a:t>• 100% Commitment: Once paid, users gladly complete profile details to join live batches.</a:t>
             </a:r>
-            <a:br/>
-            <a:r>
+            <a:br>
+              <a:rPr sz="1600"/>
+            </a:br>
+            <a:r>
+              <a:rPr sz="1600"/>
               <a:t>• Skip-for-now option: Allows immediate access to live yoga classes without blocking.</a:t>
             </a:r>
           </a:p>
@@ -12239,7 +14746,7 @@
 </file>
 
 <file path=ppt/slides/slide30.xml><?xml version="1.0" encoding="utf-8"?>
-<p:sld xmlns:a="http://schemas.openxmlformats.org/drawingml/2006/main" xmlns:p="http://schemas.openxmlformats.org/presentationml/2006/main" xmlns:r="http://schemas.openxmlformats.org/officeDocument/2006/relationships">
+<p:sld xmlns:a="http://schemas.openxmlformats.org/drawingml/2006/main" xmlns:r="http://schemas.openxmlformats.org/officeDocument/2006/relationships" xmlns:p="http://schemas.openxmlformats.org/presentationml/2006/main">
   <p:cSld>
     <p:spTree>
       <p:nvGrpSpPr>
@@ -12247,7 +14754,14 @@
         <p:cNvGrpSpPr/>
         <p:nvPr/>
       </p:nvGrpSpPr>
-      <p:grpSpPr/>
+      <p:grpSpPr>
+        <a:xfrm>
+          <a:off x="0" y="0"/>
+          <a:ext cx="0" cy="0"/>
+          <a:chOff x="0" y="0"/>
+          <a:chExt cx="0" cy="0"/>
+        </a:xfrm>
+      </p:grpSpPr>
       <p:sp>
         <p:nvSpPr>
           <p:cNvPr id="2" name="Rectangle 1"/>
@@ -12288,6 +14802,7 @@
           <a:lstStyle/>
           <a:p>
             <a:pPr algn="ctr"/>
+            <a:endParaRPr/>
           </a:p>
         </p:txBody>
       </p:sp>
@@ -12434,7 +14949,7 @@
           </a:fontRef>
         </p:style>
         <p:txBody>
-          <a:bodyPr rtlCol="0" anchor="ctr" lIns="274320" rIns="274320" tIns="274320"/>
+          <a:bodyPr lIns="274320" tIns="274320" rIns="274320" rtlCol="0" anchor="ctr"/>
           <a:lstStyle/>
           <a:p>
             <a:pPr algn="ctr">
@@ -12507,7 +15022,7 @@
           </a:fontRef>
         </p:style>
         <p:txBody>
-          <a:bodyPr rtlCol="0" anchor="ctr" lIns="274320" rIns="274320" tIns="274320"/>
+          <a:bodyPr lIns="274320" tIns="274320" rIns="274320" rtlCol="0" anchor="ctr"/>
           <a:lstStyle/>
           <a:p>
             <a:pPr algn="ctr">
@@ -12555,7 +15070,7 @@
 </file>
 
 <file path=ppt/slides/slide31.xml><?xml version="1.0" encoding="utf-8"?>
-<p:sld xmlns:a="http://schemas.openxmlformats.org/drawingml/2006/main" xmlns:p="http://schemas.openxmlformats.org/presentationml/2006/main" xmlns:r="http://schemas.openxmlformats.org/officeDocument/2006/relationships">
+<p:sld xmlns:a="http://schemas.openxmlformats.org/drawingml/2006/main" xmlns:r="http://schemas.openxmlformats.org/officeDocument/2006/relationships" xmlns:p="http://schemas.openxmlformats.org/presentationml/2006/main">
   <p:cSld>
     <p:spTree>
       <p:nvGrpSpPr>
@@ -12563,7 +15078,14 @@
         <p:cNvGrpSpPr/>
         <p:nvPr/>
       </p:nvGrpSpPr>
-      <p:grpSpPr/>
+      <p:grpSpPr>
+        <a:xfrm>
+          <a:off x="0" y="0"/>
+          <a:ext cx="0" cy="0"/>
+          <a:chOff x="0" y="0"/>
+          <a:chExt cx="0" cy="0"/>
+        </a:xfrm>
+      </p:grpSpPr>
       <p:sp>
         <p:nvSpPr>
           <p:cNvPr id="2" name="Rectangle 1"/>
@@ -12604,6 +15126,7 @@
           <a:lstStyle/>
           <a:p>
             <a:pPr algn="ctr"/>
+            <a:endParaRPr/>
           </a:p>
         </p:txBody>
       </p:sp>
@@ -12750,7 +15273,7 @@
           </a:fontRef>
         </p:style>
         <p:txBody>
-          <a:bodyPr rtlCol="0" anchor="ctr" lIns="274320" rIns="274320" tIns="274320"/>
+          <a:bodyPr lIns="274320" tIns="274320" rIns="274320" rtlCol="0" anchor="ctr"/>
           <a:lstStyle/>
           <a:p>
             <a:pPr algn="ctr">
@@ -12835,7 +15358,7 @@
           </a:fontRef>
         </p:style>
         <p:txBody>
-          <a:bodyPr rtlCol="0" anchor="ctr" lIns="274320" rIns="274320" tIns="274320"/>
+          <a:bodyPr lIns="274320" tIns="274320" rIns="274320" rtlCol="0" anchor="ctr"/>
           <a:lstStyle/>
           <a:p>
             <a:pPr algn="ctr">
@@ -12891,7 +15414,7 @@
 </file>
 
 <file path=ppt/slides/slide32.xml><?xml version="1.0" encoding="utf-8"?>
-<p:sld xmlns:a="http://schemas.openxmlformats.org/drawingml/2006/main" xmlns:p="http://schemas.openxmlformats.org/presentationml/2006/main" xmlns:r="http://schemas.openxmlformats.org/officeDocument/2006/relationships">
+<p:sld xmlns:a="http://schemas.openxmlformats.org/drawingml/2006/main" xmlns:r="http://schemas.openxmlformats.org/officeDocument/2006/relationships" xmlns:p="http://schemas.openxmlformats.org/presentationml/2006/main">
   <p:cSld>
     <p:spTree>
       <p:nvGrpSpPr>
@@ -12899,7 +15422,14 @@
         <p:cNvGrpSpPr/>
         <p:nvPr/>
       </p:nvGrpSpPr>
-      <p:grpSpPr/>
+      <p:grpSpPr>
+        <a:xfrm>
+          <a:off x="0" y="0"/>
+          <a:ext cx="0" cy="0"/>
+          <a:chOff x="0" y="0"/>
+          <a:chExt cx="0" cy="0"/>
+        </a:xfrm>
+      </p:grpSpPr>
       <p:sp>
         <p:nvSpPr>
           <p:cNvPr id="2" name="Rectangle 1"/>
@@ -12940,6 +15470,7 @@
           <a:lstStyle/>
           <a:p>
             <a:pPr algn="ctr"/>
+            <a:endParaRPr/>
           </a:p>
         </p:txBody>
       </p:sp>
@@ -12981,7 +15512,7 @@
           </a:fontRef>
         </p:style>
         <p:txBody>
-          <a:bodyPr rtlCol="0" anchor="ctr" lIns="731520" tIns="548640"/>
+          <a:bodyPr lIns="731520" tIns="548640" rtlCol="0" anchor="ctr"/>
           <a:lstStyle/>
           <a:p>
             <a:pPr algn="ctr">
@@ -13044,7 +15575,7 @@
 </file>
 
 <file path=ppt/slides/slide4.xml><?xml version="1.0" encoding="utf-8"?>
-<p:sld xmlns:a="http://schemas.openxmlformats.org/drawingml/2006/main" xmlns:p="http://schemas.openxmlformats.org/presentationml/2006/main" xmlns:r="http://schemas.openxmlformats.org/officeDocument/2006/relationships">
+<p:sld xmlns:a="http://schemas.openxmlformats.org/drawingml/2006/main" xmlns:r="http://schemas.openxmlformats.org/officeDocument/2006/relationships" xmlns:p="http://schemas.openxmlformats.org/presentationml/2006/main">
   <p:cSld>
     <p:spTree>
       <p:nvGrpSpPr>
@@ -13052,7 +15583,14 @@
         <p:cNvGrpSpPr/>
         <p:nvPr/>
       </p:nvGrpSpPr>
-      <p:grpSpPr/>
+      <p:grpSpPr>
+        <a:xfrm>
+          <a:off x="0" y="0"/>
+          <a:ext cx="0" cy="0"/>
+          <a:chOff x="0" y="0"/>
+          <a:chExt cx="0" cy="0"/>
+        </a:xfrm>
+      </p:grpSpPr>
       <p:sp>
         <p:nvSpPr>
           <p:cNvPr id="2" name="Rectangle 1"/>
@@ -13093,6 +15631,7 @@
           <a:lstStyle/>
           <a:p>
             <a:pPr algn="ctr"/>
+            <a:endParaRPr sz="1600"/>
           </a:p>
         </p:txBody>
       </p:sp>
@@ -13105,7 +15644,7 @@
         <p:spPr>
           <a:xfrm>
             <a:off x="731520" y="365760"/>
-            <a:ext cx="10698480" cy="274320"/>
+            <a:ext cx="10698480" cy="246221"/>
           </a:xfrm>
           <a:prstGeom prst="rect">
             <a:avLst/>
@@ -13126,6 +15665,7 @@
               </a:defRPr>
             </a:pPr>
             <a:r>
+              <a:rPr sz="1600"/>
               <a:t>USER FLOW ARCHITECTURE</a:t>
             </a:r>
           </a:p>
@@ -13140,7 +15680,7 @@
         <p:spPr>
           <a:xfrm>
             <a:off x="731520" y="640080"/>
-            <a:ext cx="10698480" cy="502920"/>
+            <a:ext cx="10698480" cy="246221"/>
           </a:xfrm>
           <a:prstGeom prst="rect">
             <a:avLst/>
@@ -13161,6 +15701,7 @@
               </a:defRPr>
             </a:pPr>
             <a:r>
+              <a:rPr sz="1600"/>
               <a:t>Flow A (Recommended): Payment First Journey Architecture</a:t>
             </a:r>
           </a:p>
@@ -13175,7 +15716,7 @@
         <p:spPr>
           <a:xfrm>
             <a:off x="731520" y="1170432"/>
-            <a:ext cx="10698480" cy="320040"/>
+            <a:ext cx="10698480" cy="246221"/>
           </a:xfrm>
           <a:prstGeom prst="rect">
             <a:avLst/>
@@ -13196,6 +15737,7 @@
               </a:defRPr>
             </a:pPr>
             <a:r>
+              <a:rPr sz="1600" dirty="0"/>
               <a:t>Optimal flow with minimal pre-payment survey and post-payment progressive profile setup</a:t>
             </a:r>
           </a:p>
@@ -13239,7 +15781,7 @@
           </a:fontRef>
         </p:style>
         <p:txBody>
-          <a:bodyPr rtlCol="0" anchor="ctr" lIns="182880" rIns="182880" tIns="182880"/>
+          <a:bodyPr lIns="182880" tIns="182880" rIns="182880" rtlCol="0" anchor="ctr"/>
           <a:lstStyle/>
           <a:p>
             <a:pPr algn="ctr">
@@ -13250,6 +15792,7 @@
               </a:defRPr>
             </a:pPr>
             <a:r>
+              <a:rPr sz="1600"/>
               <a:t>Step 1: Landing Page</a:t>
             </a:r>
           </a:p>
@@ -13265,6 +15808,7 @@
               </a:defRPr>
             </a:pPr>
             <a:r>
+              <a:rPr sz="1600"/>
               <a:t>Explores benefits, schedule &amp; teacher profiles. Clicks 'Try for Free' -&gt; Smooth scrolls to pricing.</a:t>
             </a:r>
           </a:p>
@@ -13308,7 +15852,7 @@
           </a:fontRef>
         </p:style>
         <p:txBody>
-          <a:bodyPr rtlCol="0" anchor="ctr" lIns="182880" rIns="182880" tIns="182880"/>
+          <a:bodyPr lIns="182880" tIns="182880" rIns="182880" rtlCol="0" anchor="ctr"/>
           <a:lstStyle/>
           <a:p>
             <a:pPr algn="ctr">
@@ -13319,6 +15863,7 @@
               </a:defRPr>
             </a:pPr>
             <a:r>
+              <a:rPr sz="1600"/>
               <a:t>Step 2: Plan Selection</a:t>
             </a:r>
           </a:p>
@@ -13334,6 +15879,7 @@
               </a:defRPr>
             </a:pPr>
             <a:r>
+              <a:rPr sz="1600"/>
               <a:t>Chooses 3M / 6M / 12M membership tier with clear per-month anchoring.</a:t>
             </a:r>
           </a:p>
@@ -13377,7 +15923,7 @@
           </a:fontRef>
         </p:style>
         <p:txBody>
-          <a:bodyPr rtlCol="0" anchor="ctr" lIns="182880" rIns="182880" tIns="182880"/>
+          <a:bodyPr lIns="182880" tIns="182880" rIns="182880" rtlCol="0" anchor="ctr"/>
           <a:lstStyle/>
           <a:p>
             <a:pPr algn="ctr">
@@ -13388,6 +15934,7 @@
               </a:defRPr>
             </a:pPr>
             <a:r>
+              <a:rPr sz="1600"/>
               <a:t>Step 3: Lightweight OTP</a:t>
             </a:r>
           </a:p>
@@ -13403,6 +15950,7 @@
               </a:defRPr>
             </a:pPr>
             <a:r>
+              <a:rPr sz="1600"/>
               <a:t>Quick 4-digit OTP via Mobile SMS or WhatsApp. Auto-populates phone number.</a:t>
             </a:r>
           </a:p>
@@ -13446,7 +15994,7 @@
           </a:fontRef>
         </p:style>
         <p:txBody>
-          <a:bodyPr rtlCol="0" anchor="ctr" lIns="182880" rIns="182880" tIns="182880"/>
+          <a:bodyPr lIns="182880" tIns="182880" rIns="182880" rtlCol="0" anchor="ctr"/>
           <a:lstStyle/>
           <a:p>
             <a:pPr algn="ctr">
@@ -13457,6 +16005,7 @@
               </a:defRPr>
             </a:pPr>
             <a:r>
+              <a:rPr sz="1600"/>
               <a:t>Step 4: 3-Question Survey</a:t>
             </a:r>
           </a:p>
@@ -13472,6 +16021,7 @@
               </a:defRPr>
             </a:pPr>
             <a:r>
+              <a:rPr sz="1600"/>
               <a:t>1-tap selection: Intent, Experience, and Desired Transformation. Takes &lt;10 seconds.</a:t>
             </a:r>
           </a:p>
@@ -13515,7 +16065,7 @@
           </a:fontRef>
         </p:style>
         <p:txBody>
-          <a:bodyPr rtlCol="0" anchor="ctr" lIns="182880" rIns="182880" tIns="182880"/>
+          <a:bodyPr lIns="182880" tIns="182880" rIns="182880" rtlCol="0" anchor="ctr"/>
           <a:lstStyle/>
           <a:p>
             <a:pPr algn="ctr">
@@ -13526,6 +16076,7 @@
               </a:defRPr>
             </a:pPr>
             <a:r>
+              <a:rPr sz="1600"/>
               <a:t>Step 5: Juspay Checkout</a:t>
             </a:r>
           </a:p>
@@ -13541,6 +16092,7 @@
               </a:defRPr>
             </a:pPr>
             <a:r>
+              <a:rPr sz="1600"/>
               <a:t>Instant payment via UPI, Cards, NetBanking or optional AutoPay mandate.</a:t>
             </a:r>
           </a:p>
@@ -13584,7 +16136,7 @@
           </a:fontRef>
         </p:style>
         <p:txBody>
-          <a:bodyPr rtlCol="0" anchor="ctr" lIns="182880" rIns="182880" tIns="182880"/>
+          <a:bodyPr lIns="182880" tIns="182880" rIns="182880" rtlCol="0" anchor="ctr"/>
           <a:lstStyle/>
           <a:p>
             <a:pPr algn="ctr">
@@ -13595,6 +16147,7 @@
               </a:defRPr>
             </a:pPr>
             <a:r>
+              <a:rPr sz="1600"/>
               <a:t>Step 6: Post-Pay Profile</a:t>
             </a:r>
           </a:p>
@@ -13610,6 +16163,7 @@
               </a:defRPr>
             </a:pPr>
             <a:r>
+              <a:rPr sz="1600"/>
               <a:t>Personalizes yoga batch, health notes, age &amp; city with 'Skip for now' option.</a:t>
             </a:r>
           </a:p>
@@ -13624,7 +16178,7 @@
 </file>
 
 <file path=ppt/slides/slide5.xml><?xml version="1.0" encoding="utf-8"?>
-<p:sld xmlns:a="http://schemas.openxmlformats.org/drawingml/2006/main" xmlns:p="http://schemas.openxmlformats.org/presentationml/2006/main" xmlns:r="http://schemas.openxmlformats.org/officeDocument/2006/relationships">
+<p:sld xmlns:a="http://schemas.openxmlformats.org/drawingml/2006/main" xmlns:r="http://schemas.openxmlformats.org/officeDocument/2006/relationships" xmlns:p="http://schemas.openxmlformats.org/presentationml/2006/main">
   <p:cSld>
     <p:spTree>
       <p:nvGrpSpPr>
@@ -13632,7 +16186,14 @@
         <p:cNvGrpSpPr/>
         <p:nvPr/>
       </p:nvGrpSpPr>
-      <p:grpSpPr/>
+      <p:grpSpPr>
+        <a:xfrm>
+          <a:off x="0" y="0"/>
+          <a:ext cx="0" cy="0"/>
+          <a:chOff x="0" y="0"/>
+          <a:chExt cx="0" cy="0"/>
+        </a:xfrm>
+      </p:grpSpPr>
       <p:sp>
         <p:nvSpPr>
           <p:cNvPr id="2" name="Rectangle 1"/>
@@ -13673,6 +16234,7 @@
           <a:lstStyle/>
           <a:p>
             <a:pPr algn="ctr"/>
+            <a:endParaRPr sz="1600"/>
           </a:p>
         </p:txBody>
       </p:sp>
@@ -13685,7 +16247,7 @@
         <p:spPr>
           <a:xfrm>
             <a:off x="731520" y="365760"/>
-            <a:ext cx="10698480" cy="274320"/>
+            <a:ext cx="10698480" cy="246221"/>
           </a:xfrm>
           <a:prstGeom prst="rect">
             <a:avLst/>
@@ -13706,6 +16268,7 @@
               </a:defRPr>
             </a:pPr>
             <a:r>
+              <a:rPr sz="1600"/>
               <a:t>SURVEY DESIGN</a:t>
             </a:r>
           </a:p>
@@ -13720,7 +16283,7 @@
         <p:spPr>
           <a:xfrm>
             <a:off x="731520" y="640080"/>
-            <a:ext cx="10698480" cy="502920"/>
+            <a:ext cx="10698480" cy="246221"/>
           </a:xfrm>
           <a:prstGeom prst="rect">
             <a:avLst/>
@@ -13741,6 +16304,7 @@
               </a:defRPr>
             </a:pPr>
             <a:r>
+              <a:rPr sz="1600"/>
               <a:t>Pre-Payment Questionnaire: 3 High-Value, Low-Friction Questions</a:t>
             </a:r>
           </a:p>
@@ -13755,7 +16319,7 @@
         <p:spPr>
           <a:xfrm>
             <a:off x="731520" y="1170432"/>
-            <a:ext cx="10698480" cy="320040"/>
+            <a:ext cx="10698480" cy="246221"/>
           </a:xfrm>
           <a:prstGeom prst="rect">
             <a:avLst/>
@@ -13776,6 +16340,7 @@
               </a:defRPr>
             </a:pPr>
             <a:r>
+              <a:rPr sz="1600"/>
               <a:t>Optimizing data collection: engaging the user without creating checkout drop-offs</a:t>
             </a:r>
           </a:p>
@@ -13819,7 +16384,7 @@
           </a:fontRef>
         </p:style>
         <p:txBody>
-          <a:bodyPr rtlCol="0" anchor="ctr" lIns="228600" rIns="228600" tIns="228600"/>
+          <a:bodyPr lIns="228600" tIns="228600" rIns="228600" rtlCol="0" anchor="ctr"/>
           <a:lstStyle/>
           <a:p>
             <a:pPr algn="ctr">
@@ -13830,6 +16395,7 @@
               </a:defRPr>
             </a:pPr>
             <a:r>
+              <a:rPr sz="1600"/>
               <a:t>Question 1: User Intent</a:t>
             </a:r>
           </a:p>
@@ -13845,6 +16411,7 @@
               </a:defRPr>
             </a:pPr>
             <a:r>
+              <a:rPr sz="1600"/>
               <a:t>"What brings you to Sri Sri Yoga?"</a:t>
             </a:r>
           </a:p>
@@ -13860,26 +16427,42 @@
               </a:defRPr>
             </a:pPr>
             <a:r>
+              <a:rPr sz="1600"/>
               <a:t>• Improve flexibility &amp; mobility</a:t>
             </a:r>
-            <a:br/>
-            <a:r>
+            <a:br>
+              <a:rPr sz="1600"/>
+            </a:br>
+            <a:r>
+              <a:rPr sz="1600"/>
               <a:t>• Build strength &amp; stamina</a:t>
             </a:r>
-            <a:br/>
-            <a:r>
+            <a:br>
+              <a:rPr sz="1600"/>
+            </a:br>
+            <a:r>
+              <a:rPr sz="1600"/>
               <a:t>• Relieve stress &amp; anxiety</a:t>
             </a:r>
-            <a:br/>
-            <a:r>
+            <a:br>
+              <a:rPr sz="1600"/>
+            </a:br>
+            <a:r>
+              <a:rPr sz="1600"/>
               <a:t>• Weight management</a:t>
             </a:r>
-            <a:br/>
-            <a:r>
+            <a:br>
+              <a:rPr sz="1600"/>
+            </a:br>
+            <a:r>
+              <a:rPr sz="1600"/>
               <a:t>• Relieve chronic body pain</a:t>
             </a:r>
-            <a:br/>
-            <a:r>
+            <a:br>
+              <a:rPr sz="1600"/>
+            </a:br>
+            <a:r>
+              <a:rPr sz="1600"/>
               <a:t>• Mindfulness &amp; meditation</a:t>
             </a:r>
           </a:p>
@@ -13923,7 +16506,7 @@
           </a:fontRef>
         </p:style>
         <p:txBody>
-          <a:bodyPr rtlCol="0" anchor="ctr" lIns="228600" rIns="228600" tIns="228600"/>
+          <a:bodyPr lIns="228600" tIns="228600" rIns="228600" rtlCol="0" anchor="ctr"/>
           <a:lstStyle/>
           <a:p>
             <a:pPr algn="ctr">
@@ -13934,6 +16517,7 @@
               </a:defRPr>
             </a:pPr>
             <a:r>
+              <a:rPr sz="1600"/>
               <a:t>Question 2: Starting Level</a:t>
             </a:r>
           </a:p>
@@ -13949,6 +16533,7 @@
               </a:defRPr>
             </a:pPr>
             <a:r>
+              <a:rPr sz="1600"/>
               <a:t>"What is your yoga experience?"</a:t>
             </a:r>
           </a:p>
@@ -13964,18 +16549,28 @@
               </a:defRPr>
             </a:pPr>
             <a:r>
+              <a:rPr sz="1600"/>
               <a:t>• Complete Beginner (Never practiced)</a:t>
             </a:r>
-            <a:br/>
-            <a:r>
+            <a:br>
+              <a:rPr sz="1600"/>
+            </a:br>
+            <a:r>
+              <a:rPr sz="1600"/>
               <a:t>• Some Experience (Occasional practice)</a:t>
             </a:r>
-            <a:br/>
-            <a:r>
+            <a:br>
+              <a:rPr sz="1600"/>
+            </a:br>
+            <a:r>
+              <a:rPr sz="1600"/>
               <a:t>• Regular Practitioner (1-2x per week)</a:t>
             </a:r>
-            <a:br/>
-            <a:r>
+            <a:br>
+              <a:rPr sz="1600"/>
+            </a:br>
+            <a:r>
+              <a:rPr sz="1600"/>
               <a:t>• Advanced Yogi (Daily practitioner)</a:t>
             </a:r>
           </a:p>
@@ -14019,7 +16614,7 @@
           </a:fontRef>
         </p:style>
         <p:txBody>
-          <a:bodyPr rtlCol="0" anchor="ctr" lIns="228600" rIns="228600" tIns="228600"/>
+          <a:bodyPr lIns="228600" tIns="228600" rIns="228600" rtlCol="0" anchor="ctr"/>
           <a:lstStyle/>
           <a:p>
             <a:pPr algn="ctr">
@@ -14030,6 +16625,7 @@
               </a:defRPr>
             </a:pPr>
             <a:r>
+              <a:rPr sz="1600"/>
               <a:t>Question 3: Desired Goal (NEW)</a:t>
             </a:r>
           </a:p>
@@ -14045,6 +16641,7 @@
               </a:defRPr>
             </a:pPr>
             <a:r>
+              <a:rPr sz="1600"/>
               <a:t>"What is your primary wellness goal?"</a:t>
             </a:r>
           </a:p>
@@ -14060,18 +16657,28 @@
               </a:defRPr>
             </a:pPr>
             <a:r>
+              <a:rPr sz="1600"/>
               <a:t>• Establishing a daily healthy habit</a:t>
             </a:r>
-            <a:br/>
-            <a:r>
+            <a:br>
+              <a:rPr sz="1600"/>
+            </a:br>
+            <a:r>
+              <a:rPr sz="1600"/>
               <a:t>• Higher daily energy &amp; vitality</a:t>
             </a:r>
-            <a:br/>
-            <a:r>
+            <a:br>
+              <a:rPr sz="1600"/>
+            </a:br>
+            <a:r>
+              <a:rPr sz="1600"/>
               <a:t>• Better sleep quality &amp; mental calm</a:t>
             </a:r>
-            <a:br/>
-            <a:r>
+            <a:br>
+              <a:rPr sz="1600"/>
+            </a:br>
+            <a:r>
+              <a:rPr sz="1600"/>
               <a:t>• Guided posture &amp; breathing mastery</a:t>
             </a:r>
           </a:p>
@@ -14115,7 +16722,7 @@
           </a:fontRef>
         </p:style>
         <p:txBody>
-          <a:bodyPr rtlCol="0" anchor="ctr" lIns="274320" tIns="137160"/>
+          <a:bodyPr lIns="274320" tIns="137160" rtlCol="0" anchor="ctr"/>
           <a:lstStyle/>
           <a:p>
             <a:pPr algn="ctr">
@@ -14126,6 +16733,7 @@
               </a:defRPr>
             </a:pPr>
             <a:r>
+              <a:rPr sz="1600"/>
               <a:t>⚠️ REMOVED QUESTION: 'How much time can you dedicate to yoga each day?'</a:t>
             </a:r>
           </a:p>
@@ -14141,6 +16749,7 @@
               </a:defRPr>
             </a:pPr>
             <a:r>
+              <a:rPr sz="1600"/>
               <a:t>Rationale: Sri Sri Yoga sessions run on fixed live schedule slots (6:00 AM, 7:30 AM, 5:30 PM, 6:30 PM). Asking time dedication is non-actionable and creates unnecessary cognitive friction.</a:t>
             </a:r>
           </a:p>
@@ -14155,7 +16764,7 @@
 </file>
 
 <file path=ppt/slides/slide6.xml><?xml version="1.0" encoding="utf-8"?>
-<p:sld xmlns:a="http://schemas.openxmlformats.org/drawingml/2006/main" xmlns:p="http://schemas.openxmlformats.org/presentationml/2006/main" xmlns:r="http://schemas.openxmlformats.org/officeDocument/2006/relationships">
+<p:sld xmlns:a="http://schemas.openxmlformats.org/drawingml/2006/main" xmlns:r="http://schemas.openxmlformats.org/officeDocument/2006/relationships" xmlns:p="http://schemas.openxmlformats.org/presentationml/2006/main">
   <p:cSld>
     <p:spTree>
       <p:nvGrpSpPr>
@@ -14163,7 +16772,14 @@
         <p:cNvGrpSpPr/>
         <p:nvPr/>
       </p:nvGrpSpPr>
-      <p:grpSpPr/>
+      <p:grpSpPr>
+        <a:xfrm>
+          <a:off x="0" y="0"/>
+          <a:ext cx="0" cy="0"/>
+          <a:chOff x="0" y="0"/>
+          <a:chExt cx="0" cy="0"/>
+        </a:xfrm>
+      </p:grpSpPr>
       <p:sp>
         <p:nvSpPr>
           <p:cNvPr id="2" name="Rectangle 1"/>
@@ -14204,6 +16820,7 @@
           <a:lstStyle/>
           <a:p>
             <a:pPr algn="ctr"/>
+            <a:endParaRPr sz="1600"/>
           </a:p>
         </p:txBody>
       </p:sp>
@@ -14216,7 +16833,7 @@
         <p:spPr>
           <a:xfrm>
             <a:off x="731520" y="365760"/>
-            <a:ext cx="10698480" cy="274320"/>
+            <a:ext cx="10698480" cy="246221"/>
           </a:xfrm>
           <a:prstGeom prst="rect">
             <a:avLst/>
@@ -14237,6 +16854,7 @@
               </a:defRPr>
             </a:pPr>
             <a:r>
+              <a:rPr sz="1600"/>
               <a:t>ALTERNATE FLOW</a:t>
             </a:r>
           </a:p>
@@ -14251,7 +16869,7 @@
         <p:spPr>
           <a:xfrm>
             <a:off x="731520" y="640080"/>
-            <a:ext cx="10698480" cy="502920"/>
+            <a:ext cx="10698480" cy="246221"/>
           </a:xfrm>
           <a:prstGeom prst="rect">
             <a:avLst/>
@@ -14272,6 +16890,7 @@
               </a:defRPr>
             </a:pPr>
             <a:r>
+              <a:rPr sz="1600"/>
               <a:t>Flow B (Alternate): Minimal Details Collected Pre-Payment</a:t>
             </a:r>
           </a:p>
@@ -14286,7 +16905,7 @@
         <p:spPr>
           <a:xfrm>
             <a:off x="731520" y="1170432"/>
-            <a:ext cx="10698480" cy="320040"/>
+            <a:ext cx="10698480" cy="246221"/>
           </a:xfrm>
           <a:prstGeom prst="rect">
             <a:avLst/>
@@ -14307,6 +16926,7 @@
               </a:defRPr>
             </a:pPr>
             <a:r>
+              <a:rPr sz="1600"/>
               <a:t>Evaluating a flow where only basic name and WhatsApp are captured prior to payment gateway</a:t>
             </a:r>
           </a:p>
@@ -14350,7 +16970,7 @@
           </a:fontRef>
         </p:style>
         <p:txBody>
-          <a:bodyPr rtlCol="0" anchor="ctr" lIns="274320" rIns="274320" tIns="274320"/>
+          <a:bodyPr lIns="274320" tIns="274320" rIns="274320" rtlCol="0" anchor="ctr"/>
           <a:lstStyle/>
           <a:p>
             <a:pPr algn="ctr">
@@ -14361,6 +16981,7 @@
               </a:defRPr>
             </a:pPr>
             <a:r>
+              <a:rPr sz="1600"/>
               <a:t>FLOW B ARCHITECTURE:</a:t>
             </a:r>
           </a:p>
@@ -14376,30 +16997,49 @@
               </a:defRPr>
             </a:pPr>
             <a:r>
+              <a:rPr sz="1600"/>
               <a:t>1. Landing Page -&gt; Select Plan</a:t>
             </a:r>
-            <a:br/>
-            <a:r>
+            <a:br>
+              <a:rPr sz="1600"/>
+            </a:br>
+            <a:r>
+              <a:rPr sz="1600"/>
               <a:t>2. OTP Authentication (Mobile)</a:t>
             </a:r>
-            <a:br/>
-            <a:r>
+            <a:br>
+              <a:rPr sz="1600"/>
+            </a:br>
+            <a:r>
+              <a:rPr sz="1600"/>
               <a:t>3. 2 Quick Survey Questions</a:t>
             </a:r>
-            <a:br/>
-            <a:r>
+            <a:br>
+              <a:rPr sz="1600"/>
+            </a:br>
+            <a:r>
+              <a:rPr sz="1600"/>
               <a:t>4. Minimal Pre-Pay Form (Full Name &amp; Email only)</a:t>
             </a:r>
-            <a:br/>
-            <a:r>
+            <a:br>
+              <a:rPr sz="1600"/>
+            </a:br>
+            <a:r>
+              <a:rPr sz="1600"/>
               <a:t>5. Juspay Payment Gateway</a:t>
             </a:r>
-            <a:br/>
-            <a:r>
+            <a:br>
+              <a:rPr sz="1600"/>
+            </a:br>
+            <a:r>
+              <a:rPr sz="1600"/>
               <a:t>6. Subscription Activation</a:t>
             </a:r>
-            <a:br/>
-            <a:r>
+            <a:br>
+              <a:rPr sz="1600"/>
+            </a:br>
+            <a:r>
+              <a:rPr sz="1600"/>
               <a:t>7. Post-Payment: Remaining Health &amp; Address Profile</a:t>
             </a:r>
           </a:p>
@@ -14415,10 +17055,14 @@
               </a:defRPr>
             </a:pPr>
             <a:r>
+              <a:rPr sz="1600"/>
               <a:t>• Intended Benefit: Captures lead name for abandoned cart remarketing.</a:t>
             </a:r>
-            <a:br/>
-            <a:r>
+            <a:br>
+              <a:rPr sz="1600"/>
+            </a:br>
+            <a:r>
+              <a:rPr sz="1600"/>
               <a:t>• Operational Cost: Adds 1 additional step before payment compared to Flow A.</a:t>
             </a:r>
           </a:p>
@@ -14462,7 +17106,7 @@
           </a:fontRef>
         </p:style>
         <p:txBody>
-          <a:bodyPr rtlCol="0" anchor="ctr" lIns="274320" rIns="274320" tIns="274320"/>
+          <a:bodyPr lIns="274320" tIns="274320" rIns="274320" rtlCol="0" anchor="ctr"/>
           <a:lstStyle/>
           <a:p>
             <a:pPr algn="ctr">
@@ -14473,6 +17117,7 @@
               </a:defRPr>
             </a:pPr>
             <a:r>
+              <a:rPr sz="1600"/>
               <a:t>WHEN IS FLOW B VIABLE?</a:t>
             </a:r>
           </a:p>
@@ -14488,14 +17133,21 @@
               </a:defRPr>
             </a:pPr>
             <a:r>
+              <a:rPr sz="1600"/>
               <a:t>• Abandoned Cart Recovery: If marketing relies heavily on WhatsApp outreach for users who drop off at checkout.</a:t>
             </a:r>
-            <a:br/>
-            <a:r>
+            <a:br>
+              <a:rPr sz="1600"/>
+            </a:br>
+            <a:r>
+              <a:rPr sz="1600"/>
               <a:t>• Tax Invoice Legalities: If instant GST invoice generation requires full legal name upfront.</a:t>
             </a:r>
-            <a:br/>
-            <a:r>
+            <a:br>
+              <a:rPr sz="1600"/>
+            </a:br>
+            <a:r>
+              <a:rPr sz="1600"/>
               <a:t>• A/B Testing Recommendation: Launch Flow A as 80% primary traffic, run Flow B as 20% challenger to validate whether pre-payment name collection reduces overall payment conversion.</a:t>
             </a:r>
           </a:p>
@@ -14510,7 +17162,7 @@
 </file>
 
 <file path=ppt/slides/slide7.xml><?xml version="1.0" encoding="utf-8"?>
-<p:sld xmlns:a="http://schemas.openxmlformats.org/drawingml/2006/main" xmlns:p="http://schemas.openxmlformats.org/presentationml/2006/main" xmlns:r="http://schemas.openxmlformats.org/officeDocument/2006/relationships">
+<p:sld xmlns:a="http://schemas.openxmlformats.org/drawingml/2006/main" xmlns:r="http://schemas.openxmlformats.org/officeDocument/2006/relationships" xmlns:p="http://schemas.openxmlformats.org/presentationml/2006/main">
   <p:cSld>
     <p:spTree>
       <p:nvGrpSpPr>
@@ -14518,7 +17170,14 @@
         <p:cNvGrpSpPr/>
         <p:nvPr/>
       </p:nvGrpSpPr>
-      <p:grpSpPr/>
+      <p:grpSpPr>
+        <a:xfrm>
+          <a:off x="0" y="0"/>
+          <a:ext cx="0" cy="0"/>
+          <a:chOff x="0" y="0"/>
+          <a:chExt cx="0" cy="0"/>
+        </a:xfrm>
+      </p:grpSpPr>
       <p:sp>
         <p:nvSpPr>
           <p:cNvPr id="2" name="Rectangle 1"/>
@@ -14559,6 +17218,7 @@
           <a:lstStyle/>
           <a:p>
             <a:pPr algn="ctr"/>
+            <a:endParaRPr sz="1600" dirty="0"/>
           </a:p>
         </p:txBody>
       </p:sp>
@@ -14571,7 +17231,7 @@
         <p:spPr>
           <a:xfrm>
             <a:off x="731520" y="365760"/>
-            <a:ext cx="10698480" cy="274320"/>
+            <a:ext cx="10698480" cy="246221"/>
           </a:xfrm>
           <a:prstGeom prst="rect">
             <a:avLst/>
@@ -14592,6 +17252,7 @@
               </a:defRPr>
             </a:pPr>
             <a:r>
+              <a:rPr sz="1600"/>
               <a:t>COMPARATIVE EVALUATION</a:t>
             </a:r>
           </a:p>
@@ -14606,7 +17267,7 @@
         <p:spPr>
           <a:xfrm>
             <a:off x="731520" y="640080"/>
-            <a:ext cx="10698480" cy="502920"/>
+            <a:ext cx="10698480" cy="246221"/>
           </a:xfrm>
           <a:prstGeom prst="rect">
             <a:avLst/>
@@ -14627,6 +17288,7 @@
               </a:defRPr>
             </a:pPr>
             <a:r>
+              <a:rPr sz="1600" dirty="0"/>
               <a:t>Side-by-Side Comparison: Flow A (Pay First) vs Flow B (Minimal Pre-Pay)</a:t>
             </a:r>
           </a:p>
@@ -14641,7 +17303,7 @@
         <p:spPr>
           <a:xfrm>
             <a:off x="731520" y="1170432"/>
-            <a:ext cx="10698480" cy="320040"/>
+            <a:ext cx="10698480" cy="246221"/>
           </a:xfrm>
           <a:prstGeom prst="rect">
             <a:avLst/>
@@ -14662,6 +17324,7 @@
               </a:defRPr>
             </a:pPr>
             <a:r>
+              <a:rPr sz="1600"/>
               <a:t>Direct trade-off analysis across conversion, user friction, CRM integration and legal considerations</a:t>
             </a:r>
           </a:p>
@@ -14673,7 +17336,13 @@
           <p:cNvGraphicFramePr>
             <a:graphicFrameLocks noGrp="1"/>
           </p:cNvGraphicFramePr>
-          <p:nvPr/>
+          <p:nvPr>
+            <p:extLst>
+              <p:ext uri="{D42A27DB-BD31-4B8C-83A1-F6EECF244321}">
+                <p14:modId xmlns:p14="http://schemas.microsoft.com/office/powerpoint/2010/main" val="1458326102"/>
+              </p:ext>
+            </p:extLst>
+          </p:nvPr>
         </p:nvGraphicFramePr>
         <p:xfrm>
           <a:off x="731520" y="1600200"/>
@@ -14686,9 +17355,27 @@
                 <a:tableStyleId>{5C22544A-7EE6-4342-B048-85BDC9FD1C3A}</a:tableStyleId>
               </a:tblPr>
               <a:tblGrid>
-                <a:gridCol w="2499055"/>
-                <a:gridCol w="4114800"/>
-                <a:gridCol w="4114800"/>
+                <a:gridCol w="2499055">
+                  <a:extLst>
+                    <a:ext uri="{9D8B030D-6E8A-4147-A177-3AD203B41FA5}">
+                      <a16:colId xmlns:a16="http://schemas.microsoft.com/office/drawing/2014/main" val="20000"/>
+                    </a:ext>
+                  </a:extLst>
+                </a:gridCol>
+                <a:gridCol w="4114800">
+                  <a:extLst>
+                    <a:ext uri="{9D8B030D-6E8A-4147-A177-3AD203B41FA5}">
+                      <a16:colId xmlns:a16="http://schemas.microsoft.com/office/drawing/2014/main" val="20001"/>
+                    </a:ext>
+                  </a:extLst>
+                </a:gridCol>
+                <a:gridCol w="4114800">
+                  <a:extLst>
+                    <a:ext uri="{9D8B030D-6E8A-4147-A177-3AD203B41FA5}">
+                      <a16:colId xmlns:a16="http://schemas.microsoft.com/office/drawing/2014/main" val="20002"/>
+                    </a:ext>
+                  </a:extLst>
+                </a:gridCol>
               </a:tblGrid>
               <a:tr h="640080">
                 <a:tc>
@@ -14760,6 +17447,11 @@
                     </a:solidFill>
                   </a:tcPr>
                 </a:tc>
+                <a:extLst>
+                  <a:ext uri="{0D108BD9-81ED-4DB2-BD59-A6C34878D82A}">
+                    <a16:rowId xmlns:a16="http://schemas.microsoft.com/office/drawing/2014/main" val="10000"/>
+                  </a:ext>
+                </a:extLst>
               </a:tr>
               <a:tr h="640080">
                 <a:tc>
@@ -14775,6 +17467,7 @@
                         </a:defRPr>
                       </a:pPr>
                       <a:r>
+                        <a:rPr sz="1600"/>
                         <a:t>Checkout Conversion Rate</a:t>
                       </a:r>
                     </a:p>
@@ -14798,6 +17491,7 @@
                         </a:defRPr>
                       </a:pPr>
                       <a:r>
+                        <a:rPr sz="1600"/>
                         <a:t>Highest (Estimated +25% to +40% uplift)</a:t>
                       </a:r>
                     </a:p>
@@ -14821,6 +17515,7 @@
                         </a:defRPr>
                       </a:pPr>
                       <a:r>
+                        <a:rPr sz="1600"/>
                         <a:t>Moderate (+10% to +15% uplift vs current)</a:t>
                       </a:r>
                     </a:p>
@@ -14831,6 +17526,11 @@
                     </a:solidFill>
                   </a:tcPr>
                 </a:tc>
+                <a:extLst>
+                  <a:ext uri="{0D108BD9-81ED-4DB2-BD59-A6C34878D82A}">
+                    <a16:rowId xmlns:a16="http://schemas.microsoft.com/office/drawing/2014/main" val="10001"/>
+                  </a:ext>
+                </a:extLst>
               </a:tr>
               <a:tr h="640080">
                 <a:tc>
@@ -14846,6 +17546,7 @@
                         </a:defRPr>
                       </a:pPr>
                       <a:r>
+                        <a:rPr sz="1600"/>
                         <a:t>Pre-Payment Time to Checkout</a:t>
                       </a:r>
                     </a:p>
@@ -14869,6 +17570,7 @@
                         </a:defRPr>
                       </a:pPr>
                       <a:r>
+                        <a:rPr sz="1600"/>
                         <a:t>&lt; 30 seconds total</a:t>
                       </a:r>
                     </a:p>
@@ -14892,6 +17594,7 @@
                         </a:defRPr>
                       </a:pPr>
                       <a:r>
+                        <a:rPr sz="1600" dirty="0"/>
                         <a:t>45 - 60 seconds</a:t>
                       </a:r>
                     </a:p>
@@ -14902,6 +17605,11 @@
                     </a:solidFill>
                   </a:tcPr>
                 </a:tc>
+                <a:extLst>
+                  <a:ext uri="{0D108BD9-81ED-4DB2-BD59-A6C34878D82A}">
+                    <a16:rowId xmlns:a16="http://schemas.microsoft.com/office/drawing/2014/main" val="10002"/>
+                  </a:ext>
+                </a:extLst>
               </a:tr>
               <a:tr h="640080">
                 <a:tc>
@@ -14917,6 +17625,7 @@
                         </a:defRPr>
                       </a:pPr>
                       <a:r>
+                        <a:rPr sz="1600"/>
                         <a:t>Pre-Payment Friction</a:t>
                       </a:r>
                     </a:p>
@@ -14940,6 +17649,7 @@
                         </a:defRPr>
                       </a:pPr>
                       <a:r>
+                        <a:rPr sz="1600"/>
                         <a:t>Minimal (OTP + 3 one-tap taps)</a:t>
                       </a:r>
                     </a:p>
@@ -14963,6 +17673,7 @@
                         </a:defRPr>
                       </a:pPr>
                       <a:r>
+                        <a:rPr sz="1600"/>
                         <a:t>Medium (typing Name &amp; Email on mobile)</a:t>
                       </a:r>
                     </a:p>
@@ -14973,6 +17684,11 @@
                     </a:solidFill>
                   </a:tcPr>
                 </a:tc>
+                <a:extLst>
+                  <a:ext uri="{0D108BD9-81ED-4DB2-BD59-A6C34878D82A}">
+                    <a16:rowId xmlns:a16="http://schemas.microsoft.com/office/drawing/2014/main" val="10003"/>
+                  </a:ext>
+                </a:extLst>
               </a:tr>
               <a:tr h="640080">
                 <a:tc>
@@ -14988,6 +17704,7 @@
                         </a:defRPr>
                       </a:pPr>
                       <a:r>
+                        <a:rPr sz="1600"/>
                         <a:t>CRM Lead Capture for Drop-offs</a:t>
                       </a:r>
                     </a:p>
@@ -15011,6 +17728,7 @@
                         </a:defRPr>
                       </a:pPr>
                       <a:r>
+                        <a:rPr sz="1600"/>
                         <a:t>Captured via Mobile OTP (Phone number captured)</a:t>
                       </a:r>
                     </a:p>
@@ -15034,6 +17752,7 @@
                         </a:defRPr>
                       </a:pPr>
                       <a:r>
+                        <a:rPr sz="1600"/>
                         <a:t>Captured via Name + Phone + Email</a:t>
                       </a:r>
                     </a:p>
@@ -15044,6 +17763,11 @@
                     </a:solidFill>
                   </a:tcPr>
                 </a:tc>
+                <a:extLst>
+                  <a:ext uri="{0D108BD9-81ED-4DB2-BD59-A6C34878D82A}">
+                    <a16:rowId xmlns:a16="http://schemas.microsoft.com/office/drawing/2014/main" val="10004"/>
+                  </a:ext>
+                </a:extLst>
               </a:tr>
               <a:tr h="640080">
                 <a:tc>
@@ -15059,6 +17783,7 @@
                         </a:defRPr>
                       </a:pPr>
                       <a:r>
+                        <a:rPr sz="1600"/>
                         <a:t>Post-Payment Profile Completion</a:t>
                       </a:r>
                     </a:p>
@@ -15082,6 +17807,7 @@
                         </a:defRPr>
                       </a:pPr>
                       <a:r>
+                        <a:rPr sz="1600"/>
                         <a:t>85-92% expected completion (motivated post-pay)</a:t>
                       </a:r>
                     </a:p>
@@ -15105,6 +17831,7 @@
                         </a:defRPr>
                       </a:pPr>
                       <a:r>
+                        <a:rPr sz="1600"/>
                         <a:t>90-95% expected completion</a:t>
                       </a:r>
                     </a:p>
@@ -15115,6 +17842,11 @@
                     </a:solidFill>
                   </a:tcPr>
                 </a:tc>
+                <a:extLst>
+                  <a:ext uri="{0D108BD9-81ED-4DB2-BD59-A6C34878D82A}">
+                    <a16:rowId xmlns:a16="http://schemas.microsoft.com/office/drawing/2014/main" val="10005"/>
+                  </a:ext>
+                </a:extLst>
               </a:tr>
               <a:tr h="640080">
                 <a:tc>
@@ -15130,6 +17862,7 @@
                         </a:defRPr>
                       </a:pPr>
                       <a:r>
+                        <a:rPr sz="1600"/>
                         <a:t>Final Strategic Recommendation</a:t>
                       </a:r>
                     </a:p>
@@ -15153,6 +17886,7 @@
                         </a:defRPr>
                       </a:pPr>
                       <a:r>
+                        <a:rPr sz="1600"/>
                         <a:t>Adopt Flow A as Primary Default</a:t>
                       </a:r>
                     </a:p>
@@ -15176,6 +17910,7 @@
                         </a:defRPr>
                       </a:pPr>
                       <a:r>
+                        <a:rPr sz="1600" dirty="0"/>
                         <a:t>Reserve as A/B Testing Variant</a:t>
                       </a:r>
                     </a:p>
@@ -15186,6 +17921,11 @@
                     </a:solidFill>
                   </a:tcPr>
                 </a:tc>
+                <a:extLst>
+                  <a:ext uri="{0D108BD9-81ED-4DB2-BD59-A6C34878D82A}">
+                    <a16:rowId xmlns:a16="http://schemas.microsoft.com/office/drawing/2014/main" val="10006"/>
+                  </a:ext>
+                </a:extLst>
               </a:tr>
             </a:tbl>
           </a:graphicData>
@@ -15200,7 +17940,7 @@
 </file>
 
 <file path=ppt/slides/slide8.xml><?xml version="1.0" encoding="utf-8"?>
-<p:sld xmlns:a="http://schemas.openxmlformats.org/drawingml/2006/main" xmlns:p="http://schemas.openxmlformats.org/presentationml/2006/main" xmlns:r="http://schemas.openxmlformats.org/officeDocument/2006/relationships">
+<p:sld xmlns:a="http://schemas.openxmlformats.org/drawingml/2006/main" xmlns:r="http://schemas.openxmlformats.org/officeDocument/2006/relationships" xmlns:p="http://schemas.openxmlformats.org/presentationml/2006/main">
   <p:cSld>
     <p:spTree>
       <p:nvGrpSpPr>
@@ -15208,7 +17948,14 @@
         <p:cNvGrpSpPr/>
         <p:nvPr/>
       </p:nvGrpSpPr>
-      <p:grpSpPr/>
+      <p:grpSpPr>
+        <a:xfrm>
+          <a:off x="0" y="0"/>
+          <a:ext cx="0" cy="0"/>
+          <a:chOff x="0" y="0"/>
+          <a:chExt cx="0" cy="0"/>
+        </a:xfrm>
+      </p:grpSpPr>
       <p:sp>
         <p:nvSpPr>
           <p:cNvPr id="2" name="Rectangle 1"/>
@@ -15249,6 +17996,7 @@
           <a:lstStyle/>
           <a:p>
             <a:pPr algn="ctr"/>
+            <a:endParaRPr sz="1600"/>
           </a:p>
         </p:txBody>
       </p:sp>
@@ -15261,7 +18009,7 @@
         <p:spPr>
           <a:xfrm>
             <a:off x="731520" y="365760"/>
-            <a:ext cx="10698480" cy="274320"/>
+            <a:ext cx="10698480" cy="246221"/>
           </a:xfrm>
           <a:prstGeom prst="rect">
             <a:avLst/>
@@ -15282,6 +18030,7 @@
               </a:defRPr>
             </a:pPr>
             <a:r>
+              <a:rPr sz="1600"/>
               <a:t>TRANSFORMATION</a:t>
             </a:r>
           </a:p>
@@ -15296,7 +18045,7 @@
         <p:spPr>
           <a:xfrm>
             <a:off x="731520" y="640080"/>
-            <a:ext cx="10698480" cy="502920"/>
+            <a:ext cx="10698480" cy="246221"/>
           </a:xfrm>
           <a:prstGeom prst="rect">
             <a:avLst/>
@@ -15317,6 +18066,7 @@
               </a:defRPr>
             </a:pPr>
             <a:r>
+              <a:rPr sz="1600"/>
               <a:t>Before vs After: Journey Streamlining &amp; Friction Elimination</a:t>
             </a:r>
           </a:p>
@@ -15331,7 +18081,7 @@
         <p:spPr>
           <a:xfrm>
             <a:off x="731520" y="1170432"/>
-            <a:ext cx="10698480" cy="320040"/>
+            <a:ext cx="10698480" cy="246221"/>
           </a:xfrm>
           <a:prstGeom prst="rect">
             <a:avLst/>
@@ -15352,6 +18102,7 @@
               </a:defRPr>
             </a:pPr>
             <a:r>
+              <a:rPr sz="1600"/>
               <a:t>Visual comparison of current high-friction user journey vs recommended frictionless flow</a:t>
             </a:r>
           </a:p>
@@ -15395,7 +18146,7 @@
           </a:fontRef>
         </p:style>
         <p:txBody>
-          <a:bodyPr rtlCol="0" anchor="ctr" lIns="274320" rIns="274320" tIns="274320"/>
+          <a:bodyPr lIns="274320" tIns="274320" rIns="274320" rtlCol="0" anchor="ctr"/>
           <a:lstStyle/>
           <a:p>
             <a:pPr algn="ctr">
@@ -15406,6 +18157,7 @@
               </a:defRPr>
             </a:pPr>
             <a:r>
+              <a:rPr sz="1600"/>
               <a:t>❌ CURRENT FLOW (BEFORE): 8 STEPS</a:t>
             </a:r>
           </a:p>
@@ -15421,6 +18173,7 @@
               </a:defRPr>
             </a:pPr>
             <a:r>
+              <a:rPr sz="1600"/>
               <a:t>1. Landing Page -&gt; 2. Select Plan -&gt; 3. OTP Login -&gt; 4. Intent Question -&gt; 5. Experience Question -&gt; 6. Time Dedication Question -&gt; 7. HEAVY 8-FIELD REGISTRATION FORM (First/Last Name, Email, WhatsApp, Age, PIN, City) -&gt; 8. Payment Gateway</a:t>
             </a:r>
           </a:p>
@@ -15436,6 +18189,7 @@
               </a:defRPr>
             </a:pPr>
             <a:r>
+              <a:rPr sz="1600"/>
               <a:t>💥 Result: Major drop-off at Step 7. User leaves before completing payment.</a:t>
             </a:r>
           </a:p>
@@ -15479,7 +18233,7 @@
           </a:fontRef>
         </p:style>
         <p:txBody>
-          <a:bodyPr rtlCol="0" anchor="ctr" lIns="274320" rIns="274320" tIns="274320"/>
+          <a:bodyPr lIns="274320" tIns="274320" rIns="274320" rtlCol="0" anchor="ctr"/>
           <a:lstStyle/>
           <a:p>
             <a:pPr algn="ctr">
@@ -15490,6 +18244,7 @@
               </a:defRPr>
             </a:pPr>
             <a:r>
+              <a:rPr sz="1600"/>
               <a:t>✅ RECOMMENDED FLOW (AFTER): 5 STEPS TO PAYMENT</a:t>
             </a:r>
           </a:p>
@@ -15505,6 +18260,7 @@
               </a:defRPr>
             </a:pPr>
             <a:r>
+              <a:rPr sz="1600"/>
               <a:t>1. Landing Page -&gt; 2. Select Plan -&gt; 3. Lightweight OTP -&gt; 4. 3 Quick Survey Taps (&lt;10s) -&gt; 5. JUSPAY PAYMENT GATEWAY -&gt; 6. Instant Active Subscription -&gt; 7. Progressive Profile Setup</a:t>
             </a:r>
           </a:p>
@@ -15520,6 +18276,7 @@
               </a:defRPr>
             </a:pPr>
             <a:r>
+              <a:rPr sz="1600"/>
               <a:t>🚀 Result: Frictionless path to payment. 100% of paying users enter the retention funnel.</a:t>
             </a:r>
           </a:p>
@@ -15534,7 +18291,7 @@
 </file>
 
 <file path=ppt/slides/slide9.xml><?xml version="1.0" encoding="utf-8"?>
-<p:sld xmlns:a="http://schemas.openxmlformats.org/drawingml/2006/main" xmlns:p="http://schemas.openxmlformats.org/presentationml/2006/main" xmlns:r="http://schemas.openxmlformats.org/officeDocument/2006/relationships">
+<p:sld xmlns:a="http://schemas.openxmlformats.org/drawingml/2006/main" xmlns:r="http://schemas.openxmlformats.org/officeDocument/2006/relationships" xmlns:p="http://schemas.openxmlformats.org/presentationml/2006/main">
   <p:cSld>
     <p:spTree>
       <p:nvGrpSpPr>
@@ -15542,7 +18299,14 @@
         <p:cNvGrpSpPr/>
         <p:nvPr/>
       </p:nvGrpSpPr>
-      <p:grpSpPr/>
+      <p:grpSpPr>
+        <a:xfrm>
+          <a:off x="0" y="0"/>
+          <a:ext cx="0" cy="0"/>
+          <a:chOff x="0" y="0"/>
+          <a:chExt cx="0" cy="0"/>
+        </a:xfrm>
+      </p:grpSpPr>
       <p:sp>
         <p:nvSpPr>
           <p:cNvPr id="2" name="Rectangle 1"/>
@@ -15583,6 +18347,7 @@
           <a:lstStyle/>
           <a:p>
             <a:pPr algn="ctr"/>
+            <a:endParaRPr sz="1600"/>
           </a:p>
         </p:txBody>
       </p:sp>
@@ -15595,7 +18360,7 @@
         <p:spPr>
           <a:xfrm>
             <a:off x="731520" y="365760"/>
-            <a:ext cx="10698480" cy="274320"/>
+            <a:ext cx="10698480" cy="246221"/>
           </a:xfrm>
           <a:prstGeom prst="rect">
             <a:avLst/>
@@ -15616,6 +18381,7 @@
               </a:defRPr>
             </a:pPr>
             <a:r>
+              <a:rPr sz="1600"/>
               <a:t>PROFILE EXPERIENCE</a:t>
             </a:r>
           </a:p>
@@ -15630,7 +18396,7 @@
         <p:spPr>
           <a:xfrm>
             <a:off x="731520" y="640080"/>
-            <a:ext cx="10698480" cy="502920"/>
+            <a:ext cx="10698480" cy="246221"/>
           </a:xfrm>
           <a:prstGeom prst="rect">
             <a:avLst/>
@@ -15651,6 +18417,7 @@
               </a:defRPr>
             </a:pPr>
             <a:r>
+              <a:rPr sz="1600"/>
               <a:t>Post-Payment Experience: 'Complete Your Profile' Screen</a:t>
             </a:r>
           </a:p>
@@ -15665,7 +18432,7 @@
         <p:spPr>
           <a:xfrm>
             <a:off x="731520" y="1170432"/>
-            <a:ext cx="10698480" cy="320040"/>
+            <a:ext cx="10698480" cy="246221"/>
           </a:xfrm>
           <a:prstGeom prst="rect">
             <a:avLst/>
@@ -15686,6 +18453,7 @@
               </a:defRPr>
             </a:pPr>
             <a:r>
+              <a:rPr sz="1600"/>
               <a:t>Framing profile collection as an empowering personalization step rather than a registration barrier</a:t>
             </a:r>
           </a:p>
@@ -15729,7 +18497,7 @@
           </a:fontRef>
         </p:style>
         <p:txBody>
-          <a:bodyPr rtlCol="0" anchor="ctr" lIns="274320" rIns="274320" tIns="274320"/>
+          <a:bodyPr lIns="274320" tIns="274320" rIns="274320" rtlCol="0" anchor="ctr"/>
           <a:lstStyle/>
           <a:p>
             <a:pPr algn="ctr">
@@ -15740,6 +18508,7 @@
               </a:defRPr>
             </a:pPr>
             <a:r>
+              <a:rPr sz="1600"/>
               <a:t>POST-PAYMENT PSYCHOLOGY &amp; UX:</a:t>
             </a:r>
           </a:p>
@@ -15755,18 +18524,28 @@
               </a:defRPr>
             </a:pPr>
             <a:r>
+              <a:rPr sz="1600"/>
               <a:t>• Framing: 'Your Sri Sri Yoga Subscription is Active! Personalize your daily practice...'</a:t>
             </a:r>
-            <a:br/>
-            <a:r>
+            <a:br>
+              <a:rPr sz="1600"/>
+            </a:br>
+            <a:r>
+              <a:rPr sz="1600"/>
               <a:t>• Progressive Disclosure: Present fields in intuitive logical blocks (Personal Info -&gt; Practice Batch -&gt; Health Notes).</a:t>
             </a:r>
-            <a:br/>
-            <a:r>
+            <a:br>
+              <a:rPr sz="1600"/>
+            </a:br>
+            <a:r>
+              <a:rPr sz="1600"/>
               <a:t>• Trust Multiplier: Since payment is already confirmed, user views profile questions as teacher preparation rather than data harvesting.</a:t>
             </a:r>
-            <a:br/>
-            <a:r>
+            <a:br>
+              <a:rPr sz="1600"/>
+            </a:br>
+            <a:r>
+              <a:rPr sz="1600"/>
               <a:t>• Skip Option: 'Skip for now &amp; start practicing' ensures zero blockage to live Zoom sessions.</a:t>
             </a:r>
           </a:p>
@@ -15810,7 +18589,7 @@
           </a:fontRef>
         </p:style>
         <p:txBody>
-          <a:bodyPr rtlCol="0" anchor="ctr" lIns="274320" rIns="274320" tIns="274320"/>
+          <a:bodyPr lIns="274320" tIns="274320" rIns="274320" rtlCol="0" anchor="ctr"/>
           <a:lstStyle/>
           <a:p>
             <a:pPr algn="ctr">
@@ -15821,6 +18600,7 @@
               </a:defRPr>
             </a:pPr>
             <a:r>
+              <a:rPr sz="1600"/>
               <a:t>FIELDS COLLECTED POST-PAYMENT:</a:t>
             </a:r>
           </a:p>
@@ -15836,26 +18616,42 @@
               </a:defRPr>
             </a:pPr>
             <a:r>
+              <a:rPr sz="1600"/>
               <a:t>1. Full Name (For official Sri Sri Yoga certificate)</a:t>
             </a:r>
-            <a:br/>
-            <a:r>
+            <a:br>
+              <a:rPr sz="1600"/>
+            </a:br>
+            <a:r>
+              <a:rPr sz="1600"/>
               <a:t>2. Email Address (For calendar invites &amp; receipts)</a:t>
             </a:r>
-            <a:br/>
-            <a:r>
+            <a:br>
+              <a:rPr sz="1600"/>
+            </a:br>
+            <a:r>
+              <a:rPr sz="1600"/>
               <a:t>3. Age &amp; Gender (For customized posture variations)</a:t>
             </a:r>
-            <a:br/>
-            <a:r>
+            <a:br>
+              <a:rPr sz="1600"/>
+            </a:br>
+            <a:r>
+              <a:rPr sz="1600"/>
               <a:t>4. City &amp; State (For regional ashram events)</a:t>
             </a:r>
-            <a:br/>
-            <a:r>
+            <a:br>
+              <a:rPr sz="1600"/>
+            </a:br>
+            <a:r>
+              <a:rPr sz="1600"/>
               <a:t>5. Preferred Batch Timing (6:00 AM / 7:30 AM / 5:30 PM / 6:30 PM)</a:t>
             </a:r>
-            <a:br/>
-            <a:r>
+            <a:br>
+              <a:rPr sz="1600"/>
+            </a:br>
+            <a:r>
+              <a:rPr sz="1600"/>
               <a:t>6. Health &amp; Injury Notes (Back pain, knee issues, blood pressure - shared confidentially with certified teachers)</a:t>
             </a:r>
           </a:p>
